--- a/docs/presentation.pptx
+++ b/docs/presentation.pptx
@@ -3635,7 +3635,7 @@
               </a:defRPr>
             </a:pPr>
             <a:r>
-              <a:t>Ensemble de test : 19 889 echantillons (80/20 split stratifie)</a:t>
+              <a:t>Ensemble de test : 19 889 echantillons (80/20 split stratifie)  |  20 features sans fuite de donnees</a:t>
             </a:r>
           </a:p>
         </p:txBody>
@@ -4267,7 +4267,7 @@
               </a:defRPr>
             </a:pPr>
             <a:r>
-              <a:t>1.0000</a:t>
+              <a:t>0.6760</a:t>
             </a:r>
           </a:p>
         </p:txBody>
@@ -4346,7 +4346,7 @@
               </a:defRPr>
             </a:pPr>
             <a:r>
-              <a:t>0.9982</a:t>
+              <a:t>0.9422</a:t>
             </a:r>
           </a:p>
         </p:txBody>
@@ -4425,7 +4425,7 @@
               </a:defRPr>
             </a:pPr>
             <a:r>
-              <a:t>0.9999</a:t>
+              <a:t>0.9782</a:t>
             </a:r>
           </a:p>
         </p:txBody>
@@ -4504,7 +4504,7 @@
               </a:defRPr>
             </a:pPr>
             <a:r>
-              <a:t>0.9983</a:t>
+              <a:t>0.9619</a:t>
             </a:r>
           </a:p>
         </p:txBody>
@@ -4583,7 +4583,7 @@
               </a:defRPr>
             </a:pPr>
             <a:r>
-              <a:t>0.9991</a:t>
+              <a:t>0.9700</a:t>
             </a:r>
           </a:p>
         </p:txBody>
@@ -4741,7 +4741,7 @@
               </a:defRPr>
             </a:pPr>
             <a:r>
-              <a:t>1.0000</a:t>
+              <a:t>0.6818</a:t>
             </a:r>
           </a:p>
         </p:txBody>
@@ -4820,7 +4820,7 @@
               </a:defRPr>
             </a:pPr>
             <a:r>
-              <a:t>0.9983</a:t>
+              <a:t>0.9481</a:t>
             </a:r>
           </a:p>
         </p:txBody>
@@ -4899,7 +4899,7 @@
               </a:defRPr>
             </a:pPr>
             <a:r>
-              <a:t>0.9992</a:t>
+              <a:t>0.9790</a:t>
             </a:r>
           </a:p>
         </p:txBody>
@@ -4978,7 +4978,7 @@
               </a:defRPr>
             </a:pPr>
             <a:r>
-              <a:t>0.9990</a:t>
+              <a:t>0.9672</a:t>
             </a:r>
           </a:p>
         </p:txBody>
@@ -5057,7 +5057,7 @@
               </a:defRPr>
             </a:pPr>
             <a:r>
-              <a:t>0.9991</a:t>
+              <a:t>0.9731</a:t>
             </a:r>
           </a:p>
         </p:txBody>
@@ -5215,7 +5215,7 @@
               </a:defRPr>
             </a:pPr>
             <a:r>
-              <a:t>1.0000</a:t>
+              <a:t>0.6950</a:t>
             </a:r>
           </a:p>
         </p:txBody>
@@ -5294,7 +5294,7 @@
               </a:defRPr>
             </a:pPr>
             <a:r>
-              <a:t>0.9983</a:t>
+              <a:t>0.9446</a:t>
             </a:r>
           </a:p>
         </p:txBody>
@@ -5373,7 +5373,7 @@
               </a:defRPr>
             </a:pPr>
             <a:r>
-              <a:t>0.9999</a:t>
+              <a:t>0.9790</a:t>
             </a:r>
           </a:p>
         </p:txBody>
@@ -5452,7 +5452,7 @@
               </a:defRPr>
             </a:pPr>
             <a:r>
-              <a:t>0.9983</a:t>
+              <a:t>0.9636</a:t>
             </a:r>
           </a:p>
         </p:txBody>
@@ -5531,7 +5531,7 @@
               </a:defRPr>
             </a:pPr>
             <a:r>
-              <a:t>0.9991</a:t>
+              <a:t>0.9712</a:t>
             </a:r>
           </a:p>
         </p:txBody>
@@ -5693,7 +5693,7 @@
               </a:defRPr>
             </a:pPr>
             <a:r>
-              <a:t>1.0000</a:t>
+              <a:t>0.6942</a:t>
             </a:r>
           </a:p>
         </p:txBody>
@@ -5774,7 +5774,7 @@
               </a:defRPr>
             </a:pPr>
             <a:r>
-              <a:t>0.9983</a:t>
+              <a:t>0.9585</a:t>
             </a:r>
           </a:p>
         </p:txBody>
@@ -5855,7 +5855,7 @@
               </a:defRPr>
             </a:pPr>
             <a:r>
-              <a:t>0.9998</a:t>
+              <a:t>0.9789</a:t>
             </a:r>
           </a:p>
         </p:txBody>
@@ -5936,7 +5936,7 @@
               </a:defRPr>
             </a:pPr>
             <a:r>
-              <a:t>0.9984</a:t>
+              <a:t>0.9783</a:t>
             </a:r>
           </a:p>
         </p:txBody>
@@ -6017,7 +6017,7 @@
               </a:defRPr>
             </a:pPr>
             <a:r>
-              <a:t>0.9991</a:t>
+              <a:t>0.9786</a:t>
             </a:r>
           </a:p>
         </p:txBody>
@@ -6445,7 +6445,7 @@
               </a:defRPr>
             </a:pPr>
             <a:r>
-              <a:t>590 (VN)</a:t>
+              <a:t>186 (VN)</a:t>
             </a:r>
           </a:p>
         </p:txBody>
@@ -6524,7 +6524,7 @@
               </a:defRPr>
             </a:pPr>
             <a:r>
-              <a:t>3 (FP)</a:t>
+              <a:t>407 (FP)</a:t>
             </a:r>
           </a:p>
         </p:txBody>
@@ -6682,7 +6682,7 @@
               </a:defRPr>
             </a:pPr>
             <a:r>
-              <a:t>31 (FN)</a:t>
+              <a:t>418 (FN)</a:t>
             </a:r>
           </a:p>
         </p:txBody>
@@ -6761,7 +6761,7 @@
               </a:defRPr>
             </a:pPr>
             <a:r>
-              <a:t>19 265 (VP)</a:t>
+              <a:t>18 878 (VP)</a:t>
             </a:r>
           </a:p>
         </p:txBody>
@@ -6881,7 +6881,7 @@
               </a:defRPr>
             </a:pPr>
             <a:r>
-              <a:t>AUC-ROC parfait (1.0) pour les 3 modeles</a:t>
+              <a:t>AUC-ROC : 0.69 (metrique honnete, sans fuite de donnees)</a:t>
             </a:r>
           </a:p>
           <a:p>
@@ -6897,7 +6897,7 @@
               </a:defRPr>
             </a:pPr>
             <a:r>
-              <a:t>Seulement 34 erreurs sur 19 889 predictions</a:t>
+              <a:t>825 erreurs sur 19 889  |  F1-Score : 0.979</a:t>
             </a:r>
           </a:p>
           <a:p>
@@ -6913,7 +6913,7 @@
               </a:defRPr>
             </a:pPr>
             <a:r>
-              <a:t>Ensemble retenu pour sa robustesse</a:t>
+              <a:t>Ensemble retenu pour sa robustesse (vote pondere)</a:t>
             </a:r>
           </a:p>
         </p:txBody>
@@ -8554,7 +8554,7 @@
               </a:defRPr>
             </a:pPr>
             <a:r>
-              <a:t>Prevision de la Demande (Prophet)</a:t>
+              <a:t>Prevision de la Demande (Chronos)</a:t>
             </a:r>
           </a:p>
         </p:txBody>
@@ -8625,7 +8625,7 @@
           <a:lstStyle/>
           <a:p>
             <a:pPr algn="l">
-              <a:defRPr sz="1500" b="0">
+              <a:defRPr sz="1400" b="0">
                 <a:solidFill>
                   <a:srgbClr val="7F8C8D"/>
                 </a:solidFill>
@@ -8633,7 +8633,7 @@
               </a:defRPr>
             </a:pPr>
             <a:r>
-              <a:t>Serie temporelle : Chiffre d'affaires quotidien en DZD sur 714 jours</a:t>
+              <a:t>Benchmark de 8 modeles  |  Serie temporelle : CA quotidien DZD sur 714 jours  |  Evaluation out-of-sample</a:t>
             </a:r>
           </a:p>
         </p:txBody>
@@ -8646,8 +8646,8 @@
         </p:nvSpPr>
         <p:spPr>
           <a:xfrm>
-            <a:off x="822960" y="2286000"/>
-            <a:ext cx="3200400" cy="502920"/>
+            <a:off x="548640" y="2103120"/>
+            <a:ext cx="2743200" cy="411480"/>
           </a:xfrm>
           <a:prstGeom prst="rect">
             <a:avLst/>
@@ -8689,8 +8689,8 @@
         </p:nvSpPr>
         <p:spPr>
           <a:xfrm>
-            <a:off x="822960" y="2313432"/>
-            <a:ext cx="3200400" cy="457200"/>
+            <a:off x="548640" y="2121408"/>
+            <a:ext cx="2743200" cy="365760"/>
           </a:xfrm>
           <a:prstGeom prst="rect">
             <a:avLst/>
@@ -8704,7 +8704,7 @@
           <a:lstStyle/>
           <a:p>
             <a:pPr algn="ctr">
-              <a:defRPr sz="1500" b="1">
+              <a:defRPr sz="1300" b="1">
                 <a:solidFill>
                   <a:srgbClr val="FFFFFF"/>
                 </a:solidFill>
@@ -8725,8 +8725,8 @@
         </p:nvSpPr>
         <p:spPr>
           <a:xfrm>
-            <a:off x="4023360" y="2286000"/>
-            <a:ext cx="2743200" cy="502920"/>
+            <a:off x="3291840" y="2103120"/>
+            <a:ext cx="2286000" cy="411480"/>
           </a:xfrm>
           <a:prstGeom prst="rect">
             <a:avLst/>
@@ -8768,8 +8768,8 @@
         </p:nvSpPr>
         <p:spPr>
           <a:xfrm>
-            <a:off x="4023360" y="2313432"/>
-            <a:ext cx="2743200" cy="457200"/>
+            <a:off x="3291840" y="2121408"/>
+            <a:ext cx="2286000" cy="365760"/>
           </a:xfrm>
           <a:prstGeom prst="rect">
             <a:avLst/>
@@ -8783,7 +8783,7 @@
           <a:lstStyle/>
           <a:p>
             <a:pPr algn="ctr">
-              <a:defRPr sz="1500" b="1">
+              <a:defRPr sz="1300" b="1">
                 <a:solidFill>
                   <a:srgbClr val="FFFFFF"/>
                 </a:solidFill>
@@ -8804,8 +8804,8 @@
         </p:nvSpPr>
         <p:spPr>
           <a:xfrm>
-            <a:off x="6766560" y="2286000"/>
-            <a:ext cx="2743200" cy="502920"/>
+            <a:off x="5577840" y="2103120"/>
+            <a:ext cx="2286000" cy="411480"/>
           </a:xfrm>
           <a:prstGeom prst="rect">
             <a:avLst/>
@@ -8847,8 +8847,8 @@
         </p:nvSpPr>
         <p:spPr>
           <a:xfrm>
-            <a:off x="6766560" y="2313432"/>
-            <a:ext cx="2743200" cy="457200"/>
+            <a:off x="5577840" y="2121408"/>
+            <a:ext cx="2286000" cy="365760"/>
           </a:xfrm>
           <a:prstGeom prst="rect">
             <a:avLst/>
@@ -8862,7 +8862,7 @@
           <a:lstStyle/>
           <a:p>
             <a:pPr algn="ctr">
-              <a:defRPr sz="1500" b="1">
+              <a:defRPr sz="1300" b="1">
                 <a:solidFill>
                   <a:srgbClr val="FFFFFF"/>
                 </a:solidFill>
@@ -8883,8 +8883,8 @@
         </p:nvSpPr>
         <p:spPr>
           <a:xfrm>
-            <a:off x="9509760" y="2286000"/>
-            <a:ext cx="2286000" cy="502920"/>
+            <a:off x="7863840" y="2103120"/>
+            <a:ext cx="1828800" cy="411480"/>
           </a:xfrm>
           <a:prstGeom prst="rect">
             <a:avLst/>
@@ -8926,8 +8926,8 @@
         </p:nvSpPr>
         <p:spPr>
           <a:xfrm>
-            <a:off x="9509760" y="2313432"/>
-            <a:ext cx="2286000" cy="457200"/>
+            <a:off x="7863840" y="2121408"/>
+            <a:ext cx="1828800" cy="365760"/>
           </a:xfrm>
           <a:prstGeom prst="rect">
             <a:avLst/>
@@ -8941,7 +8941,7 @@
           <a:lstStyle/>
           <a:p>
             <a:pPr algn="ctr">
-              <a:defRPr sz="1500" b="1">
+              <a:defRPr sz="1300" b="1">
                 <a:solidFill>
                   <a:srgbClr val="FFFFFF"/>
                 </a:solidFill>
@@ -8949,7 +8949,7 @@
               </a:defRPr>
             </a:pPr>
             <a:r>
-              <a:t>Amelioration</a:t>
+              <a:t>MAPE</a:t>
             </a:r>
           </a:p>
         </p:txBody>
@@ -8962,8 +8962,87 @@
         </p:nvSpPr>
         <p:spPr>
           <a:xfrm>
-            <a:off x="822960" y="2788920"/>
-            <a:ext cx="3200400" cy="502920"/>
+            <a:off x="9692640" y="2103120"/>
+            <a:ext cx="1828800" cy="411480"/>
+          </a:xfrm>
+          <a:prstGeom prst="rect">
+            <a:avLst/>
+          </a:prstGeom>
+          <a:solidFill>
+            <a:srgbClr val="1B3A5C"/>
+          </a:solidFill>
+          <a:ln>
+            <a:noFill/>
+          </a:ln>
+        </p:spPr>
+        <p:style>
+          <a:lnRef idx="1">
+            <a:schemeClr val="accent1"/>
+          </a:lnRef>
+          <a:fillRef idx="3">
+            <a:schemeClr val="accent1"/>
+          </a:fillRef>
+          <a:effectRef idx="2">
+            <a:schemeClr val="accent1"/>
+          </a:effectRef>
+          <a:fontRef idx="minor">
+            <a:schemeClr val="lt1"/>
+          </a:fontRef>
+        </p:style>
+        <p:txBody>
+          <a:bodyPr rtlCol="0" anchor="ctr"/>
+          <a:lstStyle/>
+          <a:p>
+            <a:pPr algn="ctr"/>
+          </a:p>
+        </p:txBody>
+      </p:sp>
+      <p:sp>
+        <p:nvSpPr>
+          <p:cNvPr id="15" name="TextBox 14"/>
+          <p:cNvSpPr txBox="1"/>
+          <p:nvPr/>
+        </p:nvSpPr>
+        <p:spPr>
+          <a:xfrm>
+            <a:off x="9692640" y="2121408"/>
+            <a:ext cx="1828800" cy="365760"/>
+          </a:xfrm>
+          <a:prstGeom prst="rect">
+            <a:avLst/>
+          </a:prstGeom>
+          <a:noFill/>
+        </p:spPr>
+        <p:txBody>
+          <a:bodyPr wrap="square">
+            <a:spAutoFit/>
+          </a:bodyPr>
+          <a:lstStyle/>
+          <a:p>
+            <a:pPr algn="ctr">
+              <a:defRPr sz="1300" b="1">
+                <a:solidFill>
+                  <a:srgbClr val="FFFFFF"/>
+                </a:solidFill>
+                <a:latin typeface="Calibri"/>
+              </a:defRPr>
+            </a:pPr>
+            <a:r>
+              <a:t>vs MA7</a:t>
+            </a:r>
+          </a:p>
+        </p:txBody>
+      </p:sp>
+      <p:sp>
+        <p:nvSpPr>
+          <p:cNvPr id="16" name="Rectangle 15"/>
+          <p:cNvSpPr/>
+          <p:nvPr/>
+        </p:nvSpPr>
+        <p:spPr>
+          <a:xfrm>
+            <a:off x="548640" y="2514600"/>
+            <a:ext cx="2743200" cy="384048"/>
           </a:xfrm>
           <a:prstGeom prst="rect">
             <a:avLst/>
@@ -8999,14 +9078,14 @@
       </p:sp>
       <p:sp>
         <p:nvSpPr>
-          <p:cNvPr id="15" name="TextBox 14"/>
-          <p:cNvSpPr txBox="1"/>
-          <p:nvPr/>
-        </p:nvSpPr>
-        <p:spPr>
-          <a:xfrm>
-            <a:off x="822960" y="2816352"/>
-            <a:ext cx="3200400" cy="457200"/>
+          <p:cNvPr id="17" name="TextBox 16"/>
+          <p:cNvSpPr txBox="1"/>
+          <p:nvPr/>
+        </p:nvSpPr>
+        <p:spPr>
+          <a:xfrm>
+            <a:off x="548640" y="2540000"/>
+            <a:ext cx="2743200" cy="347472"/>
           </a:xfrm>
           <a:prstGeom prst="rect">
             <a:avLst/>
@@ -9020,7 +9099,7 @@
           <a:lstStyle/>
           <a:p>
             <a:pPr algn="ctr">
-              <a:defRPr sz="1400" b="0">
+              <a:defRPr sz="1200" b="0">
                 <a:solidFill>
                   <a:srgbClr val="2C3E50"/>
                 </a:solidFill>
@@ -9028,21 +9107,21 @@
               </a:defRPr>
             </a:pPr>
             <a:r>
-              <a:t>Moyenne Mobile (7j)</a:t>
-            </a:r>
-          </a:p>
-        </p:txBody>
-      </p:sp>
-      <p:sp>
-        <p:nvSpPr>
-          <p:cNvPr id="16" name="Rectangle 15"/>
+              <a:t>Naive (last value)</a:t>
+            </a:r>
+          </a:p>
+        </p:txBody>
+      </p:sp>
+      <p:sp>
+        <p:nvSpPr>
+          <p:cNvPr id="18" name="Rectangle 17"/>
           <p:cNvSpPr/>
           <p:nvPr/>
         </p:nvSpPr>
         <p:spPr>
           <a:xfrm>
-            <a:off x="4023360" y="2788920"/>
-            <a:ext cx="2743200" cy="502920"/>
+            <a:off x="3291840" y="2514600"/>
+            <a:ext cx="2286000" cy="384048"/>
           </a:xfrm>
           <a:prstGeom prst="rect">
             <a:avLst/>
@@ -9078,14 +9157,14 @@
       </p:sp>
       <p:sp>
         <p:nvSpPr>
-          <p:cNvPr id="17" name="TextBox 16"/>
-          <p:cNvSpPr txBox="1"/>
-          <p:nvPr/>
-        </p:nvSpPr>
-        <p:spPr>
-          <a:xfrm>
-            <a:off x="4023360" y="2816352"/>
-            <a:ext cx="2743200" cy="457200"/>
+          <p:cNvPr id="19" name="TextBox 18"/>
+          <p:cNvSpPr txBox="1"/>
+          <p:nvPr/>
+        </p:nvSpPr>
+        <p:spPr>
+          <a:xfrm>
+            <a:off x="3291840" y="2540000"/>
+            <a:ext cx="2286000" cy="347472"/>
           </a:xfrm>
           <a:prstGeom prst="rect">
             <a:avLst/>
@@ -9099,7 +9178,7 @@
           <a:lstStyle/>
           <a:p>
             <a:pPr algn="ctr">
-              <a:defRPr sz="1400" b="0">
+              <a:defRPr sz="1200" b="0">
                 <a:solidFill>
                   <a:srgbClr val="2C3E50"/>
                 </a:solidFill>
@@ -9107,21 +9186,21 @@
               </a:defRPr>
             </a:pPr>
             <a:r>
-              <a:t>301 401</a:t>
-            </a:r>
-          </a:p>
-        </p:txBody>
-      </p:sp>
-      <p:sp>
-        <p:nvSpPr>
-          <p:cNvPr id="18" name="Rectangle 17"/>
+              <a:t>422 968</a:t>
+            </a:r>
+          </a:p>
+        </p:txBody>
+      </p:sp>
+      <p:sp>
+        <p:nvSpPr>
+          <p:cNvPr id="20" name="Rectangle 19"/>
           <p:cNvSpPr/>
           <p:nvPr/>
         </p:nvSpPr>
         <p:spPr>
           <a:xfrm>
-            <a:off x="6766560" y="2788920"/>
-            <a:ext cx="2743200" cy="502920"/>
+            <a:off x="5577840" y="2514600"/>
+            <a:ext cx="2286000" cy="384048"/>
           </a:xfrm>
           <a:prstGeom prst="rect">
             <a:avLst/>
@@ -9157,14 +9236,14 @@
       </p:sp>
       <p:sp>
         <p:nvSpPr>
-          <p:cNvPr id="19" name="TextBox 18"/>
-          <p:cNvSpPr txBox="1"/>
-          <p:nvPr/>
-        </p:nvSpPr>
-        <p:spPr>
-          <a:xfrm>
-            <a:off x="6766560" y="2816352"/>
-            <a:ext cx="2743200" cy="457200"/>
+          <p:cNvPr id="21" name="TextBox 20"/>
+          <p:cNvSpPr txBox="1"/>
+          <p:nvPr/>
+        </p:nvSpPr>
+        <p:spPr>
+          <a:xfrm>
+            <a:off x="5577840" y="2540000"/>
+            <a:ext cx="2286000" cy="347472"/>
           </a:xfrm>
           <a:prstGeom prst="rect">
             <a:avLst/>
@@ -9178,7 +9257,7 @@
           <a:lstStyle/>
           <a:p>
             <a:pPr algn="ctr">
-              <a:defRPr sz="1400" b="0">
+              <a:defRPr sz="1200" b="0">
                 <a:solidFill>
                   <a:srgbClr val="2C3E50"/>
                 </a:solidFill>
@@ -9186,21 +9265,21 @@
               </a:defRPr>
             </a:pPr>
             <a:r>
-              <a:t>371 511</a:t>
-            </a:r>
-          </a:p>
-        </p:txBody>
-      </p:sp>
-      <p:sp>
-        <p:nvSpPr>
-          <p:cNvPr id="20" name="Rectangle 19"/>
+              <a:t>489 543</a:t>
+            </a:r>
+          </a:p>
+        </p:txBody>
+      </p:sp>
+      <p:sp>
+        <p:nvSpPr>
+          <p:cNvPr id="22" name="Rectangle 21"/>
           <p:cNvSpPr/>
           <p:nvPr/>
         </p:nvSpPr>
         <p:spPr>
           <a:xfrm>
-            <a:off x="9509760" y="2788920"/>
-            <a:ext cx="2286000" cy="502920"/>
+            <a:off x="7863840" y="2514600"/>
+            <a:ext cx="1828800" cy="384048"/>
           </a:xfrm>
           <a:prstGeom prst="rect">
             <a:avLst/>
@@ -9236,14 +9315,14 @@
       </p:sp>
       <p:sp>
         <p:nvSpPr>
-          <p:cNvPr id="21" name="TextBox 20"/>
-          <p:cNvSpPr txBox="1"/>
-          <p:nvPr/>
-        </p:nvSpPr>
-        <p:spPr>
-          <a:xfrm>
-            <a:off x="9509760" y="2816352"/>
-            <a:ext cx="2286000" cy="457200"/>
+          <p:cNvPr id="23" name="TextBox 22"/>
+          <p:cNvSpPr txBox="1"/>
+          <p:nvPr/>
+        </p:nvSpPr>
+        <p:spPr>
+          <a:xfrm>
+            <a:off x="7863840" y="2540000"/>
+            <a:ext cx="1828800" cy="347472"/>
           </a:xfrm>
           <a:prstGeom prst="rect">
             <a:avLst/>
@@ -9257,7 +9336,7 @@
           <a:lstStyle/>
           <a:p>
             <a:pPr algn="ctr">
-              <a:defRPr sz="1400" b="0">
+              <a:defRPr sz="1200" b="0">
                 <a:solidFill>
                   <a:srgbClr val="2C3E50"/>
                 </a:solidFill>
@@ -9265,21 +9344,2075 @@
               </a:defRPr>
             </a:pPr>
             <a:r>
-              <a:t>--- (baseline)</a:t>
-            </a:r>
-          </a:p>
-        </p:txBody>
-      </p:sp>
-      <p:sp>
-        <p:nvSpPr>
-          <p:cNvPr id="22" name="Rectangle 21"/>
+              <a:t>231%</a:t>
+            </a:r>
+          </a:p>
+        </p:txBody>
+      </p:sp>
+      <p:sp>
+        <p:nvSpPr>
+          <p:cNvPr id="24" name="Rectangle 23"/>
           <p:cNvSpPr/>
           <p:nvPr/>
         </p:nvSpPr>
         <p:spPr>
           <a:xfrm>
-            <a:off x="822960" y="3291840"/>
-            <a:ext cx="3200400" cy="502920"/>
+            <a:off x="9692640" y="2514600"/>
+            <a:ext cx="1828800" cy="384048"/>
+          </a:xfrm>
+          <a:prstGeom prst="rect">
+            <a:avLst/>
+          </a:prstGeom>
+          <a:solidFill>
+            <a:srgbClr val="F2F3F4"/>
+          </a:solidFill>
+          <a:ln>
+            <a:noFill/>
+          </a:ln>
+        </p:spPr>
+        <p:style>
+          <a:lnRef idx="1">
+            <a:schemeClr val="accent1"/>
+          </a:lnRef>
+          <a:fillRef idx="3">
+            <a:schemeClr val="accent1"/>
+          </a:fillRef>
+          <a:effectRef idx="2">
+            <a:schemeClr val="accent1"/>
+          </a:effectRef>
+          <a:fontRef idx="minor">
+            <a:schemeClr val="lt1"/>
+          </a:fontRef>
+        </p:style>
+        <p:txBody>
+          <a:bodyPr rtlCol="0" anchor="ctr"/>
+          <a:lstStyle/>
+          <a:p>
+            <a:pPr algn="ctr"/>
+          </a:p>
+        </p:txBody>
+      </p:sp>
+      <p:sp>
+        <p:nvSpPr>
+          <p:cNvPr id="25" name="TextBox 24"/>
+          <p:cNvSpPr txBox="1"/>
+          <p:nvPr/>
+        </p:nvSpPr>
+        <p:spPr>
+          <a:xfrm>
+            <a:off x="9692640" y="2540000"/>
+            <a:ext cx="1828800" cy="347472"/>
+          </a:xfrm>
+          <a:prstGeom prst="rect">
+            <a:avLst/>
+          </a:prstGeom>
+          <a:noFill/>
+        </p:spPr>
+        <p:txBody>
+          <a:bodyPr wrap="square">
+            <a:spAutoFit/>
+          </a:bodyPr>
+          <a:lstStyle/>
+          <a:p>
+            <a:pPr algn="ctr">
+              <a:defRPr sz="1200" b="0">
+                <a:solidFill>
+                  <a:srgbClr val="2C3E50"/>
+                </a:solidFill>
+                <a:latin typeface="Calibri"/>
+              </a:defRPr>
+            </a:pPr>
+            <a:r>
+              <a:t>-40.3%</a:t>
+            </a:r>
+          </a:p>
+        </p:txBody>
+      </p:sp>
+      <p:sp>
+        <p:nvSpPr>
+          <p:cNvPr id="26" name="Rectangle 25"/>
+          <p:cNvSpPr/>
+          <p:nvPr/>
+        </p:nvSpPr>
+        <p:spPr>
+          <a:xfrm>
+            <a:off x="548640" y="2898648"/>
+            <a:ext cx="2743200" cy="384048"/>
+          </a:xfrm>
+          <a:prstGeom prst="rect">
+            <a:avLst/>
+          </a:prstGeom>
+          <a:solidFill>
+            <a:srgbClr val="FFFFFF"/>
+          </a:solidFill>
+          <a:ln>
+            <a:noFill/>
+          </a:ln>
+        </p:spPr>
+        <p:style>
+          <a:lnRef idx="1">
+            <a:schemeClr val="accent1"/>
+          </a:lnRef>
+          <a:fillRef idx="3">
+            <a:schemeClr val="accent1"/>
+          </a:fillRef>
+          <a:effectRef idx="2">
+            <a:schemeClr val="accent1"/>
+          </a:effectRef>
+          <a:fontRef idx="minor">
+            <a:schemeClr val="lt1"/>
+          </a:fontRef>
+        </p:style>
+        <p:txBody>
+          <a:bodyPr rtlCol="0" anchor="ctr"/>
+          <a:lstStyle/>
+          <a:p>
+            <a:pPr algn="ctr"/>
+          </a:p>
+        </p:txBody>
+      </p:sp>
+      <p:sp>
+        <p:nvSpPr>
+          <p:cNvPr id="27" name="TextBox 26"/>
+          <p:cNvSpPr txBox="1"/>
+          <p:nvPr/>
+        </p:nvSpPr>
+        <p:spPr>
+          <a:xfrm>
+            <a:off x="548640" y="2924048"/>
+            <a:ext cx="2743200" cy="347472"/>
+          </a:xfrm>
+          <a:prstGeom prst="rect">
+            <a:avLst/>
+          </a:prstGeom>
+          <a:noFill/>
+        </p:spPr>
+        <p:txBody>
+          <a:bodyPr wrap="square">
+            <a:spAutoFit/>
+          </a:bodyPr>
+          <a:lstStyle/>
+          <a:p>
+            <a:pPr algn="ctr">
+              <a:defRPr sz="1200" b="0">
+                <a:solidFill>
+                  <a:srgbClr val="2C3E50"/>
+                </a:solidFill>
+                <a:latin typeface="Calibri"/>
+              </a:defRPr>
+            </a:pPr>
+            <a:r>
+              <a:t>Seasonal Naive (7d)</a:t>
+            </a:r>
+          </a:p>
+        </p:txBody>
+      </p:sp>
+      <p:sp>
+        <p:nvSpPr>
+          <p:cNvPr id="28" name="Rectangle 27"/>
+          <p:cNvSpPr/>
+          <p:nvPr/>
+        </p:nvSpPr>
+        <p:spPr>
+          <a:xfrm>
+            <a:off x="3291840" y="2898648"/>
+            <a:ext cx="2286000" cy="384048"/>
+          </a:xfrm>
+          <a:prstGeom prst="rect">
+            <a:avLst/>
+          </a:prstGeom>
+          <a:solidFill>
+            <a:srgbClr val="FFFFFF"/>
+          </a:solidFill>
+          <a:ln>
+            <a:noFill/>
+          </a:ln>
+        </p:spPr>
+        <p:style>
+          <a:lnRef idx="1">
+            <a:schemeClr val="accent1"/>
+          </a:lnRef>
+          <a:fillRef idx="3">
+            <a:schemeClr val="accent1"/>
+          </a:fillRef>
+          <a:effectRef idx="2">
+            <a:schemeClr val="accent1"/>
+          </a:effectRef>
+          <a:fontRef idx="minor">
+            <a:schemeClr val="lt1"/>
+          </a:fontRef>
+        </p:style>
+        <p:txBody>
+          <a:bodyPr rtlCol="0" anchor="ctr"/>
+          <a:lstStyle/>
+          <a:p>
+            <a:pPr algn="ctr"/>
+          </a:p>
+        </p:txBody>
+      </p:sp>
+      <p:sp>
+        <p:nvSpPr>
+          <p:cNvPr id="29" name="TextBox 28"/>
+          <p:cNvSpPr txBox="1"/>
+          <p:nvPr/>
+        </p:nvSpPr>
+        <p:spPr>
+          <a:xfrm>
+            <a:off x="3291840" y="2924048"/>
+            <a:ext cx="2286000" cy="347472"/>
+          </a:xfrm>
+          <a:prstGeom prst="rect">
+            <a:avLst/>
+          </a:prstGeom>
+          <a:noFill/>
+        </p:spPr>
+        <p:txBody>
+          <a:bodyPr wrap="square">
+            <a:spAutoFit/>
+          </a:bodyPr>
+          <a:lstStyle/>
+          <a:p>
+            <a:pPr algn="ctr">
+              <a:defRPr sz="1200" b="0">
+                <a:solidFill>
+                  <a:srgbClr val="2C3E50"/>
+                </a:solidFill>
+                <a:latin typeface="Calibri"/>
+              </a:defRPr>
+            </a:pPr>
+            <a:r>
+              <a:t>327 196</a:t>
+            </a:r>
+          </a:p>
+        </p:txBody>
+      </p:sp>
+      <p:sp>
+        <p:nvSpPr>
+          <p:cNvPr id="30" name="Rectangle 29"/>
+          <p:cNvSpPr/>
+          <p:nvPr/>
+        </p:nvSpPr>
+        <p:spPr>
+          <a:xfrm>
+            <a:off x="5577840" y="2898648"/>
+            <a:ext cx="2286000" cy="384048"/>
+          </a:xfrm>
+          <a:prstGeom prst="rect">
+            <a:avLst/>
+          </a:prstGeom>
+          <a:solidFill>
+            <a:srgbClr val="FFFFFF"/>
+          </a:solidFill>
+          <a:ln>
+            <a:noFill/>
+          </a:ln>
+        </p:spPr>
+        <p:style>
+          <a:lnRef idx="1">
+            <a:schemeClr val="accent1"/>
+          </a:lnRef>
+          <a:fillRef idx="3">
+            <a:schemeClr val="accent1"/>
+          </a:fillRef>
+          <a:effectRef idx="2">
+            <a:schemeClr val="accent1"/>
+          </a:effectRef>
+          <a:fontRef idx="minor">
+            <a:schemeClr val="lt1"/>
+          </a:fontRef>
+        </p:style>
+        <p:txBody>
+          <a:bodyPr rtlCol="0" anchor="ctr"/>
+          <a:lstStyle/>
+          <a:p>
+            <a:pPr algn="ctr"/>
+          </a:p>
+        </p:txBody>
+      </p:sp>
+      <p:sp>
+        <p:nvSpPr>
+          <p:cNvPr id="31" name="TextBox 30"/>
+          <p:cNvSpPr txBox="1"/>
+          <p:nvPr/>
+        </p:nvSpPr>
+        <p:spPr>
+          <a:xfrm>
+            <a:off x="5577840" y="2924048"/>
+            <a:ext cx="2286000" cy="347472"/>
+          </a:xfrm>
+          <a:prstGeom prst="rect">
+            <a:avLst/>
+          </a:prstGeom>
+          <a:noFill/>
+        </p:spPr>
+        <p:txBody>
+          <a:bodyPr wrap="square">
+            <a:spAutoFit/>
+          </a:bodyPr>
+          <a:lstStyle/>
+          <a:p>
+            <a:pPr algn="ctr">
+              <a:defRPr sz="1200" b="0">
+                <a:solidFill>
+                  <a:srgbClr val="2C3E50"/>
+                </a:solidFill>
+                <a:latin typeface="Calibri"/>
+              </a:defRPr>
+            </a:pPr>
+            <a:r>
+              <a:t>437 764</a:t>
+            </a:r>
+          </a:p>
+        </p:txBody>
+      </p:sp>
+      <p:sp>
+        <p:nvSpPr>
+          <p:cNvPr id="32" name="Rectangle 31"/>
+          <p:cNvSpPr/>
+          <p:nvPr/>
+        </p:nvSpPr>
+        <p:spPr>
+          <a:xfrm>
+            <a:off x="7863840" y="2898648"/>
+            <a:ext cx="1828800" cy="384048"/>
+          </a:xfrm>
+          <a:prstGeom prst="rect">
+            <a:avLst/>
+          </a:prstGeom>
+          <a:solidFill>
+            <a:srgbClr val="FFFFFF"/>
+          </a:solidFill>
+          <a:ln>
+            <a:noFill/>
+          </a:ln>
+        </p:spPr>
+        <p:style>
+          <a:lnRef idx="1">
+            <a:schemeClr val="accent1"/>
+          </a:lnRef>
+          <a:fillRef idx="3">
+            <a:schemeClr val="accent1"/>
+          </a:fillRef>
+          <a:effectRef idx="2">
+            <a:schemeClr val="accent1"/>
+          </a:effectRef>
+          <a:fontRef idx="minor">
+            <a:schemeClr val="lt1"/>
+          </a:fontRef>
+        </p:style>
+        <p:txBody>
+          <a:bodyPr rtlCol="0" anchor="ctr"/>
+          <a:lstStyle/>
+          <a:p>
+            <a:pPr algn="ctr"/>
+          </a:p>
+        </p:txBody>
+      </p:sp>
+      <p:sp>
+        <p:nvSpPr>
+          <p:cNvPr id="33" name="TextBox 32"/>
+          <p:cNvSpPr txBox="1"/>
+          <p:nvPr/>
+        </p:nvSpPr>
+        <p:spPr>
+          <a:xfrm>
+            <a:off x="7863840" y="2924048"/>
+            <a:ext cx="1828800" cy="347472"/>
+          </a:xfrm>
+          <a:prstGeom prst="rect">
+            <a:avLst/>
+          </a:prstGeom>
+          <a:noFill/>
+        </p:spPr>
+        <p:txBody>
+          <a:bodyPr wrap="square">
+            <a:spAutoFit/>
+          </a:bodyPr>
+          <a:lstStyle/>
+          <a:p>
+            <a:pPr algn="ctr">
+              <a:defRPr sz="1200" b="0">
+                <a:solidFill>
+                  <a:srgbClr val="2C3E50"/>
+                </a:solidFill>
+                <a:latin typeface="Calibri"/>
+              </a:defRPr>
+            </a:pPr>
+            <a:r>
+              <a:t>170%</a:t>
+            </a:r>
+          </a:p>
+        </p:txBody>
+      </p:sp>
+      <p:sp>
+        <p:nvSpPr>
+          <p:cNvPr id="34" name="Rectangle 33"/>
+          <p:cNvSpPr/>
+          <p:nvPr/>
+        </p:nvSpPr>
+        <p:spPr>
+          <a:xfrm>
+            <a:off x="9692640" y="2898648"/>
+            <a:ext cx="1828800" cy="384048"/>
+          </a:xfrm>
+          <a:prstGeom prst="rect">
+            <a:avLst/>
+          </a:prstGeom>
+          <a:solidFill>
+            <a:srgbClr val="FFFFFF"/>
+          </a:solidFill>
+          <a:ln>
+            <a:noFill/>
+          </a:ln>
+        </p:spPr>
+        <p:style>
+          <a:lnRef idx="1">
+            <a:schemeClr val="accent1"/>
+          </a:lnRef>
+          <a:fillRef idx="3">
+            <a:schemeClr val="accent1"/>
+          </a:fillRef>
+          <a:effectRef idx="2">
+            <a:schemeClr val="accent1"/>
+          </a:effectRef>
+          <a:fontRef idx="minor">
+            <a:schemeClr val="lt1"/>
+          </a:fontRef>
+        </p:style>
+        <p:txBody>
+          <a:bodyPr rtlCol="0" anchor="ctr"/>
+          <a:lstStyle/>
+          <a:p>
+            <a:pPr algn="ctr"/>
+          </a:p>
+        </p:txBody>
+      </p:sp>
+      <p:sp>
+        <p:nvSpPr>
+          <p:cNvPr id="35" name="TextBox 34"/>
+          <p:cNvSpPr txBox="1"/>
+          <p:nvPr/>
+        </p:nvSpPr>
+        <p:spPr>
+          <a:xfrm>
+            <a:off x="9692640" y="2924048"/>
+            <a:ext cx="1828800" cy="347472"/>
+          </a:xfrm>
+          <a:prstGeom prst="rect">
+            <a:avLst/>
+          </a:prstGeom>
+          <a:noFill/>
+        </p:spPr>
+        <p:txBody>
+          <a:bodyPr wrap="square">
+            <a:spAutoFit/>
+          </a:bodyPr>
+          <a:lstStyle/>
+          <a:p>
+            <a:pPr algn="ctr">
+              <a:defRPr sz="1200" b="0">
+                <a:solidFill>
+                  <a:srgbClr val="2C3E50"/>
+                </a:solidFill>
+                <a:latin typeface="Calibri"/>
+              </a:defRPr>
+            </a:pPr>
+            <a:r>
+              <a:t>-8.6%</a:t>
+            </a:r>
+          </a:p>
+        </p:txBody>
+      </p:sp>
+      <p:sp>
+        <p:nvSpPr>
+          <p:cNvPr id="36" name="Rectangle 35"/>
+          <p:cNvSpPr/>
+          <p:nvPr/>
+        </p:nvSpPr>
+        <p:spPr>
+          <a:xfrm>
+            <a:off x="548640" y="3282696"/>
+            <a:ext cx="2743200" cy="384048"/>
+          </a:xfrm>
+          <a:prstGeom prst="rect">
+            <a:avLst/>
+          </a:prstGeom>
+          <a:solidFill>
+            <a:srgbClr val="F2F3F4"/>
+          </a:solidFill>
+          <a:ln>
+            <a:noFill/>
+          </a:ln>
+        </p:spPr>
+        <p:style>
+          <a:lnRef idx="1">
+            <a:schemeClr val="accent1"/>
+          </a:lnRef>
+          <a:fillRef idx="3">
+            <a:schemeClr val="accent1"/>
+          </a:fillRef>
+          <a:effectRef idx="2">
+            <a:schemeClr val="accent1"/>
+          </a:effectRef>
+          <a:fontRef idx="minor">
+            <a:schemeClr val="lt1"/>
+          </a:fontRef>
+        </p:style>
+        <p:txBody>
+          <a:bodyPr rtlCol="0" anchor="ctr"/>
+          <a:lstStyle/>
+          <a:p>
+            <a:pPr algn="ctr"/>
+          </a:p>
+        </p:txBody>
+      </p:sp>
+      <p:sp>
+        <p:nvSpPr>
+          <p:cNvPr id="37" name="TextBox 36"/>
+          <p:cNvSpPr txBox="1"/>
+          <p:nvPr/>
+        </p:nvSpPr>
+        <p:spPr>
+          <a:xfrm>
+            <a:off x="548640" y="3308096"/>
+            <a:ext cx="2743200" cy="347472"/>
+          </a:xfrm>
+          <a:prstGeom prst="rect">
+            <a:avLst/>
+          </a:prstGeom>
+          <a:noFill/>
+        </p:spPr>
+        <p:txBody>
+          <a:bodyPr wrap="square">
+            <a:spAutoFit/>
+          </a:bodyPr>
+          <a:lstStyle/>
+          <a:p>
+            <a:pPr algn="ctr">
+              <a:defRPr sz="1200" b="0">
+                <a:solidFill>
+                  <a:srgbClr val="2C3E50"/>
+                </a:solidFill>
+                <a:latin typeface="Calibri"/>
+              </a:defRPr>
+            </a:pPr>
+            <a:r>
+              <a:t>Moyenne Mobile (7j)</a:t>
+            </a:r>
+          </a:p>
+        </p:txBody>
+      </p:sp>
+      <p:sp>
+        <p:nvSpPr>
+          <p:cNvPr id="38" name="Rectangle 37"/>
+          <p:cNvSpPr/>
+          <p:nvPr/>
+        </p:nvSpPr>
+        <p:spPr>
+          <a:xfrm>
+            <a:off x="3291840" y="3282696"/>
+            <a:ext cx="2286000" cy="384048"/>
+          </a:xfrm>
+          <a:prstGeom prst="rect">
+            <a:avLst/>
+          </a:prstGeom>
+          <a:solidFill>
+            <a:srgbClr val="F2F3F4"/>
+          </a:solidFill>
+          <a:ln>
+            <a:noFill/>
+          </a:ln>
+        </p:spPr>
+        <p:style>
+          <a:lnRef idx="1">
+            <a:schemeClr val="accent1"/>
+          </a:lnRef>
+          <a:fillRef idx="3">
+            <a:schemeClr val="accent1"/>
+          </a:fillRef>
+          <a:effectRef idx="2">
+            <a:schemeClr val="accent1"/>
+          </a:effectRef>
+          <a:fontRef idx="minor">
+            <a:schemeClr val="lt1"/>
+          </a:fontRef>
+        </p:style>
+        <p:txBody>
+          <a:bodyPr rtlCol="0" anchor="ctr"/>
+          <a:lstStyle/>
+          <a:p>
+            <a:pPr algn="ctr"/>
+          </a:p>
+        </p:txBody>
+      </p:sp>
+      <p:sp>
+        <p:nvSpPr>
+          <p:cNvPr id="39" name="TextBox 38"/>
+          <p:cNvSpPr txBox="1"/>
+          <p:nvPr/>
+        </p:nvSpPr>
+        <p:spPr>
+          <a:xfrm>
+            <a:off x="3291840" y="3308096"/>
+            <a:ext cx="2286000" cy="347472"/>
+          </a:xfrm>
+          <a:prstGeom prst="rect">
+            <a:avLst/>
+          </a:prstGeom>
+          <a:noFill/>
+        </p:spPr>
+        <p:txBody>
+          <a:bodyPr wrap="square">
+            <a:spAutoFit/>
+          </a:bodyPr>
+          <a:lstStyle/>
+          <a:p>
+            <a:pPr algn="ctr">
+              <a:defRPr sz="1200" b="0">
+                <a:solidFill>
+                  <a:srgbClr val="2C3E50"/>
+                </a:solidFill>
+                <a:latin typeface="Calibri"/>
+              </a:defRPr>
+            </a:pPr>
+            <a:r>
+              <a:t>301 401</a:t>
+            </a:r>
+          </a:p>
+        </p:txBody>
+      </p:sp>
+      <p:sp>
+        <p:nvSpPr>
+          <p:cNvPr id="40" name="Rectangle 39"/>
+          <p:cNvSpPr/>
+          <p:nvPr/>
+        </p:nvSpPr>
+        <p:spPr>
+          <a:xfrm>
+            <a:off x="5577840" y="3282696"/>
+            <a:ext cx="2286000" cy="384048"/>
+          </a:xfrm>
+          <a:prstGeom prst="rect">
+            <a:avLst/>
+          </a:prstGeom>
+          <a:solidFill>
+            <a:srgbClr val="F2F3F4"/>
+          </a:solidFill>
+          <a:ln>
+            <a:noFill/>
+          </a:ln>
+        </p:spPr>
+        <p:style>
+          <a:lnRef idx="1">
+            <a:schemeClr val="accent1"/>
+          </a:lnRef>
+          <a:fillRef idx="3">
+            <a:schemeClr val="accent1"/>
+          </a:fillRef>
+          <a:effectRef idx="2">
+            <a:schemeClr val="accent1"/>
+          </a:effectRef>
+          <a:fontRef idx="minor">
+            <a:schemeClr val="lt1"/>
+          </a:fontRef>
+        </p:style>
+        <p:txBody>
+          <a:bodyPr rtlCol="0" anchor="ctr"/>
+          <a:lstStyle/>
+          <a:p>
+            <a:pPr algn="ctr"/>
+          </a:p>
+        </p:txBody>
+      </p:sp>
+      <p:sp>
+        <p:nvSpPr>
+          <p:cNvPr id="41" name="TextBox 40"/>
+          <p:cNvSpPr txBox="1"/>
+          <p:nvPr/>
+        </p:nvSpPr>
+        <p:spPr>
+          <a:xfrm>
+            <a:off x="5577840" y="3308096"/>
+            <a:ext cx="2286000" cy="347472"/>
+          </a:xfrm>
+          <a:prstGeom prst="rect">
+            <a:avLst/>
+          </a:prstGeom>
+          <a:noFill/>
+        </p:spPr>
+        <p:txBody>
+          <a:bodyPr wrap="square">
+            <a:spAutoFit/>
+          </a:bodyPr>
+          <a:lstStyle/>
+          <a:p>
+            <a:pPr algn="ctr">
+              <a:defRPr sz="1200" b="0">
+                <a:solidFill>
+                  <a:srgbClr val="2C3E50"/>
+                </a:solidFill>
+                <a:latin typeface="Calibri"/>
+              </a:defRPr>
+            </a:pPr>
+            <a:r>
+              <a:t>371 511</a:t>
+            </a:r>
+          </a:p>
+        </p:txBody>
+      </p:sp>
+      <p:sp>
+        <p:nvSpPr>
+          <p:cNvPr id="42" name="Rectangle 41"/>
+          <p:cNvSpPr/>
+          <p:nvPr/>
+        </p:nvSpPr>
+        <p:spPr>
+          <a:xfrm>
+            <a:off x="7863840" y="3282696"/>
+            <a:ext cx="1828800" cy="384048"/>
+          </a:xfrm>
+          <a:prstGeom prst="rect">
+            <a:avLst/>
+          </a:prstGeom>
+          <a:solidFill>
+            <a:srgbClr val="F2F3F4"/>
+          </a:solidFill>
+          <a:ln>
+            <a:noFill/>
+          </a:ln>
+        </p:spPr>
+        <p:style>
+          <a:lnRef idx="1">
+            <a:schemeClr val="accent1"/>
+          </a:lnRef>
+          <a:fillRef idx="3">
+            <a:schemeClr val="accent1"/>
+          </a:fillRef>
+          <a:effectRef idx="2">
+            <a:schemeClr val="accent1"/>
+          </a:effectRef>
+          <a:fontRef idx="minor">
+            <a:schemeClr val="lt1"/>
+          </a:fontRef>
+        </p:style>
+        <p:txBody>
+          <a:bodyPr rtlCol="0" anchor="ctr"/>
+          <a:lstStyle/>
+          <a:p>
+            <a:pPr algn="ctr"/>
+          </a:p>
+        </p:txBody>
+      </p:sp>
+      <p:sp>
+        <p:nvSpPr>
+          <p:cNvPr id="43" name="TextBox 42"/>
+          <p:cNvSpPr txBox="1"/>
+          <p:nvPr/>
+        </p:nvSpPr>
+        <p:spPr>
+          <a:xfrm>
+            <a:off x="7863840" y="3308096"/>
+            <a:ext cx="1828800" cy="347472"/>
+          </a:xfrm>
+          <a:prstGeom prst="rect">
+            <a:avLst/>
+          </a:prstGeom>
+          <a:noFill/>
+        </p:spPr>
+        <p:txBody>
+          <a:bodyPr wrap="square">
+            <a:spAutoFit/>
+          </a:bodyPr>
+          <a:lstStyle/>
+          <a:p>
+            <a:pPr algn="ctr">
+              <a:defRPr sz="1200" b="0">
+                <a:solidFill>
+                  <a:srgbClr val="2C3E50"/>
+                </a:solidFill>
+                <a:latin typeface="Calibri"/>
+              </a:defRPr>
+            </a:pPr>
+            <a:r>
+              <a:t>156%</a:t>
+            </a:r>
+          </a:p>
+        </p:txBody>
+      </p:sp>
+      <p:sp>
+        <p:nvSpPr>
+          <p:cNvPr id="44" name="Rectangle 43"/>
+          <p:cNvSpPr/>
+          <p:nvPr/>
+        </p:nvSpPr>
+        <p:spPr>
+          <a:xfrm>
+            <a:off x="9692640" y="3282696"/>
+            <a:ext cx="1828800" cy="384048"/>
+          </a:xfrm>
+          <a:prstGeom prst="rect">
+            <a:avLst/>
+          </a:prstGeom>
+          <a:solidFill>
+            <a:srgbClr val="F2F3F4"/>
+          </a:solidFill>
+          <a:ln>
+            <a:noFill/>
+          </a:ln>
+        </p:spPr>
+        <p:style>
+          <a:lnRef idx="1">
+            <a:schemeClr val="accent1"/>
+          </a:lnRef>
+          <a:fillRef idx="3">
+            <a:schemeClr val="accent1"/>
+          </a:fillRef>
+          <a:effectRef idx="2">
+            <a:schemeClr val="accent1"/>
+          </a:effectRef>
+          <a:fontRef idx="minor">
+            <a:schemeClr val="lt1"/>
+          </a:fontRef>
+        </p:style>
+        <p:txBody>
+          <a:bodyPr rtlCol="0" anchor="ctr"/>
+          <a:lstStyle/>
+          <a:p>
+            <a:pPr algn="ctr"/>
+          </a:p>
+        </p:txBody>
+      </p:sp>
+      <p:sp>
+        <p:nvSpPr>
+          <p:cNvPr id="45" name="TextBox 44"/>
+          <p:cNvSpPr txBox="1"/>
+          <p:nvPr/>
+        </p:nvSpPr>
+        <p:spPr>
+          <a:xfrm>
+            <a:off x="9692640" y="3308096"/>
+            <a:ext cx="1828800" cy="347472"/>
+          </a:xfrm>
+          <a:prstGeom prst="rect">
+            <a:avLst/>
+          </a:prstGeom>
+          <a:noFill/>
+        </p:spPr>
+        <p:txBody>
+          <a:bodyPr wrap="square">
+            <a:spAutoFit/>
+          </a:bodyPr>
+          <a:lstStyle/>
+          <a:p>
+            <a:pPr algn="ctr">
+              <a:defRPr sz="1200" b="0">
+                <a:solidFill>
+                  <a:srgbClr val="2C3E50"/>
+                </a:solidFill>
+                <a:latin typeface="Calibri"/>
+              </a:defRPr>
+            </a:pPr>
+            <a:r>
+              <a:t>baseline</a:t>
+            </a:r>
+          </a:p>
+        </p:txBody>
+      </p:sp>
+      <p:sp>
+        <p:nvSpPr>
+          <p:cNvPr id="46" name="Rectangle 45"/>
+          <p:cNvSpPr/>
+          <p:nvPr/>
+        </p:nvSpPr>
+        <p:spPr>
+          <a:xfrm>
+            <a:off x="548640" y="3666744"/>
+            <a:ext cx="2743200" cy="384048"/>
+          </a:xfrm>
+          <a:prstGeom prst="rect">
+            <a:avLst/>
+          </a:prstGeom>
+          <a:solidFill>
+            <a:srgbClr val="FFFFFF"/>
+          </a:solidFill>
+          <a:ln>
+            <a:noFill/>
+          </a:ln>
+        </p:spPr>
+        <p:style>
+          <a:lnRef idx="1">
+            <a:schemeClr val="accent1"/>
+          </a:lnRef>
+          <a:fillRef idx="3">
+            <a:schemeClr val="accent1"/>
+          </a:fillRef>
+          <a:effectRef idx="2">
+            <a:schemeClr val="accent1"/>
+          </a:effectRef>
+          <a:fontRef idx="minor">
+            <a:schemeClr val="lt1"/>
+          </a:fontRef>
+        </p:style>
+        <p:txBody>
+          <a:bodyPr rtlCol="0" anchor="ctr"/>
+          <a:lstStyle/>
+          <a:p>
+            <a:pPr algn="ctr"/>
+          </a:p>
+        </p:txBody>
+      </p:sp>
+      <p:sp>
+        <p:nvSpPr>
+          <p:cNvPr id="47" name="TextBox 46"/>
+          <p:cNvSpPr txBox="1"/>
+          <p:nvPr/>
+        </p:nvSpPr>
+        <p:spPr>
+          <a:xfrm>
+            <a:off x="548640" y="3692144"/>
+            <a:ext cx="2743200" cy="347472"/>
+          </a:xfrm>
+          <a:prstGeom prst="rect">
+            <a:avLst/>
+          </a:prstGeom>
+          <a:noFill/>
+        </p:spPr>
+        <p:txBody>
+          <a:bodyPr wrap="square">
+            <a:spAutoFit/>
+          </a:bodyPr>
+          <a:lstStyle/>
+          <a:p>
+            <a:pPr algn="ctr">
+              <a:defRPr sz="1200" b="0">
+                <a:solidFill>
+                  <a:srgbClr val="2C3E50"/>
+                </a:solidFill>
+                <a:latin typeface="Calibri"/>
+              </a:defRPr>
+            </a:pPr>
+            <a:r>
+              <a:t>Holt-Winters (ETS)</a:t>
+            </a:r>
+          </a:p>
+        </p:txBody>
+      </p:sp>
+      <p:sp>
+        <p:nvSpPr>
+          <p:cNvPr id="48" name="Rectangle 47"/>
+          <p:cNvSpPr/>
+          <p:nvPr/>
+        </p:nvSpPr>
+        <p:spPr>
+          <a:xfrm>
+            <a:off x="3291840" y="3666744"/>
+            <a:ext cx="2286000" cy="384048"/>
+          </a:xfrm>
+          <a:prstGeom prst="rect">
+            <a:avLst/>
+          </a:prstGeom>
+          <a:solidFill>
+            <a:srgbClr val="FFFFFF"/>
+          </a:solidFill>
+          <a:ln>
+            <a:noFill/>
+          </a:ln>
+        </p:spPr>
+        <p:style>
+          <a:lnRef idx="1">
+            <a:schemeClr val="accent1"/>
+          </a:lnRef>
+          <a:fillRef idx="3">
+            <a:schemeClr val="accent1"/>
+          </a:fillRef>
+          <a:effectRef idx="2">
+            <a:schemeClr val="accent1"/>
+          </a:effectRef>
+          <a:fontRef idx="minor">
+            <a:schemeClr val="lt1"/>
+          </a:fontRef>
+        </p:style>
+        <p:txBody>
+          <a:bodyPr rtlCol="0" anchor="ctr"/>
+          <a:lstStyle/>
+          <a:p>
+            <a:pPr algn="ctr"/>
+          </a:p>
+        </p:txBody>
+      </p:sp>
+      <p:sp>
+        <p:nvSpPr>
+          <p:cNvPr id="49" name="TextBox 48"/>
+          <p:cNvSpPr txBox="1"/>
+          <p:nvPr/>
+        </p:nvSpPr>
+        <p:spPr>
+          <a:xfrm>
+            <a:off x="3291840" y="3692144"/>
+            <a:ext cx="2286000" cy="347472"/>
+          </a:xfrm>
+          <a:prstGeom prst="rect">
+            <a:avLst/>
+          </a:prstGeom>
+          <a:noFill/>
+        </p:spPr>
+        <p:txBody>
+          <a:bodyPr wrap="square">
+            <a:spAutoFit/>
+          </a:bodyPr>
+          <a:lstStyle/>
+          <a:p>
+            <a:pPr algn="ctr">
+              <a:defRPr sz="1200" b="0">
+                <a:solidFill>
+                  <a:srgbClr val="2C3E50"/>
+                </a:solidFill>
+                <a:latin typeface="Calibri"/>
+              </a:defRPr>
+            </a:pPr>
+            <a:r>
+              <a:t>400 363</a:t>
+            </a:r>
+          </a:p>
+        </p:txBody>
+      </p:sp>
+      <p:sp>
+        <p:nvSpPr>
+          <p:cNvPr id="50" name="Rectangle 49"/>
+          <p:cNvSpPr/>
+          <p:nvPr/>
+        </p:nvSpPr>
+        <p:spPr>
+          <a:xfrm>
+            <a:off x="5577840" y="3666744"/>
+            <a:ext cx="2286000" cy="384048"/>
+          </a:xfrm>
+          <a:prstGeom prst="rect">
+            <a:avLst/>
+          </a:prstGeom>
+          <a:solidFill>
+            <a:srgbClr val="FFFFFF"/>
+          </a:solidFill>
+          <a:ln>
+            <a:noFill/>
+          </a:ln>
+        </p:spPr>
+        <p:style>
+          <a:lnRef idx="1">
+            <a:schemeClr val="accent1"/>
+          </a:lnRef>
+          <a:fillRef idx="3">
+            <a:schemeClr val="accent1"/>
+          </a:fillRef>
+          <a:effectRef idx="2">
+            <a:schemeClr val="accent1"/>
+          </a:effectRef>
+          <a:fontRef idx="minor">
+            <a:schemeClr val="lt1"/>
+          </a:fontRef>
+        </p:style>
+        <p:txBody>
+          <a:bodyPr rtlCol="0" anchor="ctr"/>
+          <a:lstStyle/>
+          <a:p>
+            <a:pPr algn="ctr"/>
+          </a:p>
+        </p:txBody>
+      </p:sp>
+      <p:sp>
+        <p:nvSpPr>
+          <p:cNvPr id="51" name="TextBox 50"/>
+          <p:cNvSpPr txBox="1"/>
+          <p:nvPr/>
+        </p:nvSpPr>
+        <p:spPr>
+          <a:xfrm>
+            <a:off x="5577840" y="3692144"/>
+            <a:ext cx="2286000" cy="347472"/>
+          </a:xfrm>
+          <a:prstGeom prst="rect">
+            <a:avLst/>
+          </a:prstGeom>
+          <a:noFill/>
+        </p:spPr>
+        <p:txBody>
+          <a:bodyPr wrap="square">
+            <a:spAutoFit/>
+          </a:bodyPr>
+          <a:lstStyle/>
+          <a:p>
+            <a:pPr algn="ctr">
+              <a:defRPr sz="1200" b="0">
+                <a:solidFill>
+                  <a:srgbClr val="2C3E50"/>
+                </a:solidFill>
+                <a:latin typeface="Calibri"/>
+              </a:defRPr>
+            </a:pPr>
+            <a:r>
+              <a:t>485 037</a:t>
+            </a:r>
+          </a:p>
+        </p:txBody>
+      </p:sp>
+      <p:sp>
+        <p:nvSpPr>
+          <p:cNvPr id="52" name="Rectangle 51"/>
+          <p:cNvSpPr/>
+          <p:nvPr/>
+        </p:nvSpPr>
+        <p:spPr>
+          <a:xfrm>
+            <a:off x="7863840" y="3666744"/>
+            <a:ext cx="1828800" cy="384048"/>
+          </a:xfrm>
+          <a:prstGeom prst="rect">
+            <a:avLst/>
+          </a:prstGeom>
+          <a:solidFill>
+            <a:srgbClr val="FFFFFF"/>
+          </a:solidFill>
+          <a:ln>
+            <a:noFill/>
+          </a:ln>
+        </p:spPr>
+        <p:style>
+          <a:lnRef idx="1">
+            <a:schemeClr val="accent1"/>
+          </a:lnRef>
+          <a:fillRef idx="3">
+            <a:schemeClr val="accent1"/>
+          </a:fillRef>
+          <a:effectRef idx="2">
+            <a:schemeClr val="accent1"/>
+          </a:effectRef>
+          <a:fontRef idx="minor">
+            <a:schemeClr val="lt1"/>
+          </a:fontRef>
+        </p:style>
+        <p:txBody>
+          <a:bodyPr rtlCol="0" anchor="ctr"/>
+          <a:lstStyle/>
+          <a:p>
+            <a:pPr algn="ctr"/>
+          </a:p>
+        </p:txBody>
+      </p:sp>
+      <p:sp>
+        <p:nvSpPr>
+          <p:cNvPr id="53" name="TextBox 52"/>
+          <p:cNvSpPr txBox="1"/>
+          <p:nvPr/>
+        </p:nvSpPr>
+        <p:spPr>
+          <a:xfrm>
+            <a:off x="7863840" y="3692144"/>
+            <a:ext cx="1828800" cy="347472"/>
+          </a:xfrm>
+          <a:prstGeom prst="rect">
+            <a:avLst/>
+          </a:prstGeom>
+          <a:noFill/>
+        </p:spPr>
+        <p:txBody>
+          <a:bodyPr wrap="square">
+            <a:spAutoFit/>
+          </a:bodyPr>
+          <a:lstStyle/>
+          <a:p>
+            <a:pPr algn="ctr">
+              <a:defRPr sz="1200" b="0">
+                <a:solidFill>
+                  <a:srgbClr val="2C3E50"/>
+                </a:solidFill>
+                <a:latin typeface="Calibri"/>
+              </a:defRPr>
+            </a:pPr>
+            <a:r>
+              <a:t>175%</a:t>
+            </a:r>
+          </a:p>
+        </p:txBody>
+      </p:sp>
+      <p:sp>
+        <p:nvSpPr>
+          <p:cNvPr id="54" name="Rectangle 53"/>
+          <p:cNvSpPr/>
+          <p:nvPr/>
+        </p:nvSpPr>
+        <p:spPr>
+          <a:xfrm>
+            <a:off x="9692640" y="3666744"/>
+            <a:ext cx="1828800" cy="384048"/>
+          </a:xfrm>
+          <a:prstGeom prst="rect">
+            <a:avLst/>
+          </a:prstGeom>
+          <a:solidFill>
+            <a:srgbClr val="FFFFFF"/>
+          </a:solidFill>
+          <a:ln>
+            <a:noFill/>
+          </a:ln>
+        </p:spPr>
+        <p:style>
+          <a:lnRef idx="1">
+            <a:schemeClr val="accent1"/>
+          </a:lnRef>
+          <a:fillRef idx="3">
+            <a:schemeClr val="accent1"/>
+          </a:fillRef>
+          <a:effectRef idx="2">
+            <a:schemeClr val="accent1"/>
+          </a:effectRef>
+          <a:fontRef idx="minor">
+            <a:schemeClr val="lt1"/>
+          </a:fontRef>
+        </p:style>
+        <p:txBody>
+          <a:bodyPr rtlCol="0" anchor="ctr"/>
+          <a:lstStyle/>
+          <a:p>
+            <a:pPr algn="ctr"/>
+          </a:p>
+        </p:txBody>
+      </p:sp>
+      <p:sp>
+        <p:nvSpPr>
+          <p:cNvPr id="55" name="TextBox 54"/>
+          <p:cNvSpPr txBox="1"/>
+          <p:nvPr/>
+        </p:nvSpPr>
+        <p:spPr>
+          <a:xfrm>
+            <a:off x="9692640" y="3692144"/>
+            <a:ext cx="1828800" cy="347472"/>
+          </a:xfrm>
+          <a:prstGeom prst="rect">
+            <a:avLst/>
+          </a:prstGeom>
+          <a:noFill/>
+        </p:spPr>
+        <p:txBody>
+          <a:bodyPr wrap="square">
+            <a:spAutoFit/>
+          </a:bodyPr>
+          <a:lstStyle/>
+          <a:p>
+            <a:pPr algn="ctr">
+              <a:defRPr sz="1200" b="0">
+                <a:solidFill>
+                  <a:srgbClr val="2C3E50"/>
+                </a:solidFill>
+                <a:latin typeface="Calibri"/>
+              </a:defRPr>
+            </a:pPr>
+            <a:r>
+              <a:t>-32.8%</a:t>
+            </a:r>
+          </a:p>
+        </p:txBody>
+      </p:sp>
+      <p:sp>
+        <p:nvSpPr>
+          <p:cNvPr id="56" name="Rectangle 55"/>
+          <p:cNvSpPr/>
+          <p:nvPr/>
+        </p:nvSpPr>
+        <p:spPr>
+          <a:xfrm>
+            <a:off x="548640" y="4050792"/>
+            <a:ext cx="2743200" cy="384048"/>
+          </a:xfrm>
+          <a:prstGeom prst="rect">
+            <a:avLst/>
+          </a:prstGeom>
+          <a:solidFill>
+            <a:srgbClr val="F2F3F4"/>
+          </a:solidFill>
+          <a:ln>
+            <a:noFill/>
+          </a:ln>
+        </p:spPr>
+        <p:style>
+          <a:lnRef idx="1">
+            <a:schemeClr val="accent1"/>
+          </a:lnRef>
+          <a:fillRef idx="3">
+            <a:schemeClr val="accent1"/>
+          </a:fillRef>
+          <a:effectRef idx="2">
+            <a:schemeClr val="accent1"/>
+          </a:effectRef>
+          <a:fontRef idx="minor">
+            <a:schemeClr val="lt1"/>
+          </a:fontRef>
+        </p:style>
+        <p:txBody>
+          <a:bodyPr rtlCol="0" anchor="ctr"/>
+          <a:lstStyle/>
+          <a:p>
+            <a:pPr algn="ctr"/>
+          </a:p>
+        </p:txBody>
+      </p:sp>
+      <p:sp>
+        <p:nvSpPr>
+          <p:cNvPr id="57" name="TextBox 56"/>
+          <p:cNvSpPr txBox="1"/>
+          <p:nvPr/>
+        </p:nvSpPr>
+        <p:spPr>
+          <a:xfrm>
+            <a:off x="548640" y="4076192"/>
+            <a:ext cx="2743200" cy="347472"/>
+          </a:xfrm>
+          <a:prstGeom prst="rect">
+            <a:avLst/>
+          </a:prstGeom>
+          <a:noFill/>
+        </p:spPr>
+        <p:txBody>
+          <a:bodyPr wrap="square">
+            <a:spAutoFit/>
+          </a:bodyPr>
+          <a:lstStyle/>
+          <a:p>
+            <a:pPr algn="ctr">
+              <a:defRPr sz="1200" b="0">
+                <a:solidFill>
+                  <a:srgbClr val="2C3E50"/>
+                </a:solidFill>
+                <a:latin typeface="Calibri"/>
+              </a:defRPr>
+            </a:pPr>
+            <a:r>
+              <a:t>SARIMAX</a:t>
+            </a:r>
+          </a:p>
+        </p:txBody>
+      </p:sp>
+      <p:sp>
+        <p:nvSpPr>
+          <p:cNvPr id="58" name="Rectangle 57"/>
+          <p:cNvSpPr/>
+          <p:nvPr/>
+        </p:nvSpPr>
+        <p:spPr>
+          <a:xfrm>
+            <a:off x="3291840" y="4050792"/>
+            <a:ext cx="2286000" cy="384048"/>
+          </a:xfrm>
+          <a:prstGeom prst="rect">
+            <a:avLst/>
+          </a:prstGeom>
+          <a:solidFill>
+            <a:srgbClr val="F2F3F4"/>
+          </a:solidFill>
+          <a:ln>
+            <a:noFill/>
+          </a:ln>
+        </p:spPr>
+        <p:style>
+          <a:lnRef idx="1">
+            <a:schemeClr val="accent1"/>
+          </a:lnRef>
+          <a:fillRef idx="3">
+            <a:schemeClr val="accent1"/>
+          </a:fillRef>
+          <a:effectRef idx="2">
+            <a:schemeClr val="accent1"/>
+          </a:effectRef>
+          <a:fontRef idx="minor">
+            <a:schemeClr val="lt1"/>
+          </a:fontRef>
+        </p:style>
+        <p:txBody>
+          <a:bodyPr rtlCol="0" anchor="ctr"/>
+          <a:lstStyle/>
+          <a:p>
+            <a:pPr algn="ctr"/>
+          </a:p>
+        </p:txBody>
+      </p:sp>
+      <p:sp>
+        <p:nvSpPr>
+          <p:cNvPr id="59" name="TextBox 58"/>
+          <p:cNvSpPr txBox="1"/>
+          <p:nvPr/>
+        </p:nvSpPr>
+        <p:spPr>
+          <a:xfrm>
+            <a:off x="3291840" y="4076192"/>
+            <a:ext cx="2286000" cy="347472"/>
+          </a:xfrm>
+          <a:prstGeom prst="rect">
+            <a:avLst/>
+          </a:prstGeom>
+          <a:noFill/>
+        </p:spPr>
+        <p:txBody>
+          <a:bodyPr wrap="square">
+            <a:spAutoFit/>
+          </a:bodyPr>
+          <a:lstStyle/>
+          <a:p>
+            <a:pPr algn="ctr">
+              <a:defRPr sz="1200" b="0">
+                <a:solidFill>
+                  <a:srgbClr val="2C3E50"/>
+                </a:solidFill>
+                <a:latin typeface="Calibri"/>
+              </a:defRPr>
+            </a:pPr>
+            <a:r>
+              <a:t>413 834</a:t>
+            </a:r>
+          </a:p>
+        </p:txBody>
+      </p:sp>
+      <p:sp>
+        <p:nvSpPr>
+          <p:cNvPr id="60" name="Rectangle 59"/>
+          <p:cNvSpPr/>
+          <p:nvPr/>
+        </p:nvSpPr>
+        <p:spPr>
+          <a:xfrm>
+            <a:off x="5577840" y="4050792"/>
+            <a:ext cx="2286000" cy="384048"/>
+          </a:xfrm>
+          <a:prstGeom prst="rect">
+            <a:avLst/>
+          </a:prstGeom>
+          <a:solidFill>
+            <a:srgbClr val="F2F3F4"/>
+          </a:solidFill>
+          <a:ln>
+            <a:noFill/>
+          </a:ln>
+        </p:spPr>
+        <p:style>
+          <a:lnRef idx="1">
+            <a:schemeClr val="accent1"/>
+          </a:lnRef>
+          <a:fillRef idx="3">
+            <a:schemeClr val="accent1"/>
+          </a:fillRef>
+          <a:effectRef idx="2">
+            <a:schemeClr val="accent1"/>
+          </a:effectRef>
+          <a:fontRef idx="minor">
+            <a:schemeClr val="lt1"/>
+          </a:fontRef>
+        </p:style>
+        <p:txBody>
+          <a:bodyPr rtlCol="0" anchor="ctr"/>
+          <a:lstStyle/>
+          <a:p>
+            <a:pPr algn="ctr"/>
+          </a:p>
+        </p:txBody>
+      </p:sp>
+      <p:sp>
+        <p:nvSpPr>
+          <p:cNvPr id="61" name="TextBox 60"/>
+          <p:cNvSpPr txBox="1"/>
+          <p:nvPr/>
+        </p:nvSpPr>
+        <p:spPr>
+          <a:xfrm>
+            <a:off x="5577840" y="4076192"/>
+            <a:ext cx="2286000" cy="347472"/>
+          </a:xfrm>
+          <a:prstGeom prst="rect">
+            <a:avLst/>
+          </a:prstGeom>
+          <a:noFill/>
+        </p:spPr>
+        <p:txBody>
+          <a:bodyPr wrap="square">
+            <a:spAutoFit/>
+          </a:bodyPr>
+          <a:lstStyle/>
+          <a:p>
+            <a:pPr algn="ctr">
+              <a:defRPr sz="1200" b="0">
+                <a:solidFill>
+                  <a:srgbClr val="2C3E50"/>
+                </a:solidFill>
+                <a:latin typeface="Calibri"/>
+              </a:defRPr>
+            </a:pPr>
+            <a:r>
+              <a:t>468 574</a:t>
+            </a:r>
+          </a:p>
+        </p:txBody>
+      </p:sp>
+      <p:sp>
+        <p:nvSpPr>
+          <p:cNvPr id="62" name="Rectangle 61"/>
+          <p:cNvSpPr/>
+          <p:nvPr/>
+        </p:nvSpPr>
+        <p:spPr>
+          <a:xfrm>
+            <a:off x="7863840" y="4050792"/>
+            <a:ext cx="1828800" cy="384048"/>
+          </a:xfrm>
+          <a:prstGeom prst="rect">
+            <a:avLst/>
+          </a:prstGeom>
+          <a:solidFill>
+            <a:srgbClr val="F2F3F4"/>
+          </a:solidFill>
+          <a:ln>
+            <a:noFill/>
+          </a:ln>
+        </p:spPr>
+        <p:style>
+          <a:lnRef idx="1">
+            <a:schemeClr val="accent1"/>
+          </a:lnRef>
+          <a:fillRef idx="3">
+            <a:schemeClr val="accent1"/>
+          </a:fillRef>
+          <a:effectRef idx="2">
+            <a:schemeClr val="accent1"/>
+          </a:effectRef>
+          <a:fontRef idx="minor">
+            <a:schemeClr val="lt1"/>
+          </a:fontRef>
+        </p:style>
+        <p:txBody>
+          <a:bodyPr rtlCol="0" anchor="ctr"/>
+          <a:lstStyle/>
+          <a:p>
+            <a:pPr algn="ctr"/>
+          </a:p>
+        </p:txBody>
+      </p:sp>
+      <p:sp>
+        <p:nvSpPr>
+          <p:cNvPr id="63" name="TextBox 62"/>
+          <p:cNvSpPr txBox="1"/>
+          <p:nvPr/>
+        </p:nvSpPr>
+        <p:spPr>
+          <a:xfrm>
+            <a:off x="7863840" y="4076192"/>
+            <a:ext cx="1828800" cy="347472"/>
+          </a:xfrm>
+          <a:prstGeom prst="rect">
+            <a:avLst/>
+          </a:prstGeom>
+          <a:noFill/>
+        </p:spPr>
+        <p:txBody>
+          <a:bodyPr wrap="square">
+            <a:spAutoFit/>
+          </a:bodyPr>
+          <a:lstStyle/>
+          <a:p>
+            <a:pPr algn="ctr">
+              <a:defRPr sz="1200" b="0">
+                <a:solidFill>
+                  <a:srgbClr val="2C3E50"/>
+                </a:solidFill>
+                <a:latin typeface="Calibri"/>
+              </a:defRPr>
+            </a:pPr>
+            <a:r>
+              <a:t>250%</a:t>
+            </a:r>
+          </a:p>
+        </p:txBody>
+      </p:sp>
+      <p:sp>
+        <p:nvSpPr>
+          <p:cNvPr id="64" name="Rectangle 63"/>
+          <p:cNvSpPr/>
+          <p:nvPr/>
+        </p:nvSpPr>
+        <p:spPr>
+          <a:xfrm>
+            <a:off x="9692640" y="4050792"/>
+            <a:ext cx="1828800" cy="384048"/>
+          </a:xfrm>
+          <a:prstGeom prst="rect">
+            <a:avLst/>
+          </a:prstGeom>
+          <a:solidFill>
+            <a:srgbClr val="F2F3F4"/>
+          </a:solidFill>
+          <a:ln>
+            <a:noFill/>
+          </a:ln>
+        </p:spPr>
+        <p:style>
+          <a:lnRef idx="1">
+            <a:schemeClr val="accent1"/>
+          </a:lnRef>
+          <a:fillRef idx="3">
+            <a:schemeClr val="accent1"/>
+          </a:fillRef>
+          <a:effectRef idx="2">
+            <a:schemeClr val="accent1"/>
+          </a:effectRef>
+          <a:fontRef idx="minor">
+            <a:schemeClr val="lt1"/>
+          </a:fontRef>
+        </p:style>
+        <p:txBody>
+          <a:bodyPr rtlCol="0" anchor="ctr"/>
+          <a:lstStyle/>
+          <a:p>
+            <a:pPr algn="ctr"/>
+          </a:p>
+        </p:txBody>
+      </p:sp>
+      <p:sp>
+        <p:nvSpPr>
+          <p:cNvPr id="65" name="TextBox 64"/>
+          <p:cNvSpPr txBox="1"/>
+          <p:nvPr/>
+        </p:nvSpPr>
+        <p:spPr>
+          <a:xfrm>
+            <a:off x="9692640" y="4076192"/>
+            <a:ext cx="1828800" cy="347472"/>
+          </a:xfrm>
+          <a:prstGeom prst="rect">
+            <a:avLst/>
+          </a:prstGeom>
+          <a:noFill/>
+        </p:spPr>
+        <p:txBody>
+          <a:bodyPr wrap="square">
+            <a:spAutoFit/>
+          </a:bodyPr>
+          <a:lstStyle/>
+          <a:p>
+            <a:pPr algn="ctr">
+              <a:defRPr sz="1200" b="0">
+                <a:solidFill>
+                  <a:srgbClr val="2C3E50"/>
+                </a:solidFill>
+                <a:latin typeface="Calibri"/>
+              </a:defRPr>
+            </a:pPr>
+            <a:r>
+              <a:t>-37.3%</a:t>
+            </a:r>
+          </a:p>
+        </p:txBody>
+      </p:sp>
+      <p:sp>
+        <p:nvSpPr>
+          <p:cNvPr id="66" name="Rectangle 65"/>
+          <p:cNvSpPr/>
+          <p:nvPr/>
+        </p:nvSpPr>
+        <p:spPr>
+          <a:xfrm>
+            <a:off x="548640" y="4434840"/>
+            <a:ext cx="2743200" cy="384048"/>
+          </a:xfrm>
+          <a:prstGeom prst="rect">
+            <a:avLst/>
+          </a:prstGeom>
+          <a:solidFill>
+            <a:srgbClr val="FFFFFF"/>
+          </a:solidFill>
+          <a:ln>
+            <a:noFill/>
+          </a:ln>
+        </p:spPr>
+        <p:style>
+          <a:lnRef idx="1">
+            <a:schemeClr val="accent1"/>
+          </a:lnRef>
+          <a:fillRef idx="3">
+            <a:schemeClr val="accent1"/>
+          </a:fillRef>
+          <a:effectRef idx="2">
+            <a:schemeClr val="accent1"/>
+          </a:effectRef>
+          <a:fontRef idx="minor">
+            <a:schemeClr val="lt1"/>
+          </a:fontRef>
+        </p:style>
+        <p:txBody>
+          <a:bodyPr rtlCol="0" anchor="ctr"/>
+          <a:lstStyle/>
+          <a:p>
+            <a:pPr algn="ctr"/>
+          </a:p>
+        </p:txBody>
+      </p:sp>
+      <p:sp>
+        <p:nvSpPr>
+          <p:cNvPr id="67" name="TextBox 66"/>
+          <p:cNvSpPr txBox="1"/>
+          <p:nvPr/>
+        </p:nvSpPr>
+        <p:spPr>
+          <a:xfrm>
+            <a:off x="548640" y="4460240"/>
+            <a:ext cx="2743200" cy="347472"/>
+          </a:xfrm>
+          <a:prstGeom prst="rect">
+            <a:avLst/>
+          </a:prstGeom>
+          <a:noFill/>
+        </p:spPr>
+        <p:txBody>
+          <a:bodyPr wrap="square">
+            <a:spAutoFit/>
+          </a:bodyPr>
+          <a:lstStyle/>
+          <a:p>
+            <a:pPr algn="ctr">
+              <a:defRPr sz="1200" b="0">
+                <a:solidFill>
+                  <a:srgbClr val="2C3E50"/>
+                </a:solidFill>
+                <a:latin typeface="Calibri"/>
+              </a:defRPr>
+            </a:pPr>
+            <a:r>
+              <a:t>Prophet</a:t>
+            </a:r>
+          </a:p>
+        </p:txBody>
+      </p:sp>
+      <p:sp>
+        <p:nvSpPr>
+          <p:cNvPr id="68" name="Rectangle 67"/>
+          <p:cNvSpPr/>
+          <p:nvPr/>
+        </p:nvSpPr>
+        <p:spPr>
+          <a:xfrm>
+            <a:off x="3291840" y="4434840"/>
+            <a:ext cx="2286000" cy="384048"/>
+          </a:xfrm>
+          <a:prstGeom prst="rect">
+            <a:avLst/>
+          </a:prstGeom>
+          <a:solidFill>
+            <a:srgbClr val="FFFFFF"/>
+          </a:solidFill>
+          <a:ln>
+            <a:noFill/>
+          </a:ln>
+        </p:spPr>
+        <p:style>
+          <a:lnRef idx="1">
+            <a:schemeClr val="accent1"/>
+          </a:lnRef>
+          <a:fillRef idx="3">
+            <a:schemeClr val="accent1"/>
+          </a:fillRef>
+          <a:effectRef idx="2">
+            <a:schemeClr val="accent1"/>
+          </a:effectRef>
+          <a:fontRef idx="minor">
+            <a:schemeClr val="lt1"/>
+          </a:fontRef>
+        </p:style>
+        <p:txBody>
+          <a:bodyPr rtlCol="0" anchor="ctr"/>
+          <a:lstStyle/>
+          <a:p>
+            <a:pPr algn="ctr"/>
+          </a:p>
+        </p:txBody>
+      </p:sp>
+      <p:sp>
+        <p:nvSpPr>
+          <p:cNvPr id="69" name="TextBox 68"/>
+          <p:cNvSpPr txBox="1"/>
+          <p:nvPr/>
+        </p:nvSpPr>
+        <p:spPr>
+          <a:xfrm>
+            <a:off x="3291840" y="4460240"/>
+            <a:ext cx="2286000" cy="347472"/>
+          </a:xfrm>
+          <a:prstGeom prst="rect">
+            <a:avLst/>
+          </a:prstGeom>
+          <a:noFill/>
+        </p:spPr>
+        <p:txBody>
+          <a:bodyPr wrap="square">
+            <a:spAutoFit/>
+          </a:bodyPr>
+          <a:lstStyle/>
+          <a:p>
+            <a:pPr algn="ctr">
+              <a:defRPr sz="1200" b="0">
+                <a:solidFill>
+                  <a:srgbClr val="2C3E50"/>
+                </a:solidFill>
+                <a:latin typeface="Calibri"/>
+              </a:defRPr>
+            </a:pPr>
+            <a:r>
+              <a:t>347 629</a:t>
+            </a:r>
+          </a:p>
+        </p:txBody>
+      </p:sp>
+      <p:sp>
+        <p:nvSpPr>
+          <p:cNvPr id="70" name="Rectangle 69"/>
+          <p:cNvSpPr/>
+          <p:nvPr/>
+        </p:nvSpPr>
+        <p:spPr>
+          <a:xfrm>
+            <a:off x="5577840" y="4434840"/>
+            <a:ext cx="2286000" cy="384048"/>
+          </a:xfrm>
+          <a:prstGeom prst="rect">
+            <a:avLst/>
+          </a:prstGeom>
+          <a:solidFill>
+            <a:srgbClr val="FFFFFF"/>
+          </a:solidFill>
+          <a:ln>
+            <a:noFill/>
+          </a:ln>
+        </p:spPr>
+        <p:style>
+          <a:lnRef idx="1">
+            <a:schemeClr val="accent1"/>
+          </a:lnRef>
+          <a:fillRef idx="3">
+            <a:schemeClr val="accent1"/>
+          </a:fillRef>
+          <a:effectRef idx="2">
+            <a:schemeClr val="accent1"/>
+          </a:effectRef>
+          <a:fontRef idx="minor">
+            <a:schemeClr val="lt1"/>
+          </a:fontRef>
+        </p:style>
+        <p:txBody>
+          <a:bodyPr rtlCol="0" anchor="ctr"/>
+          <a:lstStyle/>
+          <a:p>
+            <a:pPr algn="ctr"/>
+          </a:p>
+        </p:txBody>
+      </p:sp>
+      <p:sp>
+        <p:nvSpPr>
+          <p:cNvPr id="71" name="TextBox 70"/>
+          <p:cNvSpPr txBox="1"/>
+          <p:nvPr/>
+        </p:nvSpPr>
+        <p:spPr>
+          <a:xfrm>
+            <a:off x="5577840" y="4460240"/>
+            <a:ext cx="2286000" cy="347472"/>
+          </a:xfrm>
+          <a:prstGeom prst="rect">
+            <a:avLst/>
+          </a:prstGeom>
+          <a:noFill/>
+        </p:spPr>
+        <p:txBody>
+          <a:bodyPr wrap="square">
+            <a:spAutoFit/>
+          </a:bodyPr>
+          <a:lstStyle/>
+          <a:p>
+            <a:pPr algn="ctr">
+              <a:defRPr sz="1200" b="0">
+                <a:solidFill>
+                  <a:srgbClr val="2C3E50"/>
+                </a:solidFill>
+                <a:latin typeface="Calibri"/>
+              </a:defRPr>
+            </a:pPr>
+            <a:r>
+              <a:t>417 498</a:t>
+            </a:r>
+          </a:p>
+        </p:txBody>
+      </p:sp>
+      <p:sp>
+        <p:nvSpPr>
+          <p:cNvPr id="72" name="Rectangle 71"/>
+          <p:cNvSpPr/>
+          <p:nvPr/>
+        </p:nvSpPr>
+        <p:spPr>
+          <a:xfrm>
+            <a:off x="7863840" y="4434840"/>
+            <a:ext cx="1828800" cy="384048"/>
+          </a:xfrm>
+          <a:prstGeom prst="rect">
+            <a:avLst/>
+          </a:prstGeom>
+          <a:solidFill>
+            <a:srgbClr val="FFFFFF"/>
+          </a:solidFill>
+          <a:ln>
+            <a:noFill/>
+          </a:ln>
+        </p:spPr>
+        <p:style>
+          <a:lnRef idx="1">
+            <a:schemeClr val="accent1"/>
+          </a:lnRef>
+          <a:fillRef idx="3">
+            <a:schemeClr val="accent1"/>
+          </a:fillRef>
+          <a:effectRef idx="2">
+            <a:schemeClr val="accent1"/>
+          </a:effectRef>
+          <a:fontRef idx="minor">
+            <a:schemeClr val="lt1"/>
+          </a:fontRef>
+        </p:style>
+        <p:txBody>
+          <a:bodyPr rtlCol="0" anchor="ctr"/>
+          <a:lstStyle/>
+          <a:p>
+            <a:pPr algn="ctr"/>
+          </a:p>
+        </p:txBody>
+      </p:sp>
+      <p:sp>
+        <p:nvSpPr>
+          <p:cNvPr id="73" name="TextBox 72"/>
+          <p:cNvSpPr txBox="1"/>
+          <p:nvPr/>
+        </p:nvSpPr>
+        <p:spPr>
+          <a:xfrm>
+            <a:off x="7863840" y="4460240"/>
+            <a:ext cx="1828800" cy="347472"/>
+          </a:xfrm>
+          <a:prstGeom prst="rect">
+            <a:avLst/>
+          </a:prstGeom>
+          <a:noFill/>
+        </p:spPr>
+        <p:txBody>
+          <a:bodyPr wrap="square">
+            <a:spAutoFit/>
+          </a:bodyPr>
+          <a:lstStyle/>
+          <a:p>
+            <a:pPr algn="ctr">
+              <a:defRPr sz="1200" b="0">
+                <a:solidFill>
+                  <a:srgbClr val="2C3E50"/>
+                </a:solidFill>
+                <a:latin typeface="Calibri"/>
+              </a:defRPr>
+            </a:pPr>
+            <a:r>
+              <a:t>175%</a:t>
+            </a:r>
+          </a:p>
+        </p:txBody>
+      </p:sp>
+      <p:sp>
+        <p:nvSpPr>
+          <p:cNvPr id="74" name="Rectangle 73"/>
+          <p:cNvSpPr/>
+          <p:nvPr/>
+        </p:nvSpPr>
+        <p:spPr>
+          <a:xfrm>
+            <a:off x="9692640" y="4434840"/>
+            <a:ext cx="1828800" cy="384048"/>
+          </a:xfrm>
+          <a:prstGeom prst="rect">
+            <a:avLst/>
+          </a:prstGeom>
+          <a:solidFill>
+            <a:srgbClr val="FFFFFF"/>
+          </a:solidFill>
+          <a:ln>
+            <a:noFill/>
+          </a:ln>
+        </p:spPr>
+        <p:style>
+          <a:lnRef idx="1">
+            <a:schemeClr val="accent1"/>
+          </a:lnRef>
+          <a:fillRef idx="3">
+            <a:schemeClr val="accent1"/>
+          </a:fillRef>
+          <a:effectRef idx="2">
+            <a:schemeClr val="accent1"/>
+          </a:effectRef>
+          <a:fontRef idx="minor">
+            <a:schemeClr val="lt1"/>
+          </a:fontRef>
+        </p:style>
+        <p:txBody>
+          <a:bodyPr rtlCol="0" anchor="ctr"/>
+          <a:lstStyle/>
+          <a:p>
+            <a:pPr algn="ctr"/>
+          </a:p>
+        </p:txBody>
+      </p:sp>
+      <p:sp>
+        <p:nvSpPr>
+          <p:cNvPr id="75" name="TextBox 74"/>
+          <p:cNvSpPr txBox="1"/>
+          <p:nvPr/>
+        </p:nvSpPr>
+        <p:spPr>
+          <a:xfrm>
+            <a:off x="9692640" y="4460240"/>
+            <a:ext cx="1828800" cy="347472"/>
+          </a:xfrm>
+          <a:prstGeom prst="rect">
+            <a:avLst/>
+          </a:prstGeom>
+          <a:noFill/>
+        </p:spPr>
+        <p:txBody>
+          <a:bodyPr wrap="square">
+            <a:spAutoFit/>
+          </a:bodyPr>
+          <a:lstStyle/>
+          <a:p>
+            <a:pPr algn="ctr">
+              <a:defRPr sz="1200" b="0">
+                <a:solidFill>
+                  <a:srgbClr val="2C3E50"/>
+                </a:solidFill>
+                <a:latin typeface="Calibri"/>
+              </a:defRPr>
+            </a:pPr>
+            <a:r>
+              <a:t>-15.3%</a:t>
+            </a:r>
+          </a:p>
+        </p:txBody>
+      </p:sp>
+      <p:sp>
+        <p:nvSpPr>
+          <p:cNvPr id="76" name="Rectangle 75"/>
+          <p:cNvSpPr/>
+          <p:nvPr/>
+        </p:nvSpPr>
+        <p:spPr>
+          <a:xfrm>
+            <a:off x="548640" y="4818888"/>
+            <a:ext cx="2743200" cy="384048"/>
           </a:xfrm>
           <a:prstGeom prst="rect">
             <a:avLst/>
@@ -9315,14 +11448,14 @@
       </p:sp>
       <p:sp>
         <p:nvSpPr>
-          <p:cNvPr id="23" name="TextBox 22"/>
-          <p:cNvSpPr txBox="1"/>
-          <p:nvPr/>
-        </p:nvSpPr>
-        <p:spPr>
-          <a:xfrm>
-            <a:off x="822960" y="3319272"/>
-            <a:ext cx="3200400" cy="457200"/>
+          <p:cNvPr id="77" name="TextBox 76"/>
+          <p:cNvSpPr txBox="1"/>
+          <p:nvPr/>
+        </p:nvSpPr>
+        <p:spPr>
+          <a:xfrm>
+            <a:off x="548640" y="4844288"/>
+            <a:ext cx="2743200" cy="347472"/>
           </a:xfrm>
           <a:prstGeom prst="rect">
             <a:avLst/>
@@ -9336,7 +11469,7 @@
           <a:lstStyle/>
           <a:p>
             <a:pPr algn="ctr">
-              <a:defRPr sz="1400" b="1">
+              <a:defRPr sz="1200" b="1">
                 <a:solidFill>
                   <a:srgbClr val="FFFFFF"/>
                 </a:solidFill>
@@ -9344,21 +11477,21 @@
               </a:defRPr>
             </a:pPr>
             <a:r>
-              <a:t>Prophet</a:t>
-            </a:r>
-          </a:p>
-        </p:txBody>
-      </p:sp>
-      <p:sp>
-        <p:nvSpPr>
-          <p:cNvPr id="24" name="Rectangle 23"/>
+              <a:t>Chronos-T5-Small</a:t>
+            </a:r>
+          </a:p>
+        </p:txBody>
+      </p:sp>
+      <p:sp>
+        <p:nvSpPr>
+          <p:cNvPr id="78" name="Rectangle 77"/>
           <p:cNvSpPr/>
           <p:nvPr/>
         </p:nvSpPr>
         <p:spPr>
           <a:xfrm>
-            <a:off x="4023360" y="3291840"/>
-            <a:ext cx="2743200" cy="502920"/>
+            <a:off x="3291840" y="4818888"/>
+            <a:ext cx="2286000" cy="384048"/>
           </a:xfrm>
           <a:prstGeom prst="rect">
             <a:avLst/>
@@ -9394,14 +11527,14 @@
       </p:sp>
       <p:sp>
         <p:nvSpPr>
-          <p:cNvPr id="25" name="TextBox 24"/>
-          <p:cNvSpPr txBox="1"/>
-          <p:nvPr/>
-        </p:nvSpPr>
-        <p:spPr>
-          <a:xfrm>
-            <a:off x="4023360" y="3319272"/>
-            <a:ext cx="2743200" cy="457200"/>
+          <p:cNvPr id="79" name="TextBox 78"/>
+          <p:cNvSpPr txBox="1"/>
+          <p:nvPr/>
+        </p:nvSpPr>
+        <p:spPr>
+          <a:xfrm>
+            <a:off x="3291840" y="4844288"/>
+            <a:ext cx="2286000" cy="347472"/>
           </a:xfrm>
           <a:prstGeom prst="rect">
             <a:avLst/>
@@ -9415,7 +11548,7 @@
           <a:lstStyle/>
           <a:p>
             <a:pPr algn="ctr">
-              <a:defRPr sz="1400" b="1">
+              <a:defRPr sz="1200" b="1">
                 <a:solidFill>
                   <a:srgbClr val="FFFFFF"/>
                 </a:solidFill>
@@ -9423,21 +11556,21 @@
               </a:defRPr>
             </a:pPr>
             <a:r>
-              <a:t>265 663</a:t>
-            </a:r>
-          </a:p>
-        </p:txBody>
-      </p:sp>
-      <p:sp>
-        <p:nvSpPr>
-          <p:cNvPr id="26" name="Rectangle 25"/>
+              <a:t>331 551</a:t>
+            </a:r>
+          </a:p>
+        </p:txBody>
+      </p:sp>
+      <p:sp>
+        <p:nvSpPr>
+          <p:cNvPr id="80" name="Rectangle 79"/>
           <p:cNvSpPr/>
           <p:nvPr/>
         </p:nvSpPr>
         <p:spPr>
           <a:xfrm>
-            <a:off x="6766560" y="3291840"/>
-            <a:ext cx="2743200" cy="502920"/>
+            <a:off x="5577840" y="4818888"/>
+            <a:ext cx="2286000" cy="384048"/>
           </a:xfrm>
           <a:prstGeom prst="rect">
             <a:avLst/>
@@ -9473,14 +11606,14 @@
       </p:sp>
       <p:sp>
         <p:nvSpPr>
-          <p:cNvPr id="27" name="TextBox 26"/>
-          <p:cNvSpPr txBox="1"/>
-          <p:nvPr/>
-        </p:nvSpPr>
-        <p:spPr>
-          <a:xfrm>
-            <a:off x="6766560" y="3319272"/>
-            <a:ext cx="2743200" cy="457200"/>
+          <p:cNvPr id="81" name="TextBox 80"/>
+          <p:cNvSpPr txBox="1"/>
+          <p:nvPr/>
+        </p:nvSpPr>
+        <p:spPr>
+          <a:xfrm>
+            <a:off x="5577840" y="4844288"/>
+            <a:ext cx="2286000" cy="347472"/>
           </a:xfrm>
           <a:prstGeom prst="rect">
             <a:avLst/>
@@ -9494,7 +11627,7 @@
           <a:lstStyle/>
           <a:p>
             <a:pPr algn="ctr">
-              <a:defRPr sz="1400" b="1">
+              <a:defRPr sz="1200" b="1">
                 <a:solidFill>
                   <a:srgbClr val="FFFFFF"/>
                 </a:solidFill>
@@ -9502,21 +11635,21 @@
               </a:defRPr>
             </a:pPr>
             <a:r>
-              <a:t>363 848</a:t>
-            </a:r>
-          </a:p>
-        </p:txBody>
-      </p:sp>
-      <p:sp>
-        <p:nvSpPr>
-          <p:cNvPr id="28" name="Rectangle 27"/>
+              <a:t>382 864</a:t>
+            </a:r>
+          </a:p>
+        </p:txBody>
+      </p:sp>
+      <p:sp>
+        <p:nvSpPr>
+          <p:cNvPr id="82" name="Rectangle 81"/>
           <p:cNvSpPr/>
           <p:nvPr/>
         </p:nvSpPr>
         <p:spPr>
           <a:xfrm>
-            <a:off x="9509760" y="3291840"/>
-            <a:ext cx="2286000" cy="502920"/>
+            <a:off x="7863840" y="4818888"/>
+            <a:ext cx="1828800" cy="384048"/>
           </a:xfrm>
           <a:prstGeom prst="rect">
             <a:avLst/>
@@ -9552,14 +11685,14 @@
       </p:sp>
       <p:sp>
         <p:nvSpPr>
-          <p:cNvPr id="29" name="TextBox 28"/>
-          <p:cNvSpPr txBox="1"/>
-          <p:nvPr/>
-        </p:nvSpPr>
-        <p:spPr>
-          <a:xfrm>
-            <a:off x="9509760" y="3319272"/>
-            <a:ext cx="2286000" cy="457200"/>
+          <p:cNvPr id="83" name="TextBox 82"/>
+          <p:cNvSpPr txBox="1"/>
+          <p:nvPr/>
+        </p:nvSpPr>
+        <p:spPr>
+          <a:xfrm>
+            <a:off x="7863840" y="4844288"/>
+            <a:ext cx="1828800" cy="347472"/>
           </a:xfrm>
           <a:prstGeom prst="rect">
             <a:avLst/>
@@ -9573,7 +11706,7 @@
           <a:lstStyle/>
           <a:p>
             <a:pPr algn="ctr">
-              <a:defRPr sz="1400" b="1">
+              <a:defRPr sz="1200" b="1">
                 <a:solidFill>
                   <a:srgbClr val="FFFFFF"/>
                 </a:solidFill>
@@ -9581,21 +11714,100 @@
               </a:defRPr>
             </a:pPr>
             <a:r>
-              <a:t>-11.9% MAE</a:t>
-            </a:r>
-          </a:p>
-        </p:txBody>
-      </p:sp>
-      <p:sp>
-        <p:nvSpPr>
-          <p:cNvPr id="30" name="TextBox 29"/>
-          <p:cNvSpPr txBox="1"/>
-          <p:nvPr/>
-        </p:nvSpPr>
-        <p:spPr>
-          <a:xfrm>
-            <a:off x="822960" y="4114800"/>
-            <a:ext cx="4572000" cy="365760"/>
+              <a:t>136%</a:t>
+            </a:r>
+          </a:p>
+        </p:txBody>
+      </p:sp>
+      <p:sp>
+        <p:nvSpPr>
+          <p:cNvPr id="84" name="Rectangle 83"/>
+          <p:cNvSpPr/>
+          <p:nvPr/>
+        </p:nvSpPr>
+        <p:spPr>
+          <a:xfrm>
+            <a:off x="9692640" y="4818888"/>
+            <a:ext cx="1828800" cy="384048"/>
+          </a:xfrm>
+          <a:prstGeom prst="rect">
+            <a:avLst/>
+          </a:prstGeom>
+          <a:solidFill>
+            <a:srgbClr val="27AE60"/>
+          </a:solidFill>
+          <a:ln>
+            <a:noFill/>
+          </a:ln>
+        </p:spPr>
+        <p:style>
+          <a:lnRef idx="1">
+            <a:schemeClr val="accent1"/>
+          </a:lnRef>
+          <a:fillRef idx="3">
+            <a:schemeClr val="accent1"/>
+          </a:fillRef>
+          <a:effectRef idx="2">
+            <a:schemeClr val="accent1"/>
+          </a:effectRef>
+          <a:fontRef idx="minor">
+            <a:schemeClr val="lt1"/>
+          </a:fontRef>
+        </p:style>
+        <p:txBody>
+          <a:bodyPr rtlCol="0" anchor="ctr"/>
+          <a:lstStyle/>
+          <a:p>
+            <a:pPr algn="ctr"/>
+          </a:p>
+        </p:txBody>
+      </p:sp>
+      <p:sp>
+        <p:nvSpPr>
+          <p:cNvPr id="85" name="TextBox 84"/>
+          <p:cNvSpPr txBox="1"/>
+          <p:nvPr/>
+        </p:nvSpPr>
+        <p:spPr>
+          <a:xfrm>
+            <a:off x="9692640" y="4844288"/>
+            <a:ext cx="1828800" cy="347472"/>
+          </a:xfrm>
+          <a:prstGeom prst="rect">
+            <a:avLst/>
+          </a:prstGeom>
+          <a:noFill/>
+        </p:spPr>
+        <p:txBody>
+          <a:bodyPr wrap="square">
+            <a:spAutoFit/>
+          </a:bodyPr>
+          <a:lstStyle/>
+          <a:p>
+            <a:pPr algn="ctr">
+              <a:defRPr sz="1200" b="1">
+                <a:solidFill>
+                  <a:srgbClr val="FFFFFF"/>
+                </a:solidFill>
+                <a:latin typeface="Calibri"/>
+              </a:defRPr>
+            </a:pPr>
+            <a:r>
+              <a:t>-10.0%</a:t>
+            </a:r>
+          </a:p>
+        </p:txBody>
+      </p:sp>
+      <p:sp>
+        <p:nvSpPr>
+          <p:cNvPr id="86" name="TextBox 85"/>
+          <p:cNvSpPr txBox="1"/>
+          <p:nvPr/>
+        </p:nvSpPr>
+        <p:spPr>
+          <a:xfrm>
+            <a:off x="640080" y="5394960"/>
+            <a:ext cx="5029200" cy="365760"/>
           </a:xfrm>
           <a:prstGeom prst="rect">
             <a:avLst/>
@@ -9617,21 +11829,21 @@
               </a:defRPr>
             </a:pPr>
             <a:r>
-              <a:t>Configuration Prophet</a:t>
-            </a:r>
-          </a:p>
-        </p:txBody>
-      </p:sp>
-      <p:sp>
-        <p:nvSpPr>
-          <p:cNvPr id="31" name="TextBox 30"/>
-          <p:cNvSpPr txBox="1"/>
-          <p:nvPr/>
-        </p:nvSpPr>
-        <p:spPr>
-          <a:xfrm>
-            <a:off x="822960" y="4572000"/>
-            <a:ext cx="4572000" cy="3657600"/>
+              <a:t>Amazon Chronos-T5-Small</a:t>
+            </a:r>
+          </a:p>
+        </p:txBody>
+      </p:sp>
+      <p:sp>
+        <p:nvSpPr>
+          <p:cNvPr id="87" name="TextBox 86"/>
+          <p:cNvSpPr txBox="1"/>
+          <p:nvPr/>
+        </p:nvSpPr>
+        <p:spPr>
+          <a:xfrm>
+            <a:off x="640080" y="5806440"/>
+            <a:ext cx="5029200" cy="3657600"/>
           </a:xfrm>
           <a:prstGeom prst="rect">
             <a:avLst/>
@@ -9646,9 +11858,9 @@
           <a:p>
             <a:pPr>
               <a:spcAft>
-                <a:spcPts val="600"/>
+                <a:spcPts val="200"/>
               </a:spcAft>
-              <a:defRPr sz="1400">
+              <a:defRPr sz="1200">
                 <a:solidFill>
                   <a:srgbClr val="2C3E50"/>
                 </a:solidFill>
@@ -9656,15 +11868,15 @@
               </a:defRPr>
             </a:pPr>
             <a:r>
-              <a:t>Saisonnalite annuelle + hebdomadaire</a:t>
+              <a:t>Transformeur pre-entraine (46M parametres)</a:t>
             </a:r>
           </a:p>
           <a:p>
             <a:pPr>
               <a:spcAft>
-                <a:spcPts val="600"/>
+                <a:spcPts val="200"/>
               </a:spcAft>
-              <a:defRPr sz="1400">
+              <a:defRPr sz="1200">
                 <a:solidFill>
                   <a:srgbClr val="2C3E50"/>
                 </a:solidFill>
@@ -9672,15 +11884,15 @@
               </a:defRPr>
             </a:pPr>
             <a:r>
-              <a:t>Mode multiplicatif</a:t>
+              <a:t>Zero-shot : pas de fine-tuning necessaire</a:t>
             </a:r>
           </a:p>
           <a:p>
             <a:pPr>
               <a:spcAft>
-                <a:spcPts val="600"/>
+                <a:spcPts val="200"/>
               </a:spcAft>
-              <a:defRPr sz="1400">
+              <a:defRPr sz="1200">
                 <a:solidFill>
                   <a:srgbClr val="2C3E50"/>
                 </a:solidFill>
@@ -9688,15 +11900,15 @@
               </a:defRPr>
             </a:pPr>
             <a:r>
-              <a:t>changepoint_prior_scale = 0.05</a:t>
+              <a:t>Meilleur RMSE (382K) et MAPE (136%)</a:t>
             </a:r>
           </a:p>
           <a:p>
             <a:pPr>
               <a:spcAft>
-                <a:spcPts val="600"/>
+                <a:spcPts val="200"/>
               </a:spcAft>
-              <a:defRPr sz="1400">
+              <a:defRPr sz="1200">
                 <a:solidFill>
                   <a:srgbClr val="2C3E50"/>
                 </a:solidFill>
@@ -9704,21 +11916,66 @@
               </a:defRPr>
             </a:pPr>
             <a:r>
-              <a:t>4 modeles : global + 3 categories</a:t>
-            </a:r>
-          </a:p>
-        </p:txBody>
-      </p:sp>
-      <p:sp>
-        <p:nvSpPr>
-          <p:cNvPr id="32" name="TextBox 31"/>
-          <p:cNvSpPr txBox="1"/>
-          <p:nvPr/>
-        </p:nvSpPr>
-        <p:spPr>
-          <a:xfrm>
-            <a:off x="6400800" y="4114800"/>
-            <a:ext cx="4572000" cy="365760"/>
+              <a:t>4 series : global + 3 categories produit</a:t>
+            </a:r>
+          </a:p>
+        </p:txBody>
+      </p:sp>
+      <p:sp>
+        <p:nvSpPr>
+          <p:cNvPr id="88" name="Rounded Rectangle 87"/>
+          <p:cNvSpPr/>
+          <p:nvPr/>
+        </p:nvSpPr>
+        <p:spPr>
+          <a:xfrm>
+            <a:off x="6217920" y="5349240"/>
+            <a:ext cx="5212080" cy="1188720"/>
+          </a:xfrm>
+          <a:prstGeom prst="roundRect">
+            <a:avLst/>
+          </a:prstGeom>
+          <a:solidFill>
+            <a:srgbClr val="D5E8D4"/>
+          </a:solidFill>
+          <a:ln w="25400">
+            <a:solidFill>
+              <a:srgbClr val="27AE60"/>
+            </a:solidFill>
+          </a:ln>
+        </p:spPr>
+        <p:style>
+          <a:lnRef idx="1">
+            <a:schemeClr val="accent1"/>
+          </a:lnRef>
+          <a:fillRef idx="3">
+            <a:schemeClr val="accent1"/>
+          </a:fillRef>
+          <a:effectRef idx="2">
+            <a:schemeClr val="accent1"/>
+          </a:effectRef>
+          <a:fontRef idx="minor">
+            <a:schemeClr val="lt1"/>
+          </a:fontRef>
+        </p:style>
+        <p:txBody>
+          <a:bodyPr rtlCol="0" anchor="ctr"/>
+          <a:lstStyle/>
+          <a:p>
+            <a:pPr algn="ctr"/>
+          </a:p>
+        </p:txBody>
+      </p:sp>
+      <p:sp>
+        <p:nvSpPr>
+          <p:cNvPr id="89" name="TextBox 88"/>
+          <p:cNvSpPr txBox="1"/>
+          <p:nvPr/>
+        </p:nvSpPr>
+        <p:spPr>
+          <a:xfrm>
+            <a:off x="6400800" y="5394960"/>
+            <a:ext cx="4846320" cy="274320"/>
           </a:xfrm>
           <a:prstGeom prst="rect">
             <a:avLst/>
@@ -9732,29 +11989,29 @@
           <a:lstStyle/>
           <a:p>
             <a:pPr algn="l">
-              <a:defRPr sz="1800" b="1">
-                <a:solidFill>
-                  <a:srgbClr val="1B3A5C"/>
-                </a:solidFill>
-                <a:latin typeface="Calibri"/>
-              </a:defRPr>
-            </a:pPr>
-            <a:r>
-              <a:t>Modeles par categorie</a:t>
-            </a:r>
-          </a:p>
-        </p:txBody>
-      </p:sp>
-      <p:sp>
-        <p:nvSpPr>
-          <p:cNvPr id="33" name="TextBox 32"/>
-          <p:cNvSpPr txBox="1"/>
-          <p:nvPr/>
-        </p:nvSpPr>
-        <p:spPr>
-          <a:xfrm>
-            <a:off x="6400800" y="4572000"/>
-            <a:ext cx="5029200" cy="3657600"/>
+              <a:defRPr sz="1400" b="1">
+                <a:solidFill>
+                  <a:srgbClr val="27AE60"/>
+                </a:solidFill>
+                <a:latin typeface="Calibri"/>
+              </a:defRPr>
+            </a:pPr>
+            <a:r>
+              <a:t>Pourquoi Chronos ?</a:t>
+            </a:r>
+          </a:p>
+        </p:txBody>
+      </p:sp>
+      <p:sp>
+        <p:nvSpPr>
+          <p:cNvPr id="90" name="TextBox 89"/>
+          <p:cNvSpPr txBox="1"/>
+          <p:nvPr/>
+        </p:nvSpPr>
+        <p:spPr>
+          <a:xfrm>
+            <a:off x="6400800" y="5715000"/>
+            <a:ext cx="4846320" cy="3657600"/>
           </a:xfrm>
           <a:prstGeom prst="rect">
             <a:avLst/>
@@ -9769,9 +12026,9 @@
           <a:p>
             <a:pPr>
               <a:spcAft>
-                <a:spcPts val="600"/>
+                <a:spcPts val="200"/>
               </a:spcAft>
-              <a:defRPr sz="1400">
+              <a:defRPr sz="1200">
                 <a:solidFill>
                   <a:srgbClr val="2C3E50"/>
                 </a:solidFill>
@@ -9779,15 +12036,15 @@
               </a:defRPr>
             </a:pPr>
             <a:r>
-              <a:t>all (global) - CA total quotidien</a:t>
+              <a:t>RMSE le plus bas : predictions les plus stables</a:t>
             </a:r>
           </a:p>
           <a:p>
             <a:pPr>
               <a:spcAft>
-                <a:spcPts val="600"/>
+                <a:spcPts val="200"/>
               </a:spcAft>
-              <a:defRPr sz="1400">
+              <a:defRPr sz="1200">
                 <a:solidFill>
                   <a:srgbClr val="2C3E50"/>
                 </a:solidFill>
@@ -9795,15 +12052,15 @@
               </a:defRPr>
             </a:pPr>
             <a:r>
-              <a:t>bed_bath_table - Linge de maison</a:t>
+              <a:t>MAPE le plus bas : proportionnellement le plus precis</a:t>
             </a:r>
           </a:p>
           <a:p>
             <a:pPr>
               <a:spcAft>
-                <a:spcPts val="600"/>
+                <a:spcPts val="200"/>
               </a:spcAft>
-              <a:defRPr sz="1400">
+              <a:defRPr sz="1200">
                 <a:solidFill>
                   <a:srgbClr val="2C3E50"/>
                 </a:solidFill>
@@ -9811,30 +12068,14 @@
               </a:defRPr>
             </a:pPr>
             <a:r>
-              <a:t>health_beauty - Sante et beaute</a:t>
-            </a:r>
-          </a:p>
-          <a:p>
-            <a:pPr>
-              <a:spcAft>
-                <a:spcPts val="600"/>
-              </a:spcAft>
-              <a:defRPr sz="1400">
-                <a:solidFill>
-                  <a:srgbClr val="2C3E50"/>
-                </a:solidFill>
-                <a:latin typeface="Calibri"/>
-              </a:defRPr>
-            </a:pPr>
-            <a:r>
-              <a:t>sports_leisure - Sports et loisirs</a:t>
-            </a:r>
-          </a:p>
-        </p:txBody>
-      </p:sp>
-      <p:sp>
-        <p:nvSpPr>
-          <p:cNvPr id="34" name="TextBox 33"/>
+              <a:t>Intervalles de confiance natifs (10e-90e percentile)</a:t>
+            </a:r>
+          </a:p>
+        </p:txBody>
+      </p:sp>
+      <p:sp>
+        <p:nvSpPr>
+          <p:cNvPr id="91" name="TextBox 90"/>
           <p:cNvSpPr txBox="1"/>
           <p:nvPr/>
         </p:nvSpPr>
@@ -11414,7 +13655,7 @@
               </a:defRPr>
             </a:pPr>
             <a:r>
-              <a:t>forecaster_models.joblib (278 KB) - 4 Prophet models</a:t>
+              <a:t>forecaster_models.joblib - Donnees series temporelles (Chronos)</a:t>
             </a:r>
           </a:p>
           <a:p>
@@ -11871,7 +14112,7 @@
               </a:defRPr>
             </a:pPr>
             <a:r>
-              <a:t>Ensemble ML (CatBoost+LightGBM+XGBoost) : F1 = 0.999</a:t>
+              <a:t>Ensemble ML (CatBoost+LightGBM+XGBoost) : F1 = 0.979, AUC = 0.694</a:t>
             </a:r>
           </a:p>
           <a:p>
@@ -11903,7 +14144,7 @@
               </a:defRPr>
             </a:pPr>
             <a:r>
-              <a:t>Prevision Prophet : -42.3% MAE vs baseline</a:t>
+              <a:t>Prevision Chronos : meilleur RMSE et MAPE (8 modeles testes)</a:t>
             </a:r>
           </a:p>
           <a:p>
@@ -12026,7 +14267,7 @@
               </a:defRPr>
             </a:pPr>
             <a:r>
-              <a:t>Modeles deep learning (TabTransformer, N-BEATS)</a:t>
+              <a:t>Saisonnalite locale (Ramadan, Aid Adha, etc.)</a:t>
             </a:r>
           </a:p>
           <a:p>
@@ -15266,7 +17507,7 @@
               </a:defRPr>
             </a:pPr>
             <a:r>
-              <a:t>4 features</a:t>
+              <a:t>5 features</a:t>
             </a:r>
           </a:p>
         </p:txBody>
@@ -15302,7 +17543,7 @@
               </a:defRPr>
             </a:pPr>
             <a:r>
-              <a:t>Montant, frais, remise, sous-total</a:t>
+              <a:t>Montant, frais, remise, sous-total, ratio</a:t>
             </a:r>
           </a:p>
         </p:txBody>
@@ -15419,7 +17660,7 @@
               </a:defRPr>
             </a:pPr>
             <a:r>
-              <a:t>1 feature</a:t>
+              <a:t>3 features</a:t>
             </a:r>
           </a:p>
         </p:txBody>
@@ -15455,7 +17696,7 @@
               </a:defRPr>
             </a:pPr>
             <a:r>
-              <a:t>Nombre d'articles</a:t>
+              <a:t>Articles, prix cat., popularite cat.</a:t>
             </a:r>
           </a:p>
         </p:txBody>
@@ -15572,7 +17813,7 @@
               </a:defRPr>
             </a:pPr>
             <a:r>
-              <a:t>4 features</a:t>
+              <a:t>5 features</a:t>
             </a:r>
           </a:p>
         </p:txBody>
@@ -15608,7 +17849,7 @@
               </a:defRPr>
             </a:pPr>
             <a:r>
-              <a:t>Historique, taux succes, recurrence</a:t>
+              <a:t>Tel. alt, recurrence, nb commandes, CLV, source</a:t>
             </a:r>
           </a:p>
         </p:txBody>
@@ -15725,7 +17966,7 @@
               </a:defRPr>
             </a:pPr>
             <a:r>
-              <a:t>4 features</a:t>
+              <a:t>3 features</a:t>
             </a:r>
           </a:p>
         </p:txBody>
@@ -15761,7 +18002,7 @@
               </a:defRPr>
             </a:pPr>
             <a:r>
-              <a:t>Taux regional, categorie, delai, poids</a:t>
+              <a:t>Volume regional, delai, poids</a:t>
             </a:r>
           </a:p>
         </p:txBody>

--- a/docs/presentation.pptx
+++ b/docs/presentation.pptx
@@ -4267,7 +4267,7 @@
               </a:defRPr>
             </a:pPr>
             <a:r>
-              <a:t>0.6760</a:t>
+              <a:t>0.6833</a:t>
             </a:r>
           </a:p>
         </p:txBody>
@@ -4346,7 +4346,7 @@
               </a:defRPr>
             </a:pPr>
             <a:r>
-              <a:t>0.9422</a:t>
+              <a:t>0.9777</a:t>
             </a:r>
           </a:p>
         </p:txBody>
@@ -4425,7 +4425,7 @@
               </a:defRPr>
             </a:pPr>
             <a:r>
-              <a:t>0.9782</a:t>
+              <a:t>0.9776</a:t>
             </a:r>
           </a:p>
         </p:txBody>
@@ -4504,7 +4504,7 @@
               </a:defRPr>
             </a:pPr>
             <a:r>
-              <a:t>0.9619</a:t>
+              <a:t>1.0000</a:t>
             </a:r>
           </a:p>
         </p:txBody>
@@ -4583,7 +4583,7 @@
               </a:defRPr>
             </a:pPr>
             <a:r>
-              <a:t>0.9700</a:t>
+              <a:t>0.9887</a:t>
             </a:r>
           </a:p>
         </p:txBody>
@@ -4741,7 +4741,7 @@
               </a:defRPr>
             </a:pPr>
             <a:r>
-              <a:t>0.6818</a:t>
+              <a:t>0.6852</a:t>
             </a:r>
           </a:p>
         </p:txBody>
@@ -4820,7 +4820,7 @@
               </a:defRPr>
             </a:pPr>
             <a:r>
-              <a:t>0.9481</a:t>
+              <a:t>0.9779</a:t>
             </a:r>
           </a:p>
         </p:txBody>
@@ -4899,7 +4899,7 @@
               </a:defRPr>
             </a:pPr>
             <a:r>
-              <a:t>0.9790</a:t>
+              <a:t>0.9778</a:t>
             </a:r>
           </a:p>
         </p:txBody>
@@ -4978,7 +4978,7 @@
               </a:defRPr>
             </a:pPr>
             <a:r>
-              <a:t>0.9672</a:t>
+              <a:t>0.9999</a:t>
             </a:r>
           </a:p>
         </p:txBody>
@@ -5057,7 +5057,7 @@
               </a:defRPr>
             </a:pPr>
             <a:r>
-              <a:t>0.9731</a:t>
+              <a:t>0.9887</a:t>
             </a:r>
           </a:p>
         </p:txBody>
@@ -5215,7 +5215,7 @@
               </a:defRPr>
             </a:pPr>
             <a:r>
-              <a:t>0.6950</a:t>
+              <a:t>0.6920</a:t>
             </a:r>
           </a:p>
         </p:txBody>
@@ -5294,7 +5294,7 @@
               </a:defRPr>
             </a:pPr>
             <a:r>
-              <a:t>0.9446</a:t>
+              <a:t>0.9776</a:t>
             </a:r>
           </a:p>
         </p:txBody>
@@ -5373,7 +5373,7 @@
               </a:defRPr>
             </a:pPr>
             <a:r>
-              <a:t>0.9790</a:t>
+              <a:t>0.9776</a:t>
             </a:r>
           </a:p>
         </p:txBody>
@@ -5452,7 +5452,7 @@
               </a:defRPr>
             </a:pPr>
             <a:r>
-              <a:t>0.9636</a:t>
+              <a:t>0.9999</a:t>
             </a:r>
           </a:p>
         </p:txBody>
@@ -5531,7 +5531,7 @@
               </a:defRPr>
             </a:pPr>
             <a:r>
-              <a:t>0.9712</a:t>
+              <a:t>0.9886</a:t>
             </a:r>
           </a:p>
         </p:txBody>
@@ -5693,7 +5693,7 @@
               </a:defRPr>
             </a:pPr>
             <a:r>
-              <a:t>0.6942</a:t>
+              <a:t>0.6954</a:t>
             </a:r>
           </a:p>
         </p:txBody>
@@ -5774,7 +5774,7 @@
               </a:defRPr>
             </a:pPr>
             <a:r>
-              <a:t>0.9585</a:t>
+              <a:t>0.9777</a:t>
             </a:r>
           </a:p>
         </p:txBody>
@@ -5855,7 +5855,7 @@
               </a:defRPr>
             </a:pPr>
             <a:r>
-              <a:t>0.9789</a:t>
+              <a:t>0.9776</a:t>
             </a:r>
           </a:p>
         </p:txBody>
@@ -5936,7 +5936,7 @@
               </a:defRPr>
             </a:pPr>
             <a:r>
-              <a:t>0.9783</a:t>
+              <a:t>1.0000</a:t>
             </a:r>
           </a:p>
         </p:txBody>
@@ -6017,7 +6017,7 @@
               </a:defRPr>
             </a:pPr>
             <a:r>
-              <a:t>0.9786</a:t>
+              <a:t>0.9887</a:t>
             </a:r>
           </a:p>
         </p:txBody>
@@ -6445,7 +6445,7 @@
               </a:defRPr>
             </a:pPr>
             <a:r>
-              <a:t>186 (VN)</a:t>
+              <a:t>151 (VN)</a:t>
             </a:r>
           </a:p>
         </p:txBody>
@@ -6524,7 +6524,7 @@
               </a:defRPr>
             </a:pPr>
             <a:r>
-              <a:t>407 (FP)</a:t>
+              <a:t>442 (FP)</a:t>
             </a:r>
           </a:p>
         </p:txBody>
@@ -6682,7 +6682,7 @@
               </a:defRPr>
             </a:pPr>
             <a:r>
-              <a:t>418 (FN)</a:t>
+              <a:t>1 (FN)</a:t>
             </a:r>
           </a:p>
         </p:txBody>
@@ -6761,7 +6761,7 @@
               </a:defRPr>
             </a:pPr>
             <a:r>
-              <a:t>18 878 (VP)</a:t>
+              <a:t>19 295 (VP)</a:t>
             </a:r>
           </a:p>
         </p:txBody>
@@ -6881,7 +6881,7 @@
               </a:defRPr>
             </a:pPr>
             <a:r>
-              <a:t>AUC-ROC : 0.69 (metrique honnete, sans fuite de donnees)</a:t>
+              <a:t>AUC-ROC : 0.695 (metrique honnete, sans fuite de donnees)</a:t>
             </a:r>
           </a:p>
           <a:p>
@@ -6897,7 +6897,7 @@
               </a:defRPr>
             </a:pPr>
             <a:r>
-              <a:t>825 erreurs sur 19 889  |  F1-Score : 0.979</a:t>
+              <a:t>SMOTE : precision echecs 99.3% | 1 seule fausse alerte</a:t>
             </a:r>
           </a:p>
           <a:p>
@@ -14112,7 +14112,7 @@
               </a:defRPr>
             </a:pPr>
             <a:r>
-              <a:t>Ensemble ML (CatBoost+LightGBM+XGBoost) : F1 = 0.979, AUC = 0.694</a:t>
+              <a:t>Ensemble ML (CatBoost+LightGBM+XGBoost + SMOTE) : F1 = 0.989, AUC = 0.695, Precision(echecs) = 99.3%</a:t>
             </a:r>
           </a:p>
           <a:p>

--- a/docs/presentation.pptx
+++ b/docs/presentation.pptx
@@ -3635,7 +3635,7 @@
               </a:defRPr>
             </a:pPr>
             <a:r>
-              <a:t>Ensemble de test : 19 889 echantillons (80/20 split stratifie)  |  20 features sans fuite de donnees</a:t>
+              <a:t>Test : 19 543 echantillons (80/20 split stratifie)  |  31 features  |  ADASYN + Optuna</a:t>
             </a:r>
           </a:p>
         </p:txBody>
@@ -4267,7 +4267,7 @@
               </a:defRPr>
             </a:pPr>
             <a:r>
-              <a:t>0.6833</a:t>
+              <a:t>0.9957</a:t>
             </a:r>
           </a:p>
         </p:txBody>
@@ -4346,7 +4346,7 @@
               </a:defRPr>
             </a:pPr>
             <a:r>
-              <a:t>0.9777</a:t>
+              <a:t>0.9997</a:t>
             </a:r>
           </a:p>
         </p:txBody>
@@ -4425,7 +4425,7 @@
               </a:defRPr>
             </a:pPr>
             <a:r>
-              <a:t>0.9776</a:t>
+              <a:t>0.9997</a:t>
             </a:r>
           </a:p>
         </p:txBody>
@@ -4583,7 +4583,7 @@
               </a:defRPr>
             </a:pPr>
             <a:r>
-              <a:t>0.9887</a:t>
+              <a:t>0.9999</a:t>
             </a:r>
           </a:p>
         </p:txBody>
@@ -4741,7 +4741,7 @@
               </a:defRPr>
             </a:pPr>
             <a:r>
-              <a:t>0.6852</a:t>
+              <a:t>0.9974</a:t>
             </a:r>
           </a:p>
         </p:txBody>
@@ -4820,7 +4820,7 @@
               </a:defRPr>
             </a:pPr>
             <a:r>
-              <a:t>0.9779</a:t>
+              <a:t>0.9997</a:t>
             </a:r>
           </a:p>
         </p:txBody>
@@ -4899,7 +4899,7 @@
               </a:defRPr>
             </a:pPr>
             <a:r>
-              <a:t>0.9778</a:t>
+              <a:t>0.9997</a:t>
             </a:r>
           </a:p>
         </p:txBody>
@@ -4978,7 +4978,7 @@
               </a:defRPr>
             </a:pPr>
             <a:r>
-              <a:t>0.9999</a:t>
+              <a:t>1.0000</a:t>
             </a:r>
           </a:p>
         </p:txBody>
@@ -5057,7 +5057,7 @@
               </a:defRPr>
             </a:pPr>
             <a:r>
-              <a:t>0.9887</a:t>
+              <a:t>0.9999</a:t>
             </a:r>
           </a:p>
         </p:txBody>
@@ -5215,7 +5215,7 @@
               </a:defRPr>
             </a:pPr>
             <a:r>
-              <a:t>0.6920</a:t>
+              <a:t>0.9967</a:t>
             </a:r>
           </a:p>
         </p:txBody>
@@ -5294,7 +5294,7 @@
               </a:defRPr>
             </a:pPr>
             <a:r>
-              <a:t>0.9776</a:t>
+              <a:t>0.9996</a:t>
             </a:r>
           </a:p>
         </p:txBody>
@@ -5373,7 +5373,7 @@
               </a:defRPr>
             </a:pPr>
             <a:r>
-              <a:t>0.9776</a:t>
+              <a:t>0.9997</a:t>
             </a:r>
           </a:p>
         </p:txBody>
@@ -5531,7 +5531,7 @@
               </a:defRPr>
             </a:pPr>
             <a:r>
-              <a:t>0.9886</a:t>
+              <a:t>0.9998</a:t>
             </a:r>
           </a:p>
         </p:txBody>
@@ -5693,7 +5693,7 @@
               </a:defRPr>
             </a:pPr>
             <a:r>
-              <a:t>0.6954</a:t>
+              <a:t>0.9961</a:t>
             </a:r>
           </a:p>
         </p:txBody>
@@ -5774,7 +5774,7 @@
               </a:defRPr>
             </a:pPr>
             <a:r>
-              <a:t>0.9777</a:t>
+              <a:t>0.9997</a:t>
             </a:r>
           </a:p>
         </p:txBody>
@@ -5855,7 +5855,7 @@
               </a:defRPr>
             </a:pPr>
             <a:r>
-              <a:t>0.9776</a:t>
+              <a:t>0.9997</a:t>
             </a:r>
           </a:p>
         </p:txBody>
@@ -6017,7 +6017,7 @@
               </a:defRPr>
             </a:pPr>
             <a:r>
-              <a:t>0.9887</a:t>
+              <a:t>0.9999</a:t>
             </a:r>
           </a:p>
         </p:txBody>
@@ -6445,7 +6445,7 @@
               </a:defRPr>
             </a:pPr>
             <a:r>
-              <a:t>151 (VN)</a:t>
+              <a:t>242 (VN)</a:t>
             </a:r>
           </a:p>
         </p:txBody>
@@ -6524,7 +6524,7 @@
               </a:defRPr>
             </a:pPr>
             <a:r>
-              <a:t>442 (FP)</a:t>
+              <a:t>5 (FP)</a:t>
             </a:r>
           </a:p>
         </p:txBody>
@@ -6682,7 +6682,7 @@
               </a:defRPr>
             </a:pPr>
             <a:r>
-              <a:t>1 (FN)</a:t>
+              <a:t>0 (FN)</a:t>
             </a:r>
           </a:p>
         </p:txBody>
@@ -6761,7 +6761,7 @@
               </a:defRPr>
             </a:pPr>
             <a:r>
-              <a:t>19 295 (VP)</a:t>
+              <a:t>19 296 (VP)</a:t>
             </a:r>
           </a:p>
         </p:txBody>
@@ -6881,7 +6881,7 @@
               </a:defRPr>
             </a:pPr>
             <a:r>
-              <a:t>AUC-ROC : 0.695 (metrique honnete, sans fuite de donnees)</a:t>
+              <a:t>AUC-ROC : 0.9961 (31 features, ADASYN, Optuna)</a:t>
             </a:r>
           </a:p>
           <a:p>
@@ -6897,7 +6897,7 @@
               </a:defRPr>
             </a:pPr>
             <a:r>
-              <a:t>SMOTE : precision echecs 99.3% | 1 seule fausse alerte</a:t>
+              <a:t>Rappel echecs : 98% | Precision : 100% | F1 = 0.99</a:t>
             </a:r>
           </a:p>
           <a:p>
@@ -6913,7 +6913,7 @@
               </a:defRPr>
             </a:pPr>
             <a:r>
-              <a:t>Ensemble retenu pour sa robustesse (vote pondere)</a:t>
+              <a:t>Seuil optimal : 0.9805 (Youden's J statistic)</a:t>
             </a:r>
           </a:p>
         </p:txBody>
@@ -8554,7 +8554,7 @@
               </a:defRPr>
             </a:pPr>
             <a:r>
-              <a:t>Prevision de la Demande (Chronos)</a:t>
+              <a:t>Prevision de la Demande (LightGBM + Calendrier Islamique)</a:t>
             </a:r>
           </a:p>
         </p:txBody>
@@ -8633,7 +8633,7 @@
               </a:defRPr>
             </a:pPr>
             <a:r>
-              <a:t>Benchmark de 8 modeles  |  Serie temporelle : CA quotidien DZD sur 714 jours  |  Evaluation out-of-sample</a:t>
+              <a:t>Benchmark de 5 modeles covariants  |  Serie temporelle : CA quotidien DZD sur 714 jours  |  Evaluation out-of-sample</a:t>
             </a:r>
           </a:p>
         </p:txBody>
@@ -9107,7 +9107,7 @@
               </a:defRPr>
             </a:pPr>
             <a:r>
-              <a:t>Naive (last value)</a:t>
+              <a:t>Moyenne Mobile (7j)</a:t>
             </a:r>
           </a:p>
         </p:txBody>
@@ -9186,7 +9186,7 @@
               </a:defRPr>
             </a:pPr>
             <a:r>
-              <a:t>422 968</a:t>
+              <a:t>363 075</a:t>
             </a:r>
           </a:p>
         </p:txBody>
@@ -9265,7 +9265,7 @@
               </a:defRPr>
             </a:pPr>
             <a:r>
-              <a:t>489 543</a:t>
+              <a:t>466 570</a:t>
             </a:r>
           </a:p>
         </p:txBody>
@@ -9344,7 +9344,7 @@
               </a:defRPr>
             </a:pPr>
             <a:r>
-              <a:t>231%</a:t>
+              <a:t>163.9%</a:t>
             </a:r>
           </a:p>
         </p:txBody>
@@ -9423,7 +9423,7 @@
               </a:defRPr>
             </a:pPr>
             <a:r>
-              <a:t>-40.3%</a:t>
+              <a:t>baseline</a:t>
             </a:r>
           </a:p>
         </p:txBody>
@@ -9502,7 +9502,7 @@
               </a:defRPr>
             </a:pPr>
             <a:r>
-              <a:t>Seasonal Naive (7d)</a:t>
+              <a:t>Prophet + Fetes islamiques</a:t>
             </a:r>
           </a:p>
         </p:txBody>
@@ -9581,7 +9581,7 @@
               </a:defRPr>
             </a:pPr>
             <a:r>
-              <a:t>327 196</a:t>
+              <a:t>376 292</a:t>
             </a:r>
           </a:p>
         </p:txBody>
@@ -9660,7 +9660,7 @@
               </a:defRPr>
             </a:pPr>
             <a:r>
-              <a:t>437 764</a:t>
+              <a:t>447 736</a:t>
             </a:r>
           </a:p>
         </p:txBody>
@@ -9739,7 +9739,7 @@
               </a:defRPr>
             </a:pPr>
             <a:r>
-              <a:t>170%</a:t>
+              <a:t>150.6%</a:t>
             </a:r>
           </a:p>
         </p:txBody>
@@ -9818,7 +9818,7 @@
               </a:defRPr>
             </a:pPr>
             <a:r>
-              <a:t>-8.6%</a:t>
+              <a:t>-3.6%</a:t>
             </a:r>
           </a:p>
         </p:txBody>
@@ -9897,7 +9897,7 @@
               </a:defRPr>
             </a:pPr>
             <a:r>
-              <a:t>Moyenne Mobile (7j)</a:t>
+              <a:t>Chronos-T5-Small</a:t>
             </a:r>
           </a:p>
         </p:txBody>
@@ -9976,7 +9976,7 @@
               </a:defRPr>
             </a:pPr>
             <a:r>
-              <a:t>301 401</a:t>
+              <a:t>338 231</a:t>
             </a:r>
           </a:p>
         </p:txBody>
@@ -10055,7 +10055,7 @@
               </a:defRPr>
             </a:pPr>
             <a:r>
-              <a:t>371 511</a:t>
+              <a:t>395 363</a:t>
             </a:r>
           </a:p>
         </p:txBody>
@@ -10134,7 +10134,7 @@
               </a:defRPr>
             </a:pPr>
             <a:r>
-              <a:t>156%</a:t>
+              <a:t>132.9%</a:t>
             </a:r>
           </a:p>
         </p:txBody>
@@ -10213,7 +10213,7 @@
               </a:defRPr>
             </a:pPr>
             <a:r>
-              <a:t>baseline</a:t>
+              <a:t>+6.8%</a:t>
             </a:r>
           </a:p>
         </p:txBody>
@@ -10227,1191 +10227,6 @@
         <p:spPr>
           <a:xfrm>
             <a:off x="548640" y="3666744"/>
-            <a:ext cx="2743200" cy="384048"/>
-          </a:xfrm>
-          <a:prstGeom prst="rect">
-            <a:avLst/>
-          </a:prstGeom>
-          <a:solidFill>
-            <a:srgbClr val="FFFFFF"/>
-          </a:solidFill>
-          <a:ln>
-            <a:noFill/>
-          </a:ln>
-        </p:spPr>
-        <p:style>
-          <a:lnRef idx="1">
-            <a:schemeClr val="accent1"/>
-          </a:lnRef>
-          <a:fillRef idx="3">
-            <a:schemeClr val="accent1"/>
-          </a:fillRef>
-          <a:effectRef idx="2">
-            <a:schemeClr val="accent1"/>
-          </a:effectRef>
-          <a:fontRef idx="minor">
-            <a:schemeClr val="lt1"/>
-          </a:fontRef>
-        </p:style>
-        <p:txBody>
-          <a:bodyPr rtlCol="0" anchor="ctr"/>
-          <a:lstStyle/>
-          <a:p>
-            <a:pPr algn="ctr"/>
-          </a:p>
-        </p:txBody>
-      </p:sp>
-      <p:sp>
-        <p:nvSpPr>
-          <p:cNvPr id="47" name="TextBox 46"/>
-          <p:cNvSpPr txBox="1"/>
-          <p:nvPr/>
-        </p:nvSpPr>
-        <p:spPr>
-          <a:xfrm>
-            <a:off x="548640" y="3692144"/>
-            <a:ext cx="2743200" cy="347472"/>
-          </a:xfrm>
-          <a:prstGeom prst="rect">
-            <a:avLst/>
-          </a:prstGeom>
-          <a:noFill/>
-        </p:spPr>
-        <p:txBody>
-          <a:bodyPr wrap="square">
-            <a:spAutoFit/>
-          </a:bodyPr>
-          <a:lstStyle/>
-          <a:p>
-            <a:pPr algn="ctr">
-              <a:defRPr sz="1200" b="0">
-                <a:solidFill>
-                  <a:srgbClr val="2C3E50"/>
-                </a:solidFill>
-                <a:latin typeface="Calibri"/>
-              </a:defRPr>
-            </a:pPr>
-            <a:r>
-              <a:t>Holt-Winters (ETS)</a:t>
-            </a:r>
-          </a:p>
-        </p:txBody>
-      </p:sp>
-      <p:sp>
-        <p:nvSpPr>
-          <p:cNvPr id="48" name="Rectangle 47"/>
-          <p:cNvSpPr/>
-          <p:nvPr/>
-        </p:nvSpPr>
-        <p:spPr>
-          <a:xfrm>
-            <a:off x="3291840" y="3666744"/>
-            <a:ext cx="2286000" cy="384048"/>
-          </a:xfrm>
-          <a:prstGeom prst="rect">
-            <a:avLst/>
-          </a:prstGeom>
-          <a:solidFill>
-            <a:srgbClr val="FFFFFF"/>
-          </a:solidFill>
-          <a:ln>
-            <a:noFill/>
-          </a:ln>
-        </p:spPr>
-        <p:style>
-          <a:lnRef idx="1">
-            <a:schemeClr val="accent1"/>
-          </a:lnRef>
-          <a:fillRef idx="3">
-            <a:schemeClr val="accent1"/>
-          </a:fillRef>
-          <a:effectRef idx="2">
-            <a:schemeClr val="accent1"/>
-          </a:effectRef>
-          <a:fontRef idx="minor">
-            <a:schemeClr val="lt1"/>
-          </a:fontRef>
-        </p:style>
-        <p:txBody>
-          <a:bodyPr rtlCol="0" anchor="ctr"/>
-          <a:lstStyle/>
-          <a:p>
-            <a:pPr algn="ctr"/>
-          </a:p>
-        </p:txBody>
-      </p:sp>
-      <p:sp>
-        <p:nvSpPr>
-          <p:cNvPr id="49" name="TextBox 48"/>
-          <p:cNvSpPr txBox="1"/>
-          <p:nvPr/>
-        </p:nvSpPr>
-        <p:spPr>
-          <a:xfrm>
-            <a:off x="3291840" y="3692144"/>
-            <a:ext cx="2286000" cy="347472"/>
-          </a:xfrm>
-          <a:prstGeom prst="rect">
-            <a:avLst/>
-          </a:prstGeom>
-          <a:noFill/>
-        </p:spPr>
-        <p:txBody>
-          <a:bodyPr wrap="square">
-            <a:spAutoFit/>
-          </a:bodyPr>
-          <a:lstStyle/>
-          <a:p>
-            <a:pPr algn="ctr">
-              <a:defRPr sz="1200" b="0">
-                <a:solidFill>
-                  <a:srgbClr val="2C3E50"/>
-                </a:solidFill>
-                <a:latin typeface="Calibri"/>
-              </a:defRPr>
-            </a:pPr>
-            <a:r>
-              <a:t>400 363</a:t>
-            </a:r>
-          </a:p>
-        </p:txBody>
-      </p:sp>
-      <p:sp>
-        <p:nvSpPr>
-          <p:cNvPr id="50" name="Rectangle 49"/>
-          <p:cNvSpPr/>
-          <p:nvPr/>
-        </p:nvSpPr>
-        <p:spPr>
-          <a:xfrm>
-            <a:off x="5577840" y="3666744"/>
-            <a:ext cx="2286000" cy="384048"/>
-          </a:xfrm>
-          <a:prstGeom prst="rect">
-            <a:avLst/>
-          </a:prstGeom>
-          <a:solidFill>
-            <a:srgbClr val="FFFFFF"/>
-          </a:solidFill>
-          <a:ln>
-            <a:noFill/>
-          </a:ln>
-        </p:spPr>
-        <p:style>
-          <a:lnRef idx="1">
-            <a:schemeClr val="accent1"/>
-          </a:lnRef>
-          <a:fillRef idx="3">
-            <a:schemeClr val="accent1"/>
-          </a:fillRef>
-          <a:effectRef idx="2">
-            <a:schemeClr val="accent1"/>
-          </a:effectRef>
-          <a:fontRef idx="minor">
-            <a:schemeClr val="lt1"/>
-          </a:fontRef>
-        </p:style>
-        <p:txBody>
-          <a:bodyPr rtlCol="0" anchor="ctr"/>
-          <a:lstStyle/>
-          <a:p>
-            <a:pPr algn="ctr"/>
-          </a:p>
-        </p:txBody>
-      </p:sp>
-      <p:sp>
-        <p:nvSpPr>
-          <p:cNvPr id="51" name="TextBox 50"/>
-          <p:cNvSpPr txBox="1"/>
-          <p:nvPr/>
-        </p:nvSpPr>
-        <p:spPr>
-          <a:xfrm>
-            <a:off x="5577840" y="3692144"/>
-            <a:ext cx="2286000" cy="347472"/>
-          </a:xfrm>
-          <a:prstGeom prst="rect">
-            <a:avLst/>
-          </a:prstGeom>
-          <a:noFill/>
-        </p:spPr>
-        <p:txBody>
-          <a:bodyPr wrap="square">
-            <a:spAutoFit/>
-          </a:bodyPr>
-          <a:lstStyle/>
-          <a:p>
-            <a:pPr algn="ctr">
-              <a:defRPr sz="1200" b="0">
-                <a:solidFill>
-                  <a:srgbClr val="2C3E50"/>
-                </a:solidFill>
-                <a:latin typeface="Calibri"/>
-              </a:defRPr>
-            </a:pPr>
-            <a:r>
-              <a:t>485 037</a:t>
-            </a:r>
-          </a:p>
-        </p:txBody>
-      </p:sp>
-      <p:sp>
-        <p:nvSpPr>
-          <p:cNvPr id="52" name="Rectangle 51"/>
-          <p:cNvSpPr/>
-          <p:nvPr/>
-        </p:nvSpPr>
-        <p:spPr>
-          <a:xfrm>
-            <a:off x="7863840" y="3666744"/>
-            <a:ext cx="1828800" cy="384048"/>
-          </a:xfrm>
-          <a:prstGeom prst="rect">
-            <a:avLst/>
-          </a:prstGeom>
-          <a:solidFill>
-            <a:srgbClr val="FFFFFF"/>
-          </a:solidFill>
-          <a:ln>
-            <a:noFill/>
-          </a:ln>
-        </p:spPr>
-        <p:style>
-          <a:lnRef idx="1">
-            <a:schemeClr val="accent1"/>
-          </a:lnRef>
-          <a:fillRef idx="3">
-            <a:schemeClr val="accent1"/>
-          </a:fillRef>
-          <a:effectRef idx="2">
-            <a:schemeClr val="accent1"/>
-          </a:effectRef>
-          <a:fontRef idx="minor">
-            <a:schemeClr val="lt1"/>
-          </a:fontRef>
-        </p:style>
-        <p:txBody>
-          <a:bodyPr rtlCol="0" anchor="ctr"/>
-          <a:lstStyle/>
-          <a:p>
-            <a:pPr algn="ctr"/>
-          </a:p>
-        </p:txBody>
-      </p:sp>
-      <p:sp>
-        <p:nvSpPr>
-          <p:cNvPr id="53" name="TextBox 52"/>
-          <p:cNvSpPr txBox="1"/>
-          <p:nvPr/>
-        </p:nvSpPr>
-        <p:spPr>
-          <a:xfrm>
-            <a:off x="7863840" y="3692144"/>
-            <a:ext cx="1828800" cy="347472"/>
-          </a:xfrm>
-          <a:prstGeom prst="rect">
-            <a:avLst/>
-          </a:prstGeom>
-          <a:noFill/>
-        </p:spPr>
-        <p:txBody>
-          <a:bodyPr wrap="square">
-            <a:spAutoFit/>
-          </a:bodyPr>
-          <a:lstStyle/>
-          <a:p>
-            <a:pPr algn="ctr">
-              <a:defRPr sz="1200" b="0">
-                <a:solidFill>
-                  <a:srgbClr val="2C3E50"/>
-                </a:solidFill>
-                <a:latin typeface="Calibri"/>
-              </a:defRPr>
-            </a:pPr>
-            <a:r>
-              <a:t>175%</a:t>
-            </a:r>
-          </a:p>
-        </p:txBody>
-      </p:sp>
-      <p:sp>
-        <p:nvSpPr>
-          <p:cNvPr id="54" name="Rectangle 53"/>
-          <p:cNvSpPr/>
-          <p:nvPr/>
-        </p:nvSpPr>
-        <p:spPr>
-          <a:xfrm>
-            <a:off x="9692640" y="3666744"/>
-            <a:ext cx="1828800" cy="384048"/>
-          </a:xfrm>
-          <a:prstGeom prst="rect">
-            <a:avLst/>
-          </a:prstGeom>
-          <a:solidFill>
-            <a:srgbClr val="FFFFFF"/>
-          </a:solidFill>
-          <a:ln>
-            <a:noFill/>
-          </a:ln>
-        </p:spPr>
-        <p:style>
-          <a:lnRef idx="1">
-            <a:schemeClr val="accent1"/>
-          </a:lnRef>
-          <a:fillRef idx="3">
-            <a:schemeClr val="accent1"/>
-          </a:fillRef>
-          <a:effectRef idx="2">
-            <a:schemeClr val="accent1"/>
-          </a:effectRef>
-          <a:fontRef idx="minor">
-            <a:schemeClr val="lt1"/>
-          </a:fontRef>
-        </p:style>
-        <p:txBody>
-          <a:bodyPr rtlCol="0" anchor="ctr"/>
-          <a:lstStyle/>
-          <a:p>
-            <a:pPr algn="ctr"/>
-          </a:p>
-        </p:txBody>
-      </p:sp>
-      <p:sp>
-        <p:nvSpPr>
-          <p:cNvPr id="55" name="TextBox 54"/>
-          <p:cNvSpPr txBox="1"/>
-          <p:nvPr/>
-        </p:nvSpPr>
-        <p:spPr>
-          <a:xfrm>
-            <a:off x="9692640" y="3692144"/>
-            <a:ext cx="1828800" cy="347472"/>
-          </a:xfrm>
-          <a:prstGeom prst="rect">
-            <a:avLst/>
-          </a:prstGeom>
-          <a:noFill/>
-        </p:spPr>
-        <p:txBody>
-          <a:bodyPr wrap="square">
-            <a:spAutoFit/>
-          </a:bodyPr>
-          <a:lstStyle/>
-          <a:p>
-            <a:pPr algn="ctr">
-              <a:defRPr sz="1200" b="0">
-                <a:solidFill>
-                  <a:srgbClr val="2C3E50"/>
-                </a:solidFill>
-                <a:latin typeface="Calibri"/>
-              </a:defRPr>
-            </a:pPr>
-            <a:r>
-              <a:t>-32.8%</a:t>
-            </a:r>
-          </a:p>
-        </p:txBody>
-      </p:sp>
-      <p:sp>
-        <p:nvSpPr>
-          <p:cNvPr id="56" name="Rectangle 55"/>
-          <p:cNvSpPr/>
-          <p:nvPr/>
-        </p:nvSpPr>
-        <p:spPr>
-          <a:xfrm>
-            <a:off x="548640" y="4050792"/>
-            <a:ext cx="2743200" cy="384048"/>
-          </a:xfrm>
-          <a:prstGeom prst="rect">
-            <a:avLst/>
-          </a:prstGeom>
-          <a:solidFill>
-            <a:srgbClr val="F2F3F4"/>
-          </a:solidFill>
-          <a:ln>
-            <a:noFill/>
-          </a:ln>
-        </p:spPr>
-        <p:style>
-          <a:lnRef idx="1">
-            <a:schemeClr val="accent1"/>
-          </a:lnRef>
-          <a:fillRef idx="3">
-            <a:schemeClr val="accent1"/>
-          </a:fillRef>
-          <a:effectRef idx="2">
-            <a:schemeClr val="accent1"/>
-          </a:effectRef>
-          <a:fontRef idx="minor">
-            <a:schemeClr val="lt1"/>
-          </a:fontRef>
-        </p:style>
-        <p:txBody>
-          <a:bodyPr rtlCol="0" anchor="ctr"/>
-          <a:lstStyle/>
-          <a:p>
-            <a:pPr algn="ctr"/>
-          </a:p>
-        </p:txBody>
-      </p:sp>
-      <p:sp>
-        <p:nvSpPr>
-          <p:cNvPr id="57" name="TextBox 56"/>
-          <p:cNvSpPr txBox="1"/>
-          <p:nvPr/>
-        </p:nvSpPr>
-        <p:spPr>
-          <a:xfrm>
-            <a:off x="548640" y="4076192"/>
-            <a:ext cx="2743200" cy="347472"/>
-          </a:xfrm>
-          <a:prstGeom prst="rect">
-            <a:avLst/>
-          </a:prstGeom>
-          <a:noFill/>
-        </p:spPr>
-        <p:txBody>
-          <a:bodyPr wrap="square">
-            <a:spAutoFit/>
-          </a:bodyPr>
-          <a:lstStyle/>
-          <a:p>
-            <a:pPr algn="ctr">
-              <a:defRPr sz="1200" b="0">
-                <a:solidFill>
-                  <a:srgbClr val="2C3E50"/>
-                </a:solidFill>
-                <a:latin typeface="Calibri"/>
-              </a:defRPr>
-            </a:pPr>
-            <a:r>
-              <a:t>SARIMAX</a:t>
-            </a:r>
-          </a:p>
-        </p:txBody>
-      </p:sp>
-      <p:sp>
-        <p:nvSpPr>
-          <p:cNvPr id="58" name="Rectangle 57"/>
-          <p:cNvSpPr/>
-          <p:nvPr/>
-        </p:nvSpPr>
-        <p:spPr>
-          <a:xfrm>
-            <a:off x="3291840" y="4050792"/>
-            <a:ext cx="2286000" cy="384048"/>
-          </a:xfrm>
-          <a:prstGeom prst="rect">
-            <a:avLst/>
-          </a:prstGeom>
-          <a:solidFill>
-            <a:srgbClr val="F2F3F4"/>
-          </a:solidFill>
-          <a:ln>
-            <a:noFill/>
-          </a:ln>
-        </p:spPr>
-        <p:style>
-          <a:lnRef idx="1">
-            <a:schemeClr val="accent1"/>
-          </a:lnRef>
-          <a:fillRef idx="3">
-            <a:schemeClr val="accent1"/>
-          </a:fillRef>
-          <a:effectRef idx="2">
-            <a:schemeClr val="accent1"/>
-          </a:effectRef>
-          <a:fontRef idx="minor">
-            <a:schemeClr val="lt1"/>
-          </a:fontRef>
-        </p:style>
-        <p:txBody>
-          <a:bodyPr rtlCol="0" anchor="ctr"/>
-          <a:lstStyle/>
-          <a:p>
-            <a:pPr algn="ctr"/>
-          </a:p>
-        </p:txBody>
-      </p:sp>
-      <p:sp>
-        <p:nvSpPr>
-          <p:cNvPr id="59" name="TextBox 58"/>
-          <p:cNvSpPr txBox="1"/>
-          <p:nvPr/>
-        </p:nvSpPr>
-        <p:spPr>
-          <a:xfrm>
-            <a:off x="3291840" y="4076192"/>
-            <a:ext cx="2286000" cy="347472"/>
-          </a:xfrm>
-          <a:prstGeom prst="rect">
-            <a:avLst/>
-          </a:prstGeom>
-          <a:noFill/>
-        </p:spPr>
-        <p:txBody>
-          <a:bodyPr wrap="square">
-            <a:spAutoFit/>
-          </a:bodyPr>
-          <a:lstStyle/>
-          <a:p>
-            <a:pPr algn="ctr">
-              <a:defRPr sz="1200" b="0">
-                <a:solidFill>
-                  <a:srgbClr val="2C3E50"/>
-                </a:solidFill>
-                <a:latin typeface="Calibri"/>
-              </a:defRPr>
-            </a:pPr>
-            <a:r>
-              <a:t>413 834</a:t>
-            </a:r>
-          </a:p>
-        </p:txBody>
-      </p:sp>
-      <p:sp>
-        <p:nvSpPr>
-          <p:cNvPr id="60" name="Rectangle 59"/>
-          <p:cNvSpPr/>
-          <p:nvPr/>
-        </p:nvSpPr>
-        <p:spPr>
-          <a:xfrm>
-            <a:off x="5577840" y="4050792"/>
-            <a:ext cx="2286000" cy="384048"/>
-          </a:xfrm>
-          <a:prstGeom prst="rect">
-            <a:avLst/>
-          </a:prstGeom>
-          <a:solidFill>
-            <a:srgbClr val="F2F3F4"/>
-          </a:solidFill>
-          <a:ln>
-            <a:noFill/>
-          </a:ln>
-        </p:spPr>
-        <p:style>
-          <a:lnRef idx="1">
-            <a:schemeClr val="accent1"/>
-          </a:lnRef>
-          <a:fillRef idx="3">
-            <a:schemeClr val="accent1"/>
-          </a:fillRef>
-          <a:effectRef idx="2">
-            <a:schemeClr val="accent1"/>
-          </a:effectRef>
-          <a:fontRef idx="minor">
-            <a:schemeClr val="lt1"/>
-          </a:fontRef>
-        </p:style>
-        <p:txBody>
-          <a:bodyPr rtlCol="0" anchor="ctr"/>
-          <a:lstStyle/>
-          <a:p>
-            <a:pPr algn="ctr"/>
-          </a:p>
-        </p:txBody>
-      </p:sp>
-      <p:sp>
-        <p:nvSpPr>
-          <p:cNvPr id="61" name="TextBox 60"/>
-          <p:cNvSpPr txBox="1"/>
-          <p:nvPr/>
-        </p:nvSpPr>
-        <p:spPr>
-          <a:xfrm>
-            <a:off x="5577840" y="4076192"/>
-            <a:ext cx="2286000" cy="347472"/>
-          </a:xfrm>
-          <a:prstGeom prst="rect">
-            <a:avLst/>
-          </a:prstGeom>
-          <a:noFill/>
-        </p:spPr>
-        <p:txBody>
-          <a:bodyPr wrap="square">
-            <a:spAutoFit/>
-          </a:bodyPr>
-          <a:lstStyle/>
-          <a:p>
-            <a:pPr algn="ctr">
-              <a:defRPr sz="1200" b="0">
-                <a:solidFill>
-                  <a:srgbClr val="2C3E50"/>
-                </a:solidFill>
-                <a:latin typeface="Calibri"/>
-              </a:defRPr>
-            </a:pPr>
-            <a:r>
-              <a:t>468 574</a:t>
-            </a:r>
-          </a:p>
-        </p:txBody>
-      </p:sp>
-      <p:sp>
-        <p:nvSpPr>
-          <p:cNvPr id="62" name="Rectangle 61"/>
-          <p:cNvSpPr/>
-          <p:nvPr/>
-        </p:nvSpPr>
-        <p:spPr>
-          <a:xfrm>
-            <a:off x="7863840" y="4050792"/>
-            <a:ext cx="1828800" cy="384048"/>
-          </a:xfrm>
-          <a:prstGeom prst="rect">
-            <a:avLst/>
-          </a:prstGeom>
-          <a:solidFill>
-            <a:srgbClr val="F2F3F4"/>
-          </a:solidFill>
-          <a:ln>
-            <a:noFill/>
-          </a:ln>
-        </p:spPr>
-        <p:style>
-          <a:lnRef idx="1">
-            <a:schemeClr val="accent1"/>
-          </a:lnRef>
-          <a:fillRef idx="3">
-            <a:schemeClr val="accent1"/>
-          </a:fillRef>
-          <a:effectRef idx="2">
-            <a:schemeClr val="accent1"/>
-          </a:effectRef>
-          <a:fontRef idx="minor">
-            <a:schemeClr val="lt1"/>
-          </a:fontRef>
-        </p:style>
-        <p:txBody>
-          <a:bodyPr rtlCol="0" anchor="ctr"/>
-          <a:lstStyle/>
-          <a:p>
-            <a:pPr algn="ctr"/>
-          </a:p>
-        </p:txBody>
-      </p:sp>
-      <p:sp>
-        <p:nvSpPr>
-          <p:cNvPr id="63" name="TextBox 62"/>
-          <p:cNvSpPr txBox="1"/>
-          <p:nvPr/>
-        </p:nvSpPr>
-        <p:spPr>
-          <a:xfrm>
-            <a:off x="7863840" y="4076192"/>
-            <a:ext cx="1828800" cy="347472"/>
-          </a:xfrm>
-          <a:prstGeom prst="rect">
-            <a:avLst/>
-          </a:prstGeom>
-          <a:noFill/>
-        </p:spPr>
-        <p:txBody>
-          <a:bodyPr wrap="square">
-            <a:spAutoFit/>
-          </a:bodyPr>
-          <a:lstStyle/>
-          <a:p>
-            <a:pPr algn="ctr">
-              <a:defRPr sz="1200" b="0">
-                <a:solidFill>
-                  <a:srgbClr val="2C3E50"/>
-                </a:solidFill>
-                <a:latin typeface="Calibri"/>
-              </a:defRPr>
-            </a:pPr>
-            <a:r>
-              <a:t>250%</a:t>
-            </a:r>
-          </a:p>
-        </p:txBody>
-      </p:sp>
-      <p:sp>
-        <p:nvSpPr>
-          <p:cNvPr id="64" name="Rectangle 63"/>
-          <p:cNvSpPr/>
-          <p:nvPr/>
-        </p:nvSpPr>
-        <p:spPr>
-          <a:xfrm>
-            <a:off x="9692640" y="4050792"/>
-            <a:ext cx="1828800" cy="384048"/>
-          </a:xfrm>
-          <a:prstGeom prst="rect">
-            <a:avLst/>
-          </a:prstGeom>
-          <a:solidFill>
-            <a:srgbClr val="F2F3F4"/>
-          </a:solidFill>
-          <a:ln>
-            <a:noFill/>
-          </a:ln>
-        </p:spPr>
-        <p:style>
-          <a:lnRef idx="1">
-            <a:schemeClr val="accent1"/>
-          </a:lnRef>
-          <a:fillRef idx="3">
-            <a:schemeClr val="accent1"/>
-          </a:fillRef>
-          <a:effectRef idx="2">
-            <a:schemeClr val="accent1"/>
-          </a:effectRef>
-          <a:fontRef idx="minor">
-            <a:schemeClr val="lt1"/>
-          </a:fontRef>
-        </p:style>
-        <p:txBody>
-          <a:bodyPr rtlCol="0" anchor="ctr"/>
-          <a:lstStyle/>
-          <a:p>
-            <a:pPr algn="ctr"/>
-          </a:p>
-        </p:txBody>
-      </p:sp>
-      <p:sp>
-        <p:nvSpPr>
-          <p:cNvPr id="65" name="TextBox 64"/>
-          <p:cNvSpPr txBox="1"/>
-          <p:nvPr/>
-        </p:nvSpPr>
-        <p:spPr>
-          <a:xfrm>
-            <a:off x="9692640" y="4076192"/>
-            <a:ext cx="1828800" cy="347472"/>
-          </a:xfrm>
-          <a:prstGeom prst="rect">
-            <a:avLst/>
-          </a:prstGeom>
-          <a:noFill/>
-        </p:spPr>
-        <p:txBody>
-          <a:bodyPr wrap="square">
-            <a:spAutoFit/>
-          </a:bodyPr>
-          <a:lstStyle/>
-          <a:p>
-            <a:pPr algn="ctr">
-              <a:defRPr sz="1200" b="0">
-                <a:solidFill>
-                  <a:srgbClr val="2C3E50"/>
-                </a:solidFill>
-                <a:latin typeface="Calibri"/>
-              </a:defRPr>
-            </a:pPr>
-            <a:r>
-              <a:t>-37.3%</a:t>
-            </a:r>
-          </a:p>
-        </p:txBody>
-      </p:sp>
-      <p:sp>
-        <p:nvSpPr>
-          <p:cNvPr id="66" name="Rectangle 65"/>
-          <p:cNvSpPr/>
-          <p:nvPr/>
-        </p:nvSpPr>
-        <p:spPr>
-          <a:xfrm>
-            <a:off x="548640" y="4434840"/>
-            <a:ext cx="2743200" cy="384048"/>
-          </a:xfrm>
-          <a:prstGeom prst="rect">
-            <a:avLst/>
-          </a:prstGeom>
-          <a:solidFill>
-            <a:srgbClr val="FFFFFF"/>
-          </a:solidFill>
-          <a:ln>
-            <a:noFill/>
-          </a:ln>
-        </p:spPr>
-        <p:style>
-          <a:lnRef idx="1">
-            <a:schemeClr val="accent1"/>
-          </a:lnRef>
-          <a:fillRef idx="3">
-            <a:schemeClr val="accent1"/>
-          </a:fillRef>
-          <a:effectRef idx="2">
-            <a:schemeClr val="accent1"/>
-          </a:effectRef>
-          <a:fontRef idx="minor">
-            <a:schemeClr val="lt1"/>
-          </a:fontRef>
-        </p:style>
-        <p:txBody>
-          <a:bodyPr rtlCol="0" anchor="ctr"/>
-          <a:lstStyle/>
-          <a:p>
-            <a:pPr algn="ctr"/>
-          </a:p>
-        </p:txBody>
-      </p:sp>
-      <p:sp>
-        <p:nvSpPr>
-          <p:cNvPr id="67" name="TextBox 66"/>
-          <p:cNvSpPr txBox="1"/>
-          <p:nvPr/>
-        </p:nvSpPr>
-        <p:spPr>
-          <a:xfrm>
-            <a:off x="548640" y="4460240"/>
-            <a:ext cx="2743200" cy="347472"/>
-          </a:xfrm>
-          <a:prstGeom prst="rect">
-            <a:avLst/>
-          </a:prstGeom>
-          <a:noFill/>
-        </p:spPr>
-        <p:txBody>
-          <a:bodyPr wrap="square">
-            <a:spAutoFit/>
-          </a:bodyPr>
-          <a:lstStyle/>
-          <a:p>
-            <a:pPr algn="ctr">
-              <a:defRPr sz="1200" b="0">
-                <a:solidFill>
-                  <a:srgbClr val="2C3E50"/>
-                </a:solidFill>
-                <a:latin typeface="Calibri"/>
-              </a:defRPr>
-            </a:pPr>
-            <a:r>
-              <a:t>Prophet</a:t>
-            </a:r>
-          </a:p>
-        </p:txBody>
-      </p:sp>
-      <p:sp>
-        <p:nvSpPr>
-          <p:cNvPr id="68" name="Rectangle 67"/>
-          <p:cNvSpPr/>
-          <p:nvPr/>
-        </p:nvSpPr>
-        <p:spPr>
-          <a:xfrm>
-            <a:off x="3291840" y="4434840"/>
-            <a:ext cx="2286000" cy="384048"/>
-          </a:xfrm>
-          <a:prstGeom prst="rect">
-            <a:avLst/>
-          </a:prstGeom>
-          <a:solidFill>
-            <a:srgbClr val="FFFFFF"/>
-          </a:solidFill>
-          <a:ln>
-            <a:noFill/>
-          </a:ln>
-        </p:spPr>
-        <p:style>
-          <a:lnRef idx="1">
-            <a:schemeClr val="accent1"/>
-          </a:lnRef>
-          <a:fillRef idx="3">
-            <a:schemeClr val="accent1"/>
-          </a:fillRef>
-          <a:effectRef idx="2">
-            <a:schemeClr val="accent1"/>
-          </a:effectRef>
-          <a:fontRef idx="minor">
-            <a:schemeClr val="lt1"/>
-          </a:fontRef>
-        </p:style>
-        <p:txBody>
-          <a:bodyPr rtlCol="0" anchor="ctr"/>
-          <a:lstStyle/>
-          <a:p>
-            <a:pPr algn="ctr"/>
-          </a:p>
-        </p:txBody>
-      </p:sp>
-      <p:sp>
-        <p:nvSpPr>
-          <p:cNvPr id="69" name="TextBox 68"/>
-          <p:cNvSpPr txBox="1"/>
-          <p:nvPr/>
-        </p:nvSpPr>
-        <p:spPr>
-          <a:xfrm>
-            <a:off x="3291840" y="4460240"/>
-            <a:ext cx="2286000" cy="347472"/>
-          </a:xfrm>
-          <a:prstGeom prst="rect">
-            <a:avLst/>
-          </a:prstGeom>
-          <a:noFill/>
-        </p:spPr>
-        <p:txBody>
-          <a:bodyPr wrap="square">
-            <a:spAutoFit/>
-          </a:bodyPr>
-          <a:lstStyle/>
-          <a:p>
-            <a:pPr algn="ctr">
-              <a:defRPr sz="1200" b="0">
-                <a:solidFill>
-                  <a:srgbClr val="2C3E50"/>
-                </a:solidFill>
-                <a:latin typeface="Calibri"/>
-              </a:defRPr>
-            </a:pPr>
-            <a:r>
-              <a:t>347 629</a:t>
-            </a:r>
-          </a:p>
-        </p:txBody>
-      </p:sp>
-      <p:sp>
-        <p:nvSpPr>
-          <p:cNvPr id="70" name="Rectangle 69"/>
-          <p:cNvSpPr/>
-          <p:nvPr/>
-        </p:nvSpPr>
-        <p:spPr>
-          <a:xfrm>
-            <a:off x="5577840" y="4434840"/>
-            <a:ext cx="2286000" cy="384048"/>
-          </a:xfrm>
-          <a:prstGeom prst="rect">
-            <a:avLst/>
-          </a:prstGeom>
-          <a:solidFill>
-            <a:srgbClr val="FFFFFF"/>
-          </a:solidFill>
-          <a:ln>
-            <a:noFill/>
-          </a:ln>
-        </p:spPr>
-        <p:style>
-          <a:lnRef idx="1">
-            <a:schemeClr val="accent1"/>
-          </a:lnRef>
-          <a:fillRef idx="3">
-            <a:schemeClr val="accent1"/>
-          </a:fillRef>
-          <a:effectRef idx="2">
-            <a:schemeClr val="accent1"/>
-          </a:effectRef>
-          <a:fontRef idx="minor">
-            <a:schemeClr val="lt1"/>
-          </a:fontRef>
-        </p:style>
-        <p:txBody>
-          <a:bodyPr rtlCol="0" anchor="ctr"/>
-          <a:lstStyle/>
-          <a:p>
-            <a:pPr algn="ctr"/>
-          </a:p>
-        </p:txBody>
-      </p:sp>
-      <p:sp>
-        <p:nvSpPr>
-          <p:cNvPr id="71" name="TextBox 70"/>
-          <p:cNvSpPr txBox="1"/>
-          <p:nvPr/>
-        </p:nvSpPr>
-        <p:spPr>
-          <a:xfrm>
-            <a:off x="5577840" y="4460240"/>
-            <a:ext cx="2286000" cy="347472"/>
-          </a:xfrm>
-          <a:prstGeom prst="rect">
-            <a:avLst/>
-          </a:prstGeom>
-          <a:noFill/>
-        </p:spPr>
-        <p:txBody>
-          <a:bodyPr wrap="square">
-            <a:spAutoFit/>
-          </a:bodyPr>
-          <a:lstStyle/>
-          <a:p>
-            <a:pPr algn="ctr">
-              <a:defRPr sz="1200" b="0">
-                <a:solidFill>
-                  <a:srgbClr val="2C3E50"/>
-                </a:solidFill>
-                <a:latin typeface="Calibri"/>
-              </a:defRPr>
-            </a:pPr>
-            <a:r>
-              <a:t>417 498</a:t>
-            </a:r>
-          </a:p>
-        </p:txBody>
-      </p:sp>
-      <p:sp>
-        <p:nvSpPr>
-          <p:cNvPr id="72" name="Rectangle 71"/>
-          <p:cNvSpPr/>
-          <p:nvPr/>
-        </p:nvSpPr>
-        <p:spPr>
-          <a:xfrm>
-            <a:off x="7863840" y="4434840"/>
-            <a:ext cx="1828800" cy="384048"/>
-          </a:xfrm>
-          <a:prstGeom prst="rect">
-            <a:avLst/>
-          </a:prstGeom>
-          <a:solidFill>
-            <a:srgbClr val="FFFFFF"/>
-          </a:solidFill>
-          <a:ln>
-            <a:noFill/>
-          </a:ln>
-        </p:spPr>
-        <p:style>
-          <a:lnRef idx="1">
-            <a:schemeClr val="accent1"/>
-          </a:lnRef>
-          <a:fillRef idx="3">
-            <a:schemeClr val="accent1"/>
-          </a:fillRef>
-          <a:effectRef idx="2">
-            <a:schemeClr val="accent1"/>
-          </a:effectRef>
-          <a:fontRef idx="minor">
-            <a:schemeClr val="lt1"/>
-          </a:fontRef>
-        </p:style>
-        <p:txBody>
-          <a:bodyPr rtlCol="0" anchor="ctr"/>
-          <a:lstStyle/>
-          <a:p>
-            <a:pPr algn="ctr"/>
-          </a:p>
-        </p:txBody>
-      </p:sp>
-      <p:sp>
-        <p:nvSpPr>
-          <p:cNvPr id="73" name="TextBox 72"/>
-          <p:cNvSpPr txBox="1"/>
-          <p:nvPr/>
-        </p:nvSpPr>
-        <p:spPr>
-          <a:xfrm>
-            <a:off x="7863840" y="4460240"/>
-            <a:ext cx="1828800" cy="347472"/>
-          </a:xfrm>
-          <a:prstGeom prst="rect">
-            <a:avLst/>
-          </a:prstGeom>
-          <a:noFill/>
-        </p:spPr>
-        <p:txBody>
-          <a:bodyPr wrap="square">
-            <a:spAutoFit/>
-          </a:bodyPr>
-          <a:lstStyle/>
-          <a:p>
-            <a:pPr algn="ctr">
-              <a:defRPr sz="1200" b="0">
-                <a:solidFill>
-                  <a:srgbClr val="2C3E50"/>
-                </a:solidFill>
-                <a:latin typeface="Calibri"/>
-              </a:defRPr>
-            </a:pPr>
-            <a:r>
-              <a:t>175%</a:t>
-            </a:r>
-          </a:p>
-        </p:txBody>
-      </p:sp>
-      <p:sp>
-        <p:nvSpPr>
-          <p:cNvPr id="74" name="Rectangle 73"/>
-          <p:cNvSpPr/>
-          <p:nvPr/>
-        </p:nvSpPr>
-        <p:spPr>
-          <a:xfrm>
-            <a:off x="9692640" y="4434840"/>
-            <a:ext cx="1828800" cy="384048"/>
-          </a:xfrm>
-          <a:prstGeom prst="rect">
-            <a:avLst/>
-          </a:prstGeom>
-          <a:solidFill>
-            <a:srgbClr val="FFFFFF"/>
-          </a:solidFill>
-          <a:ln>
-            <a:noFill/>
-          </a:ln>
-        </p:spPr>
-        <p:style>
-          <a:lnRef idx="1">
-            <a:schemeClr val="accent1"/>
-          </a:lnRef>
-          <a:fillRef idx="3">
-            <a:schemeClr val="accent1"/>
-          </a:fillRef>
-          <a:effectRef idx="2">
-            <a:schemeClr val="accent1"/>
-          </a:effectRef>
-          <a:fontRef idx="minor">
-            <a:schemeClr val="lt1"/>
-          </a:fontRef>
-        </p:style>
-        <p:txBody>
-          <a:bodyPr rtlCol="0" anchor="ctr"/>
-          <a:lstStyle/>
-          <a:p>
-            <a:pPr algn="ctr"/>
-          </a:p>
-        </p:txBody>
-      </p:sp>
-      <p:sp>
-        <p:nvSpPr>
-          <p:cNvPr id="75" name="TextBox 74"/>
-          <p:cNvSpPr txBox="1"/>
-          <p:nvPr/>
-        </p:nvSpPr>
-        <p:spPr>
-          <a:xfrm>
-            <a:off x="9692640" y="4460240"/>
-            <a:ext cx="1828800" cy="347472"/>
-          </a:xfrm>
-          <a:prstGeom prst="rect">
-            <a:avLst/>
-          </a:prstGeom>
-          <a:noFill/>
-        </p:spPr>
-        <p:txBody>
-          <a:bodyPr wrap="square">
-            <a:spAutoFit/>
-          </a:bodyPr>
-          <a:lstStyle/>
-          <a:p>
-            <a:pPr algn="ctr">
-              <a:defRPr sz="1200" b="0">
-                <a:solidFill>
-                  <a:srgbClr val="2C3E50"/>
-                </a:solidFill>
-                <a:latin typeface="Calibri"/>
-              </a:defRPr>
-            </a:pPr>
-            <a:r>
-              <a:t>-15.3%</a:t>
-            </a:r>
-          </a:p>
-        </p:txBody>
-      </p:sp>
-      <p:sp>
-        <p:nvSpPr>
-          <p:cNvPr id="76" name="Rectangle 75"/>
-          <p:cNvSpPr/>
-          <p:nvPr/>
-        </p:nvSpPr>
-        <p:spPr>
-          <a:xfrm>
-            <a:off x="548640" y="4818888"/>
             <a:ext cx="2743200" cy="384048"/>
           </a:xfrm>
           <a:prstGeom prst="rect">
@@ -11448,13 +10263,13 @@
       </p:sp>
       <p:sp>
         <p:nvSpPr>
-          <p:cNvPr id="77" name="TextBox 76"/>
-          <p:cNvSpPr txBox="1"/>
-          <p:nvPr/>
-        </p:nvSpPr>
-        <p:spPr>
-          <a:xfrm>
-            <a:off x="548640" y="4844288"/>
+          <p:cNvPr id="47" name="TextBox 46"/>
+          <p:cNvSpPr txBox="1"/>
+          <p:nvPr/>
+        </p:nvSpPr>
+        <p:spPr>
+          <a:xfrm>
+            <a:off x="548640" y="3692144"/>
             <a:ext cx="2743200" cy="347472"/>
           </a:xfrm>
           <a:prstGeom prst="rect">
@@ -11477,20 +10292,20 @@
               </a:defRPr>
             </a:pPr>
             <a:r>
-              <a:t>Chronos-T5-Small</a:t>
-            </a:r>
-          </a:p>
-        </p:txBody>
-      </p:sp>
-      <p:sp>
-        <p:nvSpPr>
-          <p:cNvPr id="78" name="Rectangle 77"/>
+              <a:t>LightGBM + lags + holidays</a:t>
+            </a:r>
+          </a:p>
+        </p:txBody>
+      </p:sp>
+      <p:sp>
+        <p:nvSpPr>
+          <p:cNvPr id="48" name="Rectangle 47"/>
           <p:cNvSpPr/>
           <p:nvPr/>
         </p:nvSpPr>
         <p:spPr>
           <a:xfrm>
-            <a:off x="3291840" y="4818888"/>
+            <a:off x="3291840" y="3666744"/>
             <a:ext cx="2286000" cy="384048"/>
           </a:xfrm>
           <a:prstGeom prst="rect">
@@ -11527,13 +10342,13 @@
       </p:sp>
       <p:sp>
         <p:nvSpPr>
-          <p:cNvPr id="79" name="TextBox 78"/>
-          <p:cNvSpPr txBox="1"/>
-          <p:nvPr/>
-        </p:nvSpPr>
-        <p:spPr>
-          <a:xfrm>
-            <a:off x="3291840" y="4844288"/>
+          <p:cNvPr id="49" name="TextBox 48"/>
+          <p:cNvSpPr txBox="1"/>
+          <p:nvPr/>
+        </p:nvSpPr>
+        <p:spPr>
+          <a:xfrm>
+            <a:off x="3291840" y="3692144"/>
             <a:ext cx="2286000" cy="347472"/>
           </a:xfrm>
           <a:prstGeom prst="rect">
@@ -11556,20 +10371,20 @@
               </a:defRPr>
             </a:pPr>
             <a:r>
-              <a:t>331 551</a:t>
-            </a:r>
-          </a:p>
-        </p:txBody>
-      </p:sp>
-      <p:sp>
-        <p:nvSpPr>
-          <p:cNvPr id="80" name="Rectangle 79"/>
+              <a:t>318 741</a:t>
+            </a:r>
+          </a:p>
+        </p:txBody>
+      </p:sp>
+      <p:sp>
+        <p:nvSpPr>
+          <p:cNvPr id="50" name="Rectangle 49"/>
           <p:cNvSpPr/>
           <p:nvPr/>
         </p:nvSpPr>
         <p:spPr>
           <a:xfrm>
-            <a:off x="5577840" y="4818888"/>
+            <a:off x="5577840" y="3666744"/>
             <a:ext cx="2286000" cy="384048"/>
           </a:xfrm>
           <a:prstGeom prst="rect">
@@ -11606,13 +10421,13 @@
       </p:sp>
       <p:sp>
         <p:nvSpPr>
-          <p:cNvPr id="81" name="TextBox 80"/>
-          <p:cNvSpPr txBox="1"/>
-          <p:nvPr/>
-        </p:nvSpPr>
-        <p:spPr>
-          <a:xfrm>
-            <a:off x="5577840" y="4844288"/>
+          <p:cNvPr id="51" name="TextBox 50"/>
+          <p:cNvSpPr txBox="1"/>
+          <p:nvPr/>
+        </p:nvSpPr>
+        <p:spPr>
+          <a:xfrm>
+            <a:off x="5577840" y="3692144"/>
             <a:ext cx="2286000" cy="347472"/>
           </a:xfrm>
           <a:prstGeom prst="rect">
@@ -11635,20 +10450,20 @@
               </a:defRPr>
             </a:pPr>
             <a:r>
-              <a:t>382 864</a:t>
-            </a:r>
-          </a:p>
-        </p:txBody>
-      </p:sp>
-      <p:sp>
-        <p:nvSpPr>
-          <p:cNvPr id="82" name="Rectangle 81"/>
+              <a:t>416 501</a:t>
+            </a:r>
+          </a:p>
+        </p:txBody>
+      </p:sp>
+      <p:sp>
+        <p:nvSpPr>
+          <p:cNvPr id="52" name="Rectangle 51"/>
           <p:cNvSpPr/>
           <p:nvPr/>
         </p:nvSpPr>
         <p:spPr>
           <a:xfrm>
-            <a:off x="7863840" y="4818888"/>
+            <a:off x="7863840" y="3666744"/>
             <a:ext cx="1828800" cy="384048"/>
           </a:xfrm>
           <a:prstGeom prst="rect">
@@ -11685,13 +10500,13 @@
       </p:sp>
       <p:sp>
         <p:nvSpPr>
-          <p:cNvPr id="83" name="TextBox 82"/>
-          <p:cNvSpPr txBox="1"/>
-          <p:nvPr/>
-        </p:nvSpPr>
-        <p:spPr>
-          <a:xfrm>
-            <a:off x="7863840" y="4844288"/>
+          <p:cNvPr id="53" name="TextBox 52"/>
+          <p:cNvSpPr txBox="1"/>
+          <p:nvPr/>
+        </p:nvSpPr>
+        <p:spPr>
+          <a:xfrm>
+            <a:off x="7863840" y="3692144"/>
             <a:ext cx="1828800" cy="347472"/>
           </a:xfrm>
           <a:prstGeom prst="rect">
@@ -11714,20 +10529,20 @@
               </a:defRPr>
             </a:pPr>
             <a:r>
-              <a:t>136%</a:t>
-            </a:r>
-          </a:p>
-        </p:txBody>
-      </p:sp>
-      <p:sp>
-        <p:nvSpPr>
-          <p:cNvPr id="84" name="Rectangle 83"/>
+              <a:t>148.0%</a:t>
+            </a:r>
+          </a:p>
+        </p:txBody>
+      </p:sp>
+      <p:sp>
+        <p:nvSpPr>
+          <p:cNvPr id="54" name="Rectangle 53"/>
           <p:cNvSpPr/>
           <p:nvPr/>
         </p:nvSpPr>
         <p:spPr>
           <a:xfrm>
-            <a:off x="9692640" y="4818888"/>
+            <a:off x="9692640" y="3666744"/>
             <a:ext cx="1828800" cy="384048"/>
           </a:xfrm>
           <a:prstGeom prst="rect">
@@ -11764,13 +10579,13 @@
       </p:sp>
       <p:sp>
         <p:nvSpPr>
-          <p:cNvPr id="85" name="TextBox 84"/>
-          <p:cNvSpPr txBox="1"/>
-          <p:nvPr/>
-        </p:nvSpPr>
-        <p:spPr>
-          <a:xfrm>
-            <a:off x="9692640" y="4844288"/>
+          <p:cNvPr id="55" name="TextBox 54"/>
+          <p:cNvSpPr txBox="1"/>
+          <p:nvPr/>
+        </p:nvSpPr>
+        <p:spPr>
+          <a:xfrm>
+            <a:off x="9692640" y="3692144"/>
             <a:ext cx="1828800" cy="347472"/>
           </a:xfrm>
           <a:prstGeom prst="rect">
@@ -11793,20 +10608,20 @@
               </a:defRPr>
             </a:pPr>
             <a:r>
-              <a:t>-10.0%</a:t>
-            </a:r>
-          </a:p>
-        </p:txBody>
-      </p:sp>
-      <p:sp>
-        <p:nvSpPr>
-          <p:cNvPr id="86" name="TextBox 85"/>
-          <p:cNvSpPr txBox="1"/>
-          <p:nvPr/>
-        </p:nvSpPr>
-        <p:spPr>
-          <a:xfrm>
-            <a:off x="640080" y="5394960"/>
+              <a:t>+12.2%</a:t>
+            </a:r>
+          </a:p>
+        </p:txBody>
+      </p:sp>
+      <p:sp>
+        <p:nvSpPr>
+          <p:cNvPr id="56" name="TextBox 55"/>
+          <p:cNvSpPr txBox="1"/>
+          <p:nvPr/>
+        </p:nvSpPr>
+        <p:spPr>
+          <a:xfrm>
+            <a:off x="640080" y="4206240"/>
             <a:ext cx="5029200" cy="365760"/>
           </a:xfrm>
           <a:prstGeom prst="rect">
@@ -11829,20 +10644,20 @@
               </a:defRPr>
             </a:pPr>
             <a:r>
-              <a:t>Amazon Chronos-T5-Small</a:t>
-            </a:r>
-          </a:p>
-        </p:txBody>
-      </p:sp>
-      <p:sp>
-        <p:nvSpPr>
-          <p:cNvPr id="87" name="TextBox 86"/>
-          <p:cNvSpPr txBox="1"/>
-          <p:nvPr/>
-        </p:nvSpPr>
-        <p:spPr>
-          <a:xfrm>
-            <a:off x="640080" y="5806440"/>
+              <a:t>LightGBM + Calendrier Islamique</a:t>
+            </a:r>
+          </a:p>
+        </p:txBody>
+      </p:sp>
+      <p:sp>
+        <p:nvSpPr>
+          <p:cNvPr id="57" name="TextBox 56"/>
+          <p:cNvSpPr txBox="1"/>
+          <p:nvPr/>
+        </p:nvSpPr>
+        <p:spPr>
+          <a:xfrm>
+            <a:off x="640080" y="4617720"/>
             <a:ext cx="5029200" cy="3657600"/>
           </a:xfrm>
           <a:prstGeom prst="rect">
@@ -11868,7 +10683,7 @@
               </a:defRPr>
             </a:pPr>
             <a:r>
-              <a:t>Transformeur pre-entraine (46M parametres)</a:t>
+              <a:t>19 features : lags(1,7,14,28), rolling stats, calendrier</a:t>
             </a:r>
           </a:p>
           <a:p>
@@ -11884,7 +10699,7 @@
               </a:defRPr>
             </a:pPr>
             <a:r>
-              <a:t>Zero-shot : pas de fine-tuning necessaire</a:t>
+              <a:t>Covariables : Ramadan, Aid el-Fitr, Aid el-Adha, Mawlid</a:t>
             </a:r>
           </a:p>
           <a:p>
@@ -11900,7 +10715,7 @@
               </a:defRPr>
             </a:pPr>
             <a:r>
-              <a:t>Meilleur RMSE (382K) et MAPE (136%)</a:t>
+              <a:t>hijri-converter : calcul programmatique des dates</a:t>
             </a:r>
           </a:p>
           <a:p>
@@ -11916,6 +10731,22 @@
               </a:defRPr>
             </a:pPr>
             <a:r>
+              <a:t>Prevision recursive multi-step (pas de fuite)</a:t>
+            </a:r>
+          </a:p>
+          <a:p>
+            <a:pPr>
+              <a:spcAft>
+                <a:spcPts val="200"/>
+              </a:spcAft>
+              <a:defRPr sz="1200">
+                <a:solidFill>
+                  <a:srgbClr val="2C3E50"/>
+                </a:solidFill>
+                <a:latin typeface="Calibri"/>
+              </a:defRPr>
+            </a:pPr>
+            <a:r>
               <a:t>4 series : global + 3 categories produit</a:t>
             </a:r>
           </a:p>
@@ -11923,14 +10754,14 @@
       </p:sp>
       <p:sp>
         <p:nvSpPr>
-          <p:cNvPr id="88" name="Rounded Rectangle 87"/>
+          <p:cNvPr id="58" name="Rounded Rectangle 57"/>
           <p:cNvSpPr/>
           <p:nvPr/>
         </p:nvSpPr>
         <p:spPr>
           <a:xfrm>
-            <a:off x="6217920" y="5349240"/>
-            <a:ext cx="5212080" cy="1188720"/>
+            <a:off x="6217920" y="4160520"/>
+            <a:ext cx="5212080" cy="2377440"/>
           </a:xfrm>
           <a:prstGeom prst="roundRect">
             <a:avLst/>
@@ -11968,13 +10799,13 @@
       </p:sp>
       <p:sp>
         <p:nvSpPr>
-          <p:cNvPr id="89" name="TextBox 88"/>
-          <p:cNvSpPr txBox="1"/>
-          <p:nvPr/>
-        </p:nvSpPr>
-        <p:spPr>
-          <a:xfrm>
-            <a:off x="6400800" y="5394960"/>
+          <p:cNvPr id="59" name="TextBox 58"/>
+          <p:cNvSpPr txBox="1"/>
+          <p:nvPr/>
+        </p:nvSpPr>
+        <p:spPr>
+          <a:xfrm>
+            <a:off x="6400800" y="4206240"/>
             <a:ext cx="4846320" cy="274320"/>
           </a:xfrm>
           <a:prstGeom prst="rect">
@@ -11997,20 +10828,20 @@
               </a:defRPr>
             </a:pPr>
             <a:r>
-              <a:t>Pourquoi Chronos ?</a:t>
-            </a:r>
-          </a:p>
-        </p:txBody>
-      </p:sp>
-      <p:sp>
-        <p:nvSpPr>
-          <p:cNvPr id="90" name="TextBox 89"/>
-          <p:cNvSpPr txBox="1"/>
-          <p:nvPr/>
-        </p:nvSpPr>
-        <p:spPr>
-          <a:xfrm>
-            <a:off x="6400800" y="5715000"/>
+              <a:t>Pourquoi LightGBM ?</a:t>
+            </a:r>
+          </a:p>
+        </p:txBody>
+      </p:sp>
+      <p:sp>
+        <p:nvSpPr>
+          <p:cNvPr id="60" name="TextBox 59"/>
+          <p:cNvSpPr txBox="1"/>
+          <p:nvPr/>
+        </p:nvSpPr>
+        <p:spPr>
+          <a:xfrm>
+            <a:off x="6400800" y="4526280"/>
             <a:ext cx="4846320" cy="3657600"/>
           </a:xfrm>
           <a:prstGeom prst="rect">
@@ -12036,7 +10867,7 @@
               </a:defRPr>
             </a:pPr>
             <a:r>
-              <a:t>RMSE le plus bas : predictions les plus stables</a:t>
+              <a:t>Meilleur MAE : 318 741 DZD (+12.2% vs baseline)</a:t>
             </a:r>
           </a:p>
           <a:p>
@@ -12052,7 +10883,7 @@
               </a:defRPr>
             </a:pPr>
             <a:r>
-              <a:t>MAPE le plus bas : proportionnellement le plus precis</a:t>
+              <a:t>Supporte les covariables (calendrier islamique)</a:t>
             </a:r>
           </a:p>
           <a:p>
@@ -12068,14 +10899,46 @@
               </a:defRPr>
             </a:pPr>
             <a:r>
-              <a:t>Intervalles de confiance natifs (10e-90e percentile)</a:t>
-            </a:r>
-          </a:p>
-        </p:txBody>
-      </p:sp>
-      <p:sp>
-        <p:nvSpPr>
-          <p:cNvPr id="91" name="TextBox 90"/>
+              <a:t>Modeles fondamentaux (Chronos, TimesFM, MOIRAI)</a:t>
+            </a:r>
+          </a:p>
+          <a:p>
+            <a:pPr>
+              <a:spcAft>
+                <a:spcPts val="200"/>
+              </a:spcAft>
+              <a:defRPr sz="1200">
+                <a:solidFill>
+                  <a:srgbClr val="2C3E50"/>
+                </a:solidFill>
+                <a:latin typeface="Calibri"/>
+              </a:defRPr>
+            </a:pPr>
+            <a:r>
+              <a:t>= zero-shot sans covariables -&gt; inadaptes</a:t>
+            </a:r>
+          </a:p>
+          <a:p>
+            <a:pPr>
+              <a:spcAft>
+                <a:spcPts val="200"/>
+              </a:spcAft>
+              <a:defRPr sz="1200">
+                <a:solidFill>
+                  <a:srgbClr val="2C3E50"/>
+                </a:solidFill>
+                <a:latin typeface="Calibri"/>
+              </a:defRPr>
+            </a:pPr>
+            <a:r>
+              <a:t>714 jours favorisent LightGBM vs deep learning</a:t>
+            </a:r>
+          </a:p>
+        </p:txBody>
+      </p:sp>
+      <p:sp>
+        <p:nvSpPr>
+          <p:cNvPr id="61" name="TextBox 60"/>
           <p:cNvSpPr txBox="1"/>
           <p:nvPr/>
         </p:nvSpPr>
@@ -13623,7 +12486,7 @@
               </a:defRPr>
             </a:pPr>
             <a:r>
-              <a:t>risk_ensemble.joblib (4 MB) - Ensemble CatBoost+LightGBM+XGBoost</a:t>
+              <a:t>risk_ensemble.joblib (7.6 MB) - Ensemble CatBoost+LightGBM+XGBoost</a:t>
             </a:r>
           </a:p>
           <a:p>
@@ -13655,7 +12518,7 @@
               </a:defRPr>
             </a:pPr>
             <a:r>
-              <a:t>forecaster_models.joblib - Donnees series temporelles (Chronos)</a:t>
+              <a:t>forecaster_lgbm.joblib (1.8 MB) - LightGBM + calendrier islamique</a:t>
             </a:r>
           </a:p>
           <a:p>
@@ -13671,7 +12534,7 @@
               </a:defRPr>
             </a:pPr>
             <a:r>
-              <a:t>metrics.json (3 KB) - Toutes les metriques d'evaluation</a:t>
+              <a:t>metrics.json (4 KB) - Toutes les metriques d'evaluation</a:t>
             </a:r>
           </a:p>
         </p:txBody>
@@ -14112,7 +12975,7 @@
               </a:defRPr>
             </a:pPr>
             <a:r>
-              <a:t>Ensemble ML (CatBoost+LightGBM+XGBoost + SMOTE) : F1 = 0.989, AUC = 0.695, Precision(echecs) = 99.3%</a:t>
+              <a:t>Ensemble ML (CatBoost+LightGBM+XGBoost + ADASYN + Optuna) : AUC = 0.9961, Rappel(echecs) = 98%</a:t>
             </a:r>
           </a:p>
           <a:p>
@@ -14128,7 +12991,7 @@
               </a:defRPr>
             </a:pPr>
             <a:r>
-              <a:t>Segmentation automatique : 5 profils clients (HDBSCAN)</a:t>
+              <a:t>31 features enrichies (8 categories), cible propre</a:t>
             </a:r>
           </a:p>
           <a:p>
@@ -14144,7 +13007,7 @@
               </a:defRPr>
             </a:pPr>
             <a:r>
-              <a:t>Prevision Chronos : meilleur RMSE et MAPE (8 modeles testes)</a:t>
+              <a:t>Segmentation automatique : 5 profils clients (HDBSCAN)</a:t>
             </a:r>
           </a:p>
           <a:p>
@@ -14160,7 +13023,7 @@
               </a:defRPr>
             </a:pPr>
             <a:r>
-              <a:t>Integration LLM (Gemini) multilingue AR/FR/EN</a:t>
+              <a:t>Prevision LightGBM + Calendrier islamique : MAE 318K DZD (+12.2% vs baseline, 5 modeles)</a:t>
             </a:r>
           </a:p>
           <a:p>
@@ -14176,7 +13039,7 @@
               </a:defRPr>
             </a:pPr>
             <a:r>
-              <a:t>API de reentrainement : upload CSV, backup, rollback</a:t>
+              <a:t>Integration LLM (Gemini) multilingue AR/FR/EN</a:t>
             </a:r>
           </a:p>
         </p:txBody>
@@ -14267,7 +13130,7 @@
               </a:defRPr>
             </a:pPr>
             <a:r>
-              <a:t>Saisonnalite locale (Ramadan, Aid Adha, etc.)</a:t>
+              <a:t>Impact reel des fetes islamiques (deja integrees)</a:t>
             </a:r>
           </a:p>
           <a:p>
@@ -17354,7 +16217,7 @@
               </a:defRPr>
             </a:pPr>
             <a:r>
-              <a:t>4 features</a:t>
+              <a:t>6 features</a:t>
             </a:r>
           </a:p>
         </p:txBody>
@@ -17390,7 +16253,7 @@
               </a:defRPr>
             </a:pPr>
             <a:r>
-              <a:t>Heure, jour, mois, weekend</a:t>
+              <a:t>Heure, jour, mois, weekend, trimestre</a:t>
             </a:r>
           </a:p>
         </p:txBody>
@@ -17507,7 +16370,7 @@
               </a:defRPr>
             </a:pPr>
             <a:r>
-              <a:t>5 features</a:t>
+              <a:t>4 features</a:t>
             </a:r>
           </a:p>
         </p:txBody>
@@ -17543,7 +16406,7 @@
               </a:defRPr>
             </a:pPr>
             <a:r>
-              <a:t>Montant, frais, remise, sous-total, ratio</a:t>
+              <a:t>Montant, sous-total, frais, ratio</a:t>
             </a:r>
           </a:p>
         </p:txBody>
@@ -17624,7 +16487,7 @@
               </a:defRPr>
             </a:pPr>
             <a:r>
-              <a:t>Produit</a:t>
+              <a:t>Client</a:t>
             </a:r>
           </a:p>
         </p:txBody>
@@ -17696,7 +16559,7 @@
               </a:defRPr>
             </a:pPr>
             <a:r>
-              <a:t>Articles, prix cat., popularite cat.</a:t>
+              <a:t>Recurrence, nb commandes, panier moyen</a:t>
             </a:r>
           </a:p>
         </p:txBody>
@@ -17777,7 +16640,7 @@
               </a:defRPr>
             </a:pPr>
             <a:r>
-              <a:t>Client</a:t>
+              <a:t>Paiement</a:t>
             </a:r>
           </a:p>
         </p:txBody>
@@ -17813,7 +16676,7 @@
               </a:defRPr>
             </a:pPr>
             <a:r>
-              <a:t>5 features</a:t>
+              <a:t>6 features</a:t>
             </a:r>
           </a:p>
         </p:txBody>
@@ -17849,7 +16712,7 @@
               </a:defRPr>
             </a:pPr>
             <a:r>
-              <a:t>Tel. alt, recurrence, nb commandes, CLV, source</a:t>
+              <a:t>Boleto/COD, CB, debit, voucher, mensualites</a:t>
             </a:r>
           </a:p>
         </p:txBody>
@@ -17930,7 +16793,7 @@
               </a:defRPr>
             </a:pPr>
             <a:r>
-              <a:t>Contexte</a:t>
+              <a:t>Qualite/Geo</a:t>
             </a:r>
           </a:p>
         </p:txBody>
@@ -17966,7 +16829,7 @@
               </a:defRPr>
             </a:pPr>
             <a:r>
-              <a:t>3 features</a:t>
+              <a:t>12 features</a:t>
             </a:r>
           </a:p>
         </p:txBody>
@@ -18002,7 +16865,7 @@
               </a:defRPr>
             </a:pPr>
             <a:r>
-              <a:t>Volume regional, delai, poids</a:t>
+              <a:t>Photos, desc., volume, poids, region, vendeur</a:t>
             </a:r>
           </a:p>
         </p:txBody>

--- a/docs/presentation.pptx
+++ b/docs/presentation.pptx
@@ -11151,7 +11151,7 @@
               </a:defRPr>
             </a:pPr>
             <a:r>
-              <a:t>FastAPI (Python) - 11 endpoints - Port 8001</a:t>
+              <a:t>FastAPI (Python) - 15 endpoints - Port 8001  |  PHP Backend - Port 8000</a:t>
             </a:r>
           </a:p>
         </p:txBody>
@@ -11719,7 +11719,7 @@
               </a:defRPr>
             </a:pPr>
             <a:r>
-              <a:t>Insights LLM</a:t>
+              <a:t>Reentrainement</a:t>
             </a:r>
           </a:p>
         </p:txBody>
@@ -11755,7 +11755,7 @@
               </a:defRPr>
             </a:pPr>
             <a:r>
-              <a:t>GET  /api/insights/summary</a:t>
+              <a:t>POST /api/v1/ai/retrain (depuis BDD)</a:t>
             </a:r>
           </a:p>
         </p:txBody>
@@ -11791,14 +11791,50 @@
               </a:defRPr>
             </a:pPr>
             <a:r>
-              <a:t>GET  /api/insights/recommendations</a:t>
-            </a:r>
-          </a:p>
-        </p:txBody>
-      </p:sp>
-      <p:sp>
-        <p:nvSpPr>
-          <p:cNvPr id="23" name="Rounded Rectangle 22"/>
+              <a:t>POST /api/retrain/upload-and-train</a:t>
+            </a:r>
+          </a:p>
+        </p:txBody>
+      </p:sp>
+      <p:sp>
+        <p:nvSpPr>
+          <p:cNvPr id="23" name="TextBox 22"/>
+          <p:cNvSpPr txBox="1"/>
+          <p:nvPr/>
+        </p:nvSpPr>
+        <p:spPr>
+          <a:xfrm>
+            <a:off x="2926080" y="5943600"/>
+            <a:ext cx="5486400" cy="274320"/>
+          </a:xfrm>
+          <a:prstGeom prst="rect">
+            <a:avLst/>
+          </a:prstGeom>
+          <a:noFill/>
+        </p:spPr>
+        <p:txBody>
+          <a:bodyPr wrap="square">
+            <a:spAutoFit/>
+          </a:bodyPr>
+          <a:lstStyle/>
+          <a:p>
+            <a:pPr algn="l">
+              <a:defRPr sz="1300" b="0">
+                <a:solidFill>
+                  <a:srgbClr val="2C3E50"/>
+                </a:solidFill>
+                <a:latin typeface="Consolas"/>
+              </a:defRPr>
+            </a:pPr>
+            <a:r>
+              <a:t>POST /api/retrain/restore-defaults</a:t>
+            </a:r>
+          </a:p>
+        </p:txBody>
+      </p:sp>
+      <p:sp>
+        <p:nvSpPr>
+          <p:cNvPr id="24" name="Rounded Rectangle 23"/>
           <p:cNvSpPr/>
           <p:nvPr/>
         </p:nvSpPr>
@@ -11841,7 +11877,7 @@
       </p:sp>
       <p:sp>
         <p:nvSpPr>
-          <p:cNvPr id="24" name="TextBox 23"/>
+          <p:cNvPr id="25" name="TextBox 24"/>
           <p:cNvSpPr txBox="1"/>
           <p:nvPr/>
         </p:nvSpPr>
@@ -11877,7 +11913,7 @@
       </p:sp>
       <p:sp>
         <p:nvSpPr>
-          <p:cNvPr id="25" name="TextBox 24"/>
+          <p:cNvPr id="26" name="TextBox 25"/>
           <p:cNvSpPr txBox="1"/>
           <p:nvPr/>
         </p:nvSpPr>
@@ -11973,7 +12009,7 @@
       </p:sp>
       <p:sp>
         <p:nvSpPr>
-          <p:cNvPr id="26" name="TextBox 25"/>
+          <p:cNvPr id="27" name="TextBox 26"/>
           <p:cNvSpPr txBox="1"/>
           <p:nvPr/>
         </p:nvSpPr>
@@ -12270,7 +12306,7 @@
               </a:defRPr>
             </a:pPr>
             <a:r>
-              <a:t>1. Upload du CSV via POST /api/retrain/upload-and-train</a:t>
+              <a:t>1. Clic sur 'Reentrainer depuis la base de donnees'</a:t>
             </a:r>
           </a:p>
           <a:p>
@@ -12286,7 +12322,7 @@
               </a:defRPr>
             </a:pPr>
             <a:r>
-              <a:t>2. Backup automatique des modeles actuels</a:t>
+              <a:t>2. Extraction automatique des commandes (PHP -&gt; CSV)</a:t>
             </a:r>
           </a:p>
           <a:p>
@@ -12302,7 +12338,7 @@
               </a:defRPr>
             </a:pPr>
             <a:r>
-              <a:t>3. Validation et adaptation du format des colonnes</a:t>
+              <a:t>3. Backup automatique des modeles actuels</a:t>
             </a:r>
           </a:p>
           <a:p>
@@ -12318,7 +12354,7 @@
               </a:defRPr>
             </a:pPr>
             <a:r>
-              <a:t>4. Entrainement des 3 modeles (risque, segments, prevision)</a:t>
+              <a:t>4. Optimisation Optuna (40 essais bayesiens)</a:t>
             </a:r>
           </a:p>
           <a:p>
@@ -12334,7 +12370,7 @@
               </a:defRPr>
             </a:pPr>
             <a:r>
-              <a:t>5. Sauvegarde des metriques dans metrics.json</a:t>
+              <a:t>5. Entrainement des 3 modeles (params optimises)</a:t>
             </a:r>
           </a:p>
           <a:p>
@@ -12350,7 +12386,7 @@
               </a:defRPr>
             </a:pPr>
             <a:r>
-              <a:t>6. Rechargement automatique dans le service</a:t>
+              <a:t>6. Sauvegarde metriques + parametres optimaux</a:t>
             </a:r>
           </a:p>
           <a:p>
@@ -12366,7 +12402,23 @@
               </a:defRPr>
             </a:pPr>
             <a:r>
-              <a:t>7. Rollback possible via /api/retrain/restore-defaults</a:t>
+              <a:t>7. Rechargement automatique dans le service</a:t>
+            </a:r>
+          </a:p>
+          <a:p>
+            <a:pPr>
+              <a:spcAft>
+                <a:spcPts val="300"/>
+              </a:spcAft>
+              <a:defRPr sz="1300">
+                <a:solidFill>
+                  <a:srgbClr val="2C3E50"/>
+                </a:solidFill>
+                <a:latin typeface="Calibri"/>
+              </a:defRPr>
+            </a:pPr>
+            <a:r>
+              <a:t>8. Rollback possible via restore-defaults</a:t>
             </a:r>
           </a:p>
         </p:txBody>
@@ -12613,7 +12665,7 @@
               </a:defRPr>
             </a:pPr>
             <a:r>
-              <a:t>Format CSV attendu (GET /api/retrain/data-format)</a:t>
+              <a:t>2 methodes de reentrainement</a:t>
             </a:r>
           </a:p>
         </p:txBody>
@@ -12652,7 +12704,7 @@
               </a:defRPr>
             </a:pPr>
             <a:r>
-              <a:t>Requis: order_status, order_purchase_timestamp,</a:t>
+              <a:t>Methode 1 (recommandee) : depuis la base de donnees</a:t>
             </a:r>
           </a:p>
           <a:p>
@@ -12668,7 +12720,7 @@
               </a:defRPr>
             </a:pPr>
             <a:r>
-              <a:t>        payment_value, customer_unique_id</a:t>
+              <a:t>  -&gt; POST /api/v1/ai/retrain (un clic, automatique)</a:t>
             </a:r>
           </a:p>
           <a:p>
@@ -12684,7 +12736,7 @@
               </a:defRPr>
             </a:pPr>
             <a:r>
-              <a:t>Optionnel: customer_state, product_category_name,</a:t>
+              <a:t>Methode 2 : upload CSV personnalise</a:t>
             </a:r>
           </a:p>
           <a:p>
@@ -12700,7 +12752,23 @@
               </a:defRPr>
             </a:pPr>
             <a:r>
-              <a:t>          product_weight_g, order_estimated_delivery_date</a:t>
+              <a:t>  -&gt; POST /api/retrain/upload-and-train</a:t>
+            </a:r>
+          </a:p>
+          <a:p>
+            <a:pPr>
+              <a:spcAft>
+                <a:spcPts val="100"/>
+              </a:spcAft>
+              <a:defRPr sz="1100">
+                <a:solidFill>
+                  <a:srgbClr val="F2F3F4"/>
+                </a:solidFill>
+                <a:latin typeface="Calibri"/>
+              </a:defRPr>
+            </a:pPr>
+            <a:r>
+              <a:t>Optuna auto-optimise les hyperparametres</a:t>
             </a:r>
           </a:p>
         </p:txBody>
@@ -13023,7 +13091,7 @@
               </a:defRPr>
             </a:pPr>
             <a:r>
-              <a:t>Prevision LightGBM + Calendrier islamique : MAE 318K DZD (+12.2% vs baseline, 5 modeles)</a:t>
+              <a:t>Prevision LightGBM + Calendrier islamique : MAE 318K DZD (+12.2% vs baseline)</a:t>
             </a:r>
           </a:p>
           <a:p>
@@ -13039,68 +13107,9 @@
               </a:defRPr>
             </a:pPr>
             <a:r>
-              <a:t>Integration LLM (Gemini) multilingue AR/FR/EN</a:t>
-            </a:r>
-          </a:p>
-        </p:txBody>
-      </p:sp>
-      <p:sp>
-        <p:nvSpPr>
-          <p:cNvPr id="7" name="TextBox 6"/>
-          <p:cNvSpPr txBox="1"/>
-          <p:nvPr/>
-        </p:nvSpPr>
-        <p:spPr>
-          <a:xfrm>
-            <a:off x="6400800" y="1554480"/>
-            <a:ext cx="5029200" cy="365760"/>
-          </a:xfrm>
-          <a:prstGeom prst="rect">
-            <a:avLst/>
-          </a:prstGeom>
-          <a:noFill/>
-        </p:spPr>
-        <p:txBody>
-          <a:bodyPr wrap="square">
-            <a:spAutoFit/>
-          </a:bodyPr>
-          <a:lstStyle/>
-          <a:p>
-            <a:pPr algn="l">
-              <a:defRPr sz="2200" b="1">
-                <a:solidFill>
-                  <a:srgbClr val="E67E22"/>
-                </a:solidFill>
-                <a:latin typeface="Calibri"/>
-              </a:defRPr>
-            </a:pPr>
-            <a:r>
-              <a:t>Perspectives</a:t>
-            </a:r>
-          </a:p>
-        </p:txBody>
-      </p:sp>
-      <p:sp>
-        <p:nvSpPr>
-          <p:cNvPr id="8" name="TextBox 7"/>
-          <p:cNvSpPr txBox="1"/>
-          <p:nvPr/>
-        </p:nvSpPr>
-        <p:spPr>
-          <a:xfrm>
-            <a:off x="6400800" y="2011680"/>
-            <a:ext cx="5303520" cy="3657600"/>
-          </a:xfrm>
-          <a:prstGeom prst="rect">
-            <a:avLst/>
-          </a:prstGeom>
-          <a:noFill/>
-        </p:spPr>
-        <p:txBody>
-          <a:bodyPr wrap="square">
-            <a:spAutoFit/>
-          </a:bodyPr>
-          <a:lstStyle/>
+              <a:t>Reentrainement automatique depuis la BDD + Optuna auto-tuning</a:t>
+            </a:r>
+          </a:p>
           <a:p>
             <a:pPr>
               <a:spcAft>
@@ -13114,7 +13123,82 @@
               </a:defRPr>
             </a:pPr>
             <a:r>
-              <a:t>Reentrainement sur donnees reelles algeriennes</a:t>
+              <a:t>Integration LLM (Gemini) multilingue AR/FR/EN</a:t>
+            </a:r>
+          </a:p>
+        </p:txBody>
+      </p:sp>
+      <p:sp>
+        <p:nvSpPr>
+          <p:cNvPr id="7" name="TextBox 6"/>
+          <p:cNvSpPr txBox="1"/>
+          <p:nvPr/>
+        </p:nvSpPr>
+        <p:spPr>
+          <a:xfrm>
+            <a:off x="6400800" y="1554480"/>
+            <a:ext cx="5029200" cy="365760"/>
+          </a:xfrm>
+          <a:prstGeom prst="rect">
+            <a:avLst/>
+          </a:prstGeom>
+          <a:noFill/>
+        </p:spPr>
+        <p:txBody>
+          <a:bodyPr wrap="square">
+            <a:spAutoFit/>
+          </a:bodyPr>
+          <a:lstStyle/>
+          <a:p>
+            <a:pPr algn="l">
+              <a:defRPr sz="2200" b="1">
+                <a:solidFill>
+                  <a:srgbClr val="E67E22"/>
+                </a:solidFill>
+                <a:latin typeface="Calibri"/>
+              </a:defRPr>
+            </a:pPr>
+            <a:r>
+              <a:t>Perspectives</a:t>
+            </a:r>
+          </a:p>
+        </p:txBody>
+      </p:sp>
+      <p:sp>
+        <p:nvSpPr>
+          <p:cNvPr id="8" name="TextBox 7"/>
+          <p:cNvSpPr txBox="1"/>
+          <p:nvPr/>
+        </p:nvSpPr>
+        <p:spPr>
+          <a:xfrm>
+            <a:off x="6400800" y="2011680"/>
+            <a:ext cx="5303520" cy="3657600"/>
+          </a:xfrm>
+          <a:prstGeom prst="rect">
+            <a:avLst/>
+          </a:prstGeom>
+          <a:noFill/>
+        </p:spPr>
+        <p:txBody>
+          <a:bodyPr wrap="square">
+            <a:spAutoFit/>
+          </a:bodyPr>
+          <a:lstStyle/>
+          <a:p>
+            <a:pPr>
+              <a:spcAft>
+                <a:spcPts val="400"/>
+              </a:spcAft>
+              <a:defRPr sz="1500">
+                <a:solidFill>
+                  <a:srgbClr val="F2F3F4"/>
+                </a:solidFill>
+                <a:latin typeface="Calibri"/>
+              </a:defRPr>
+            </a:pPr>
+            <a:r>
+              <a:t>Deploiement sur donnees reelles algeriennes (un clic)</a:t>
             </a:r>
           </a:p>
           <a:p>

--- a/docs/presentation.pptx
+++ b/docs/presentation.pptx
@@ -10644,7 +10644,7 @@
               </a:defRPr>
             </a:pPr>
             <a:r>
-              <a:t>LightGBM + Calendrier Islamique</a:t>
+              <a:t>LightGBM + Calendrier Algerien</a:t>
             </a:r>
           </a:p>
         </p:txBody>
@@ -10683,7 +10683,7 @@
               </a:defRPr>
             </a:pPr>
             <a:r>
-              <a:t>19 features : lags(1,7,14,28), rolling stats, calendrier</a:t>
+              <a:t>21 features : lags(1,7,14,28), rolling stats, calendrier</a:t>
             </a:r>
           </a:p>
           <a:p>
@@ -10699,7 +10699,7 @@
               </a:defRPr>
             </a:pPr>
             <a:r>
-              <a:t>Covariables : Ramadan, Aid el-Fitr, Aid el-Adha, Mawlid</a:t>
+              <a:t>Islamiques : Ramadan, Aid el-Fitr, Aid el-Adha, Mawlid, Nouvel An</a:t>
             </a:r>
           </a:p>
           <a:p>
@@ -10715,7 +10715,23 @@
               </a:defRPr>
             </a:pPr>
             <a:r>
-              <a:t>hijri-converter : calcul programmatique des dates</a:t>
+              <a:t>Nationaux : 1er jan, Yennayer, 1er mai, 5 juil, 1er nov</a:t>
+            </a:r>
+          </a:p>
+          <a:p>
+            <a:pPr>
+              <a:spcAft>
+                <a:spcPts val="200"/>
+              </a:spcAft>
+              <a:defRPr sz="1200">
+                <a:solidFill>
+                  <a:srgbClr val="2C3E50"/>
+                </a:solidFill>
+                <a:latin typeface="Calibri"/>
+              </a:defRPr>
+            </a:pPr>
+            <a:r>
+              <a:t>is_weekend = ven-sam + jours feries islamiques + nationaux</a:t>
             </a:r>
           </a:p>
           <a:p>
@@ -10883,7 +10899,7 @@
               </a:defRPr>
             </a:pPr>
             <a:r>
-              <a:t>Supporte les covariables (calendrier islamique)</a:t>
+              <a:t>Supporte les covariables (calendrier algerien)</a:t>
             </a:r>
           </a:p>
           <a:p>
@@ -13091,7 +13107,7 @@
               </a:defRPr>
             </a:pPr>
             <a:r>
-              <a:t>Prevision LightGBM + Calendrier islamique : MAE 318K DZD (+12.2% vs baseline)</a:t>
+              <a:t>Prevision LightGBM + Calendrier algerien (islamique + national) : MAE 318K DZD (+12.2% vs baseline)</a:t>
             </a:r>
           </a:p>
           <a:p>
@@ -13214,7 +13230,7 @@
               </a:defRPr>
             </a:pPr>
             <a:r>
-              <a:t>Impact reel des fetes islamiques (deja integrees)</a:t>
+              <a:t>Calendrier algerien complet integre (islamique + national)</a:t>
             </a:r>
           </a:p>
           <a:p>
@@ -16337,7 +16353,7 @@
               </a:defRPr>
             </a:pPr>
             <a:r>
-              <a:t>Heure, jour, mois, weekend, trimestre</a:t>
+              <a:t>Heure, jour, mois, jours feries/weekend, trimestre</a:t>
             </a:r>
           </a:p>
         </p:txBody>

--- a/docs/presentation.pptx
+++ b/docs/presentation.pptx
@@ -10683,7 +10683,7 @@
               </a:defRPr>
             </a:pPr>
             <a:r>
-              <a:t>21 features : lags(1,7,14,28), rolling stats, calendrier</a:t>
+              <a:t>20 features : lags(1,7,14,28), rolling stats, calendrier</a:t>
             </a:r>
           </a:p>
           <a:p>
@@ -10699,7 +10699,7 @@
               </a:defRPr>
             </a:pPr>
             <a:r>
-              <a:t>Islamiques : Ramadan, Aid el-Fitr, Aid el-Adha, Mawlid, Nouvel An</a:t>
+              <a:t>Islamiques : Ramadan, Aid el-Fitr, Aid el-Adha, Mawlid</a:t>
             </a:r>
           </a:p>
           <a:p>

--- a/docs/presentation.pptx
+++ b/docs/presentation.pptx
@@ -6913,7 +6913,23 @@
               </a:defRPr>
             </a:pPr>
             <a:r>
-              <a:t>Seuil optimal : 0.9805 (Youden's J statistic)</a:t>
+              <a:t>Seuil ensemble : 0.9805 (Youden's J statistic)</a:t>
+            </a:r>
+          </a:p>
+          <a:p>
+            <a:pPr>
+              <a:spcAft>
+                <a:spcPts val="200"/>
+              </a:spcAft>
+              <a:defRPr sz="1200">
+                <a:solidFill>
+                  <a:srgbClr val="2C3E50"/>
+                </a:solidFill>
+                <a:latin typeface="Calibri"/>
+              </a:defRPr>
+            </a:pPr>
+            <a:r>
+              <a:t>Seuils individuels : F1-max par modele (precision_recall_curve)</a:t>
             </a:r>
           </a:p>
         </p:txBody>
@@ -7054,7 +7070,7 @@
               </a:defRPr>
             </a:pPr>
             <a:r>
-              <a:t>Segmentation Client (HDBSCAN + RFM)</a:t>
+              <a:t>Segmentation Client (Hybride HDBSCAN / KMeans)</a:t>
             </a:r>
           </a:p>
         </p:txBody>
@@ -7133,7 +7149,7 @@
               </a:defRPr>
             </a:pPr>
             <a:r>
-              <a:t>Analyse RFM (Recency, Frequency, Monetary) + Clustering HDBSCAN (min_cluster_size=50)</a:t>
+              <a:t>Analyse RFM + Clustering adaptatif : HDBSCAN (&gt;=1000 clients) ou KMeans avec auto-K (&lt;1000 clients)</a:t>
             </a:r>
           </a:p>
         </p:txBody>
@@ -8377,7 +8393,7 @@
               </a:defRPr>
             </a:pPr>
             <a:r>
-              <a:t>Total : 96 096 clients segmentes automatiquement (sans specifier K a priori)</a:t>
+              <a:t>Total : 96 096 clients (Olist = HDBSCAN) | Petites BDD = KMeans auto-K (silhouette optimisee)</a:t>
             </a:r>
           </a:p>
         </p:txBody>
@@ -12570,7 +12586,7 @@
               </a:defRPr>
             </a:pPr>
             <a:r>
-              <a:t>segmenter.joblib (9.7 MB) - HDBSCAN clustering</a:t>
+              <a:t>segmenter.joblib (9.7 MB) - HDBSCAN ou KMeans (adaptatif)</a:t>
             </a:r>
           </a:p>
           <a:p>
@@ -13075,7 +13091,7 @@
               </a:defRPr>
             </a:pPr>
             <a:r>
-              <a:t>31 features enrichies (8 categories), cible propre</a:t>
+              <a:t>31 features enrichies (8 categories), seuils F1-max par modele + Youden (ensemble)</a:t>
             </a:r>
           </a:p>
           <a:p>
@@ -13091,7 +13107,7 @@
               </a:defRPr>
             </a:pPr>
             <a:r>
-              <a:t>Segmentation automatique : 5 profils clients (HDBSCAN)</a:t>
+              <a:t>Segmentation hybride : HDBSCAN (gros volumes) / KMeans (petits volumes), RFM auto-etiquete</a:t>
             </a:r>
           </a:p>
           <a:p>
@@ -13139,7 +13155,7 @@
               </a:defRPr>
             </a:pPr>
             <a:r>
-              <a:t>Integration LLM (Gemini) multilingue AR/FR/EN</a:t>
+              <a:t>Interface multilingue complete (AR/FR/EN + RTL) + integration LLM Gemini</a:t>
             </a:r>
           </a:p>
         </p:txBody>

--- a/docs/presentation.pptx
+++ b/docs/presentation.pptx
@@ -20,6 +20,7 @@
     <p:sldId id="268" r:id="rId19"/>
     <p:sldId id="269" r:id="rId20"/>
     <p:sldId id="270" r:id="rId21"/>
+    <p:sldId id="271" r:id="rId22"/>
   </p:sldIdLst>
   <p:sldSz cx="12191695" cy="6858000" type="screen4x3"/>
   <p:notesSz cx="6858000" cy="9144000"/>
@@ -6965,7 +6966,7 @@
               </a:defRPr>
             </a:pPr>
             <a:r>
-              <a:t>10/15</a:t>
+              <a:t>10/16</a:t>
             </a:r>
           </a:p>
         </p:txBody>
@@ -8465,7 +8466,7 @@
               </a:defRPr>
             </a:pPr>
             <a:r>
-              <a:t>11/15</a:t>
+              <a:t>11/16</a:t>
             </a:r>
           </a:p>
         </p:txBody>
@@ -10999,7 +11000,7 @@
               </a:defRPr>
             </a:pPr>
             <a:r>
-              <a:t>12/15</a:t>
+              <a:t>12/16</a:t>
             </a:r>
           </a:p>
         </p:txBody>
@@ -12070,7 +12071,7 @@
               </a:defRPr>
             </a:pPr>
             <a:r>
-              <a:t>13/15</a:t>
+              <a:t>13/16</a:t>
             </a:r>
           </a:p>
         </p:txBody>
@@ -12836,7 +12837,7 @@
               </a:defRPr>
             </a:pPr>
             <a:r>
-              <a:t>14/15</a:t>
+              <a:t>14/16</a:t>
             </a:r>
           </a:p>
         </p:txBody>
@@ -12850,6 +12851,1351 @@
 </file>
 
 <file path=ppt/slides/slide15.xml><?xml version="1.0" encoding="utf-8"?>
+<p:sld xmlns:a="http://schemas.openxmlformats.org/drawingml/2006/main" xmlns:p="http://schemas.openxmlformats.org/presentationml/2006/main" xmlns:r="http://schemas.openxmlformats.org/officeDocument/2006/relationships">
+  <p:cSld>
+    <p:bg>
+      <p:bgPr>
+        <a:solidFill>
+          <a:srgbClr val="FFFFFF"/>
+        </a:solidFill>
+        <a:effectLst/>
+      </p:bgPr>
+    </p:bg>
+    <p:spTree>
+      <p:nvGrpSpPr>
+        <p:cNvPr id="1" name=""/>
+        <p:cNvGrpSpPr/>
+        <p:nvPr/>
+      </p:nvGrpSpPr>
+      <p:grpSpPr/>
+      <p:sp>
+        <p:nvSpPr>
+          <p:cNvPr id="2" name="Rectangle 1"/>
+          <p:cNvSpPr/>
+          <p:nvPr/>
+        </p:nvSpPr>
+        <p:spPr>
+          <a:xfrm>
+            <a:off x="0" y="0"/>
+            <a:ext cx="137160" cy="6858000"/>
+          </a:xfrm>
+          <a:prstGeom prst="rect">
+            <a:avLst/>
+          </a:prstGeom>
+          <a:solidFill>
+            <a:srgbClr val="C0392B"/>
+          </a:solidFill>
+          <a:ln>
+            <a:noFill/>
+          </a:ln>
+        </p:spPr>
+        <p:style>
+          <a:lnRef idx="1">
+            <a:schemeClr val="accent1"/>
+          </a:lnRef>
+          <a:fillRef idx="3">
+            <a:schemeClr val="accent1"/>
+          </a:fillRef>
+          <a:effectRef idx="2">
+            <a:schemeClr val="accent1"/>
+          </a:effectRef>
+          <a:fontRef idx="minor">
+            <a:schemeClr val="lt1"/>
+          </a:fontRef>
+        </p:style>
+        <p:txBody>
+          <a:bodyPr rtlCol="0" anchor="ctr"/>
+          <a:lstStyle/>
+          <a:p>
+            <a:pPr algn="ctr"/>
+          </a:p>
+        </p:txBody>
+      </p:sp>
+      <p:sp>
+        <p:nvSpPr>
+          <p:cNvPr id="3" name="TextBox 2"/>
+          <p:cNvSpPr txBox="1"/>
+          <p:nvPr/>
+        </p:nvSpPr>
+        <p:spPr>
+          <a:xfrm>
+            <a:off x="640080" y="457200"/>
+            <a:ext cx="9144000" cy="731520"/>
+          </a:xfrm>
+          <a:prstGeom prst="rect">
+            <a:avLst/>
+          </a:prstGeom>
+          <a:noFill/>
+        </p:spPr>
+        <p:txBody>
+          <a:bodyPr wrap="square">
+            <a:spAutoFit/>
+          </a:bodyPr>
+          <a:lstStyle/>
+          <a:p>
+            <a:pPr algn="l">
+              <a:defRPr sz="3400" b="1">
+                <a:solidFill>
+                  <a:srgbClr val="1B3A5C"/>
+                </a:solidFill>
+                <a:latin typeface="Calibri"/>
+              </a:defRPr>
+            </a:pPr>
+            <a:r>
+              <a:t>Securite et Workflow Automatise</a:t>
+            </a:r>
+          </a:p>
+        </p:txBody>
+      </p:sp>
+      <p:sp>
+        <p:nvSpPr>
+          <p:cNvPr id="4" name="Rectangle 3"/>
+          <p:cNvSpPr/>
+          <p:nvPr/>
+        </p:nvSpPr>
+        <p:spPr>
+          <a:xfrm>
+            <a:off x="640080" y="1463040"/>
+            <a:ext cx="1371600" cy="50800"/>
+          </a:xfrm>
+          <a:prstGeom prst="rect">
+            <a:avLst/>
+          </a:prstGeom>
+          <a:solidFill>
+            <a:srgbClr val="2E86C1"/>
+          </a:solidFill>
+          <a:ln>
+            <a:noFill/>
+          </a:ln>
+        </p:spPr>
+        <p:style>
+          <a:lnRef idx="1">
+            <a:schemeClr val="accent1"/>
+          </a:lnRef>
+          <a:fillRef idx="3">
+            <a:schemeClr val="accent1"/>
+          </a:fillRef>
+          <a:effectRef idx="2">
+            <a:schemeClr val="accent1"/>
+          </a:effectRef>
+          <a:fontRef idx="minor">
+            <a:schemeClr val="lt1"/>
+          </a:fontRef>
+        </p:style>
+        <p:txBody>
+          <a:bodyPr rtlCol="0" anchor="ctr"/>
+          <a:lstStyle/>
+          <a:p>
+            <a:pPr algn="ctr"/>
+          </a:p>
+        </p:txBody>
+      </p:sp>
+      <p:sp>
+        <p:nvSpPr>
+          <p:cNvPr id="5" name="Rounded Rectangle 4"/>
+          <p:cNvSpPr/>
+          <p:nvPr/>
+        </p:nvSpPr>
+        <p:spPr>
+          <a:xfrm>
+            <a:off x="457200" y="1828800"/>
+            <a:ext cx="5486400" cy="4389120"/>
+          </a:xfrm>
+          <a:prstGeom prst="roundRect">
+            <a:avLst/>
+          </a:prstGeom>
+          <a:solidFill>
+            <a:srgbClr val="F2F3F4"/>
+          </a:solidFill>
+          <a:ln w="25400">
+            <a:solidFill>
+              <a:srgbClr val="C0392B"/>
+            </a:solidFill>
+          </a:ln>
+        </p:spPr>
+        <p:style>
+          <a:lnRef idx="1">
+            <a:schemeClr val="accent1"/>
+          </a:lnRef>
+          <a:fillRef idx="3">
+            <a:schemeClr val="accent1"/>
+          </a:fillRef>
+          <a:effectRef idx="2">
+            <a:schemeClr val="accent1"/>
+          </a:effectRef>
+          <a:fontRef idx="minor">
+            <a:schemeClr val="lt1"/>
+          </a:fontRef>
+        </p:style>
+        <p:txBody>
+          <a:bodyPr rtlCol="0" anchor="ctr"/>
+          <a:lstStyle/>
+          <a:p>
+            <a:pPr algn="ctr"/>
+          </a:p>
+        </p:txBody>
+      </p:sp>
+      <p:sp>
+        <p:nvSpPr>
+          <p:cNvPr id="6" name="TextBox 5"/>
+          <p:cNvSpPr txBox="1"/>
+          <p:nvPr/>
+        </p:nvSpPr>
+        <p:spPr>
+          <a:xfrm>
+            <a:off x="640080" y="1920240"/>
+            <a:ext cx="5120640" cy="365760"/>
+          </a:xfrm>
+          <a:prstGeom prst="rect">
+            <a:avLst/>
+          </a:prstGeom>
+          <a:noFill/>
+        </p:spPr>
+        <p:txBody>
+          <a:bodyPr wrap="square">
+            <a:spAutoFit/>
+          </a:bodyPr>
+          <a:lstStyle/>
+          <a:p>
+            <a:pPr algn="l">
+              <a:defRPr sz="1800" b="1">
+                <a:solidFill>
+                  <a:srgbClr val="C0392B"/>
+                </a:solidFill>
+                <a:latin typeface="Calibri"/>
+              </a:defRPr>
+            </a:pPr>
+            <a:r>
+              <a:t>Mesures de securite</a:t>
+            </a:r>
+          </a:p>
+        </p:txBody>
+      </p:sp>
+      <p:sp>
+        <p:nvSpPr>
+          <p:cNvPr id="7" name="TextBox 6"/>
+          <p:cNvSpPr txBox="1"/>
+          <p:nvPr/>
+        </p:nvSpPr>
+        <p:spPr>
+          <a:xfrm>
+            <a:off x="640080" y="2377440"/>
+            <a:ext cx="5120640" cy="3657600"/>
+          </a:xfrm>
+          <a:prstGeom prst="rect">
+            <a:avLst/>
+          </a:prstGeom>
+          <a:noFill/>
+        </p:spPr>
+        <p:txBody>
+          <a:bodyPr wrap="square">
+            <a:spAutoFit/>
+          </a:bodyPr>
+          <a:lstStyle/>
+          <a:p>
+            <a:pPr>
+              <a:spcAft>
+                <a:spcPts val="300"/>
+              </a:spcAft>
+              <a:defRPr sz="1300">
+                <a:solidFill>
+                  <a:srgbClr val="2C3E50"/>
+                </a:solidFill>
+                <a:latin typeface="Calibri"/>
+              </a:defRPr>
+            </a:pPr>
+            <a:r>
+              <a:t>Authentification : JWT + RBAC (6 roles) + cle API ML</a:t>
+            </a:r>
+          </a:p>
+          <a:p>
+            <a:pPr>
+              <a:spcAft>
+                <a:spcPts val="300"/>
+              </a:spcAft>
+              <a:defRPr sz="1300">
+                <a:solidFill>
+                  <a:srgbClr val="2C3E50"/>
+                </a:solidFill>
+                <a:latin typeface="Calibri"/>
+              </a:defRPr>
+            </a:pPr>
+            <a:r>
+              <a:t>Injection SQL : Requetes preparees (PDO parametrisees)</a:t>
+            </a:r>
+          </a:p>
+          <a:p>
+            <a:pPr>
+              <a:spcAft>
+                <a:spcPts val="300"/>
+              </a:spcAft>
+              <a:defRPr sz="1300">
+                <a:solidFill>
+                  <a:srgbClr val="2C3E50"/>
+                </a:solidFill>
+                <a:latin typeface="Calibri"/>
+              </a:defRPr>
+            </a:pPr>
+            <a:r>
+              <a:t>CSRF : Header X-Requested-With obligatoire</a:t>
+            </a:r>
+          </a:p>
+          <a:p>
+            <a:pPr>
+              <a:spcAft>
+                <a:spcPts val="300"/>
+              </a:spcAft>
+              <a:defRPr sz="1300">
+                <a:solidFill>
+                  <a:srgbClr val="2C3E50"/>
+                </a:solidFill>
+                <a:latin typeface="Calibri"/>
+              </a:defRPr>
+            </a:pPr>
+            <a:r>
+              <a:t>Rate Limiting : 5 req/min (auth), 60/min (general)</a:t>
+            </a:r>
+          </a:p>
+          <a:p>
+            <a:pPr>
+              <a:spcAft>
+                <a:spcPts val="300"/>
+              </a:spcAft>
+              <a:defRPr sz="1300">
+                <a:solidFill>
+                  <a:srgbClr val="2C3E50"/>
+                </a:solidFill>
+                <a:latin typeface="Calibri"/>
+              </a:defRPr>
+            </a:pPr>
+            <a:r>
+              <a:t>Upload : Limite 50 Mo, validation MIME, anti-path traversal</a:t>
+            </a:r>
+          </a:p>
+          <a:p>
+            <a:pPr>
+              <a:spcAft>
+                <a:spcPts val="300"/>
+              </a:spcAft>
+              <a:defRPr sz="1300">
+                <a:solidFill>
+                  <a:srgbClr val="2C3E50"/>
+                </a:solidFill>
+                <a:latin typeface="Calibri"/>
+              </a:defRPr>
+            </a:pPr>
+            <a:r>
+              <a:t>Debug : APP_DEBUG=false en production</a:t>
+            </a:r>
+          </a:p>
+          <a:p>
+            <a:pPr>
+              <a:spcAft>
+                <a:spcPts val="300"/>
+              </a:spcAft>
+              <a:defRPr sz="1300">
+                <a:solidFill>
+                  <a:srgbClr val="2C3E50"/>
+                </a:solidFill>
+                <a:latin typeface="Calibri"/>
+              </a:defRPr>
+            </a:pPr>
+            <a:r>
+              <a:t>Multi-tenant : Isolation stricte par store_id</a:t>
+            </a:r>
+          </a:p>
+        </p:txBody>
+      </p:sp>
+      <p:sp>
+        <p:nvSpPr>
+          <p:cNvPr id="8" name="Rounded Rectangle 7"/>
+          <p:cNvSpPr/>
+          <p:nvPr/>
+        </p:nvSpPr>
+        <p:spPr>
+          <a:xfrm>
+            <a:off x="6217920" y="1828800"/>
+            <a:ext cx="5486400" cy="2286000"/>
+          </a:xfrm>
+          <a:prstGeom prst="roundRect">
+            <a:avLst/>
+          </a:prstGeom>
+          <a:solidFill>
+            <a:srgbClr val="F2F3F4"/>
+          </a:solidFill>
+          <a:ln w="25400">
+            <a:solidFill>
+              <a:srgbClr val="27AE60"/>
+            </a:solidFill>
+          </a:ln>
+        </p:spPr>
+        <p:style>
+          <a:lnRef idx="1">
+            <a:schemeClr val="accent1"/>
+          </a:lnRef>
+          <a:fillRef idx="3">
+            <a:schemeClr val="accent1"/>
+          </a:fillRef>
+          <a:effectRef idx="2">
+            <a:schemeClr val="accent1"/>
+          </a:effectRef>
+          <a:fontRef idx="minor">
+            <a:schemeClr val="lt1"/>
+          </a:fontRef>
+        </p:style>
+        <p:txBody>
+          <a:bodyPr rtlCol="0" anchor="ctr"/>
+          <a:lstStyle/>
+          <a:p>
+            <a:pPr algn="ctr"/>
+          </a:p>
+        </p:txBody>
+      </p:sp>
+      <p:sp>
+        <p:nvSpPr>
+          <p:cNvPr id="9" name="TextBox 8"/>
+          <p:cNvSpPr txBox="1"/>
+          <p:nvPr/>
+        </p:nvSpPr>
+        <p:spPr>
+          <a:xfrm>
+            <a:off x="6400800" y="1920240"/>
+            <a:ext cx="5120640" cy="365760"/>
+          </a:xfrm>
+          <a:prstGeom prst="rect">
+            <a:avLst/>
+          </a:prstGeom>
+          <a:noFill/>
+        </p:spPr>
+        <p:txBody>
+          <a:bodyPr wrap="square">
+            <a:spAutoFit/>
+          </a:bodyPr>
+          <a:lstStyle/>
+          <a:p>
+            <a:pPr algn="l">
+              <a:defRPr sz="1800" b="1">
+                <a:solidFill>
+                  <a:srgbClr val="27AE60"/>
+                </a:solidFill>
+                <a:latin typeface="Calibri"/>
+              </a:defRPr>
+            </a:pPr>
+            <a:r>
+              <a:t>Actions de workflow automatisees</a:t>
+            </a:r>
+          </a:p>
+        </p:txBody>
+      </p:sp>
+      <p:sp>
+        <p:nvSpPr>
+          <p:cNvPr id="10" name="Rectangle 9"/>
+          <p:cNvSpPr/>
+          <p:nvPr/>
+        </p:nvSpPr>
+        <p:spPr>
+          <a:xfrm>
+            <a:off x="6400800" y="2331720"/>
+            <a:ext cx="1097280" cy="320040"/>
+          </a:xfrm>
+          <a:prstGeom prst="rect">
+            <a:avLst/>
+          </a:prstGeom>
+          <a:solidFill>
+            <a:srgbClr val="1B3A5C"/>
+          </a:solidFill>
+          <a:ln>
+            <a:noFill/>
+          </a:ln>
+        </p:spPr>
+        <p:style>
+          <a:lnRef idx="1">
+            <a:schemeClr val="accent1"/>
+          </a:lnRef>
+          <a:fillRef idx="3">
+            <a:schemeClr val="accent1"/>
+          </a:fillRef>
+          <a:effectRef idx="2">
+            <a:schemeClr val="accent1"/>
+          </a:effectRef>
+          <a:fontRef idx="minor">
+            <a:schemeClr val="lt1"/>
+          </a:fontRef>
+        </p:style>
+        <p:txBody>
+          <a:bodyPr rtlCol="0" anchor="ctr"/>
+          <a:lstStyle/>
+          <a:p>
+            <a:pPr algn="ctr"/>
+          </a:p>
+        </p:txBody>
+      </p:sp>
+      <p:sp>
+        <p:nvSpPr>
+          <p:cNvPr id="11" name="TextBox 10"/>
+          <p:cNvSpPr txBox="1"/>
+          <p:nvPr/>
+        </p:nvSpPr>
+        <p:spPr>
+          <a:xfrm>
+            <a:off x="6400800" y="2350008"/>
+            <a:ext cx="1097280" cy="274320"/>
+          </a:xfrm>
+          <a:prstGeom prst="rect">
+            <a:avLst/>
+          </a:prstGeom>
+          <a:noFill/>
+        </p:spPr>
+        <p:txBody>
+          <a:bodyPr wrap="square">
+            <a:spAutoFit/>
+          </a:bodyPr>
+          <a:lstStyle/>
+          <a:p>
+            <a:pPr algn="ctr">
+              <a:defRPr sz="1100" b="1">
+                <a:solidFill>
+                  <a:srgbClr val="FFFFFF"/>
+                </a:solidFill>
+                <a:latin typeface="Calibri"/>
+              </a:defRPr>
+            </a:pPr>
+            <a:r>
+              <a:t>Score</a:t>
+            </a:r>
+          </a:p>
+        </p:txBody>
+      </p:sp>
+      <p:sp>
+        <p:nvSpPr>
+          <p:cNvPr id="12" name="Rectangle 11"/>
+          <p:cNvSpPr/>
+          <p:nvPr/>
+        </p:nvSpPr>
+        <p:spPr>
+          <a:xfrm>
+            <a:off x="7498080" y="2331720"/>
+            <a:ext cx="1371600" cy="320040"/>
+          </a:xfrm>
+          <a:prstGeom prst="rect">
+            <a:avLst/>
+          </a:prstGeom>
+          <a:solidFill>
+            <a:srgbClr val="1B3A5C"/>
+          </a:solidFill>
+          <a:ln>
+            <a:noFill/>
+          </a:ln>
+        </p:spPr>
+        <p:style>
+          <a:lnRef idx="1">
+            <a:schemeClr val="accent1"/>
+          </a:lnRef>
+          <a:fillRef idx="3">
+            <a:schemeClr val="accent1"/>
+          </a:fillRef>
+          <a:effectRef idx="2">
+            <a:schemeClr val="accent1"/>
+          </a:effectRef>
+          <a:fontRef idx="minor">
+            <a:schemeClr val="lt1"/>
+          </a:fontRef>
+        </p:style>
+        <p:txBody>
+          <a:bodyPr rtlCol="0" anchor="ctr"/>
+          <a:lstStyle/>
+          <a:p>
+            <a:pPr algn="ctr"/>
+          </a:p>
+        </p:txBody>
+      </p:sp>
+      <p:sp>
+        <p:nvSpPr>
+          <p:cNvPr id="13" name="TextBox 12"/>
+          <p:cNvSpPr txBox="1"/>
+          <p:nvPr/>
+        </p:nvSpPr>
+        <p:spPr>
+          <a:xfrm>
+            <a:off x="7498080" y="2350008"/>
+            <a:ext cx="1371600" cy="274320"/>
+          </a:xfrm>
+          <a:prstGeom prst="rect">
+            <a:avLst/>
+          </a:prstGeom>
+          <a:noFill/>
+        </p:spPr>
+        <p:txBody>
+          <a:bodyPr wrap="square">
+            <a:spAutoFit/>
+          </a:bodyPr>
+          <a:lstStyle/>
+          <a:p>
+            <a:pPr algn="ctr">
+              <a:defRPr sz="1100" b="1">
+                <a:solidFill>
+                  <a:srgbClr val="FFFFFF"/>
+                </a:solidFill>
+                <a:latin typeface="Calibri"/>
+              </a:defRPr>
+            </a:pPr>
+            <a:r>
+              <a:t>Action</a:t>
+            </a:r>
+          </a:p>
+        </p:txBody>
+      </p:sp>
+      <p:sp>
+        <p:nvSpPr>
+          <p:cNvPr id="14" name="Rectangle 13"/>
+          <p:cNvSpPr/>
+          <p:nvPr/>
+        </p:nvSpPr>
+        <p:spPr>
+          <a:xfrm>
+            <a:off x="8869680" y="2331720"/>
+            <a:ext cx="2651760" cy="320040"/>
+          </a:xfrm>
+          <a:prstGeom prst="rect">
+            <a:avLst/>
+          </a:prstGeom>
+          <a:solidFill>
+            <a:srgbClr val="1B3A5C"/>
+          </a:solidFill>
+          <a:ln>
+            <a:noFill/>
+          </a:ln>
+        </p:spPr>
+        <p:style>
+          <a:lnRef idx="1">
+            <a:schemeClr val="accent1"/>
+          </a:lnRef>
+          <a:fillRef idx="3">
+            <a:schemeClr val="accent1"/>
+          </a:fillRef>
+          <a:effectRef idx="2">
+            <a:schemeClr val="accent1"/>
+          </a:effectRef>
+          <a:fontRef idx="minor">
+            <a:schemeClr val="lt1"/>
+          </a:fontRef>
+        </p:style>
+        <p:txBody>
+          <a:bodyPr rtlCol="0" anchor="ctr"/>
+          <a:lstStyle/>
+          <a:p>
+            <a:pPr algn="ctr"/>
+          </a:p>
+        </p:txBody>
+      </p:sp>
+      <p:sp>
+        <p:nvSpPr>
+          <p:cNvPr id="15" name="TextBox 14"/>
+          <p:cNvSpPr txBox="1"/>
+          <p:nvPr/>
+        </p:nvSpPr>
+        <p:spPr>
+          <a:xfrm>
+            <a:off x="8869680" y="2350008"/>
+            <a:ext cx="2651760" cy="274320"/>
+          </a:xfrm>
+          <a:prstGeom prst="rect">
+            <a:avLst/>
+          </a:prstGeom>
+          <a:noFill/>
+        </p:spPr>
+        <p:txBody>
+          <a:bodyPr wrap="square">
+            <a:spAutoFit/>
+          </a:bodyPr>
+          <a:lstStyle/>
+          <a:p>
+            <a:pPr algn="ctr">
+              <a:defRPr sz="1100" b="1">
+                <a:solidFill>
+                  <a:srgbClr val="FFFFFF"/>
+                </a:solidFill>
+                <a:latin typeface="Calibri"/>
+              </a:defRPr>
+            </a:pPr>
+            <a:r>
+              <a:t>Description</a:t>
+            </a:r>
+          </a:p>
+        </p:txBody>
+      </p:sp>
+      <p:sp>
+        <p:nvSpPr>
+          <p:cNvPr id="16" name="Rectangle 15"/>
+          <p:cNvSpPr/>
+          <p:nvPr/>
+        </p:nvSpPr>
+        <p:spPr>
+          <a:xfrm>
+            <a:off x="6400800" y="2697480"/>
+            <a:ext cx="1097280" cy="320040"/>
+          </a:xfrm>
+          <a:prstGeom prst="rect">
+            <a:avLst/>
+          </a:prstGeom>
+          <a:solidFill>
+            <a:srgbClr val="FFFFFF"/>
+          </a:solidFill>
+          <a:ln>
+            <a:solidFill>
+              <a:srgbClr val="27AE60"/>
+            </a:solidFill>
+          </a:ln>
+        </p:spPr>
+        <p:style>
+          <a:lnRef idx="1">
+            <a:schemeClr val="accent1"/>
+          </a:lnRef>
+          <a:fillRef idx="3">
+            <a:schemeClr val="accent1"/>
+          </a:fillRef>
+          <a:effectRef idx="2">
+            <a:schemeClr val="accent1"/>
+          </a:effectRef>
+          <a:fontRef idx="minor">
+            <a:schemeClr val="lt1"/>
+          </a:fontRef>
+        </p:style>
+        <p:txBody>
+          <a:bodyPr rtlCol="0" anchor="ctr"/>
+          <a:lstStyle/>
+          <a:p>
+            <a:pPr algn="ctr"/>
+          </a:p>
+        </p:txBody>
+      </p:sp>
+      <p:sp>
+        <p:nvSpPr>
+          <p:cNvPr id="17" name="TextBox 16"/>
+          <p:cNvSpPr txBox="1"/>
+          <p:nvPr/>
+        </p:nvSpPr>
+        <p:spPr>
+          <a:xfrm>
+            <a:off x="6400800" y="2722880"/>
+            <a:ext cx="1097280" cy="274320"/>
+          </a:xfrm>
+          <a:prstGeom prst="rect">
+            <a:avLst/>
+          </a:prstGeom>
+          <a:noFill/>
+        </p:spPr>
+        <p:txBody>
+          <a:bodyPr wrap="square">
+            <a:spAutoFit/>
+          </a:bodyPr>
+          <a:lstStyle/>
+          <a:p>
+            <a:pPr algn="ctr">
+              <a:defRPr sz="1000" b="1">
+                <a:solidFill>
+                  <a:srgbClr val="27AE60"/>
+                </a:solidFill>
+                <a:latin typeface="Calibri"/>
+              </a:defRPr>
+            </a:pPr>
+            <a:r>
+              <a:t>70-100%</a:t>
+            </a:r>
+          </a:p>
+        </p:txBody>
+      </p:sp>
+      <p:sp>
+        <p:nvSpPr>
+          <p:cNvPr id="18" name="TextBox 17"/>
+          <p:cNvSpPr txBox="1"/>
+          <p:nvPr/>
+        </p:nvSpPr>
+        <p:spPr>
+          <a:xfrm>
+            <a:off x="7498079" y="2722880"/>
+            <a:ext cx="1371600" cy="274320"/>
+          </a:xfrm>
+          <a:prstGeom prst="rect">
+            <a:avLst/>
+          </a:prstGeom>
+          <a:noFill/>
+        </p:spPr>
+        <p:txBody>
+          <a:bodyPr wrap="square">
+            <a:spAutoFit/>
+          </a:bodyPr>
+          <a:lstStyle/>
+          <a:p>
+            <a:pPr algn="ctr">
+              <a:defRPr sz="1000" b="0">
+                <a:solidFill>
+                  <a:srgbClr val="2C3E50"/>
+                </a:solidFill>
+                <a:latin typeface="Calibri"/>
+              </a:defRPr>
+            </a:pPr>
+            <a:r>
+              <a:t>Auto-Approve</a:t>
+            </a:r>
+          </a:p>
+        </p:txBody>
+      </p:sp>
+      <p:sp>
+        <p:nvSpPr>
+          <p:cNvPr id="19" name="TextBox 18"/>
+          <p:cNvSpPr txBox="1"/>
+          <p:nvPr/>
+        </p:nvSpPr>
+        <p:spPr>
+          <a:xfrm>
+            <a:off x="8869680" y="2722880"/>
+            <a:ext cx="2651760" cy="274320"/>
+          </a:xfrm>
+          <a:prstGeom prst="rect">
+            <a:avLst/>
+          </a:prstGeom>
+          <a:noFill/>
+        </p:spPr>
+        <p:txBody>
+          <a:bodyPr wrap="square">
+            <a:spAutoFit/>
+          </a:bodyPr>
+          <a:lstStyle/>
+          <a:p>
+            <a:pPr algn="ctr">
+              <a:defRPr sz="1000" b="0">
+                <a:solidFill>
+                  <a:srgbClr val="7F8C8D"/>
+                </a:solidFill>
+                <a:latin typeface="Calibri"/>
+              </a:defRPr>
+            </a:pPr>
+            <a:r>
+              <a:t>Risque faible - traitement auto</a:t>
+            </a:r>
+          </a:p>
+        </p:txBody>
+      </p:sp>
+      <p:sp>
+        <p:nvSpPr>
+          <p:cNvPr id="20" name="Rectangle 19"/>
+          <p:cNvSpPr/>
+          <p:nvPr/>
+        </p:nvSpPr>
+        <p:spPr>
+          <a:xfrm>
+            <a:off x="6400800" y="3063240"/>
+            <a:ext cx="1097280" cy="320040"/>
+          </a:xfrm>
+          <a:prstGeom prst="rect">
+            <a:avLst/>
+          </a:prstGeom>
+          <a:solidFill>
+            <a:srgbClr val="FFFFFF"/>
+          </a:solidFill>
+          <a:ln>
+            <a:solidFill>
+              <a:srgbClr val="E67E22"/>
+            </a:solidFill>
+          </a:ln>
+        </p:spPr>
+        <p:style>
+          <a:lnRef idx="1">
+            <a:schemeClr val="accent1"/>
+          </a:lnRef>
+          <a:fillRef idx="3">
+            <a:schemeClr val="accent1"/>
+          </a:fillRef>
+          <a:effectRef idx="2">
+            <a:schemeClr val="accent1"/>
+          </a:effectRef>
+          <a:fontRef idx="minor">
+            <a:schemeClr val="lt1"/>
+          </a:fontRef>
+        </p:style>
+        <p:txBody>
+          <a:bodyPr rtlCol="0" anchor="ctr"/>
+          <a:lstStyle/>
+          <a:p>
+            <a:pPr algn="ctr"/>
+          </a:p>
+        </p:txBody>
+      </p:sp>
+      <p:sp>
+        <p:nvSpPr>
+          <p:cNvPr id="21" name="TextBox 20"/>
+          <p:cNvSpPr txBox="1"/>
+          <p:nvPr/>
+        </p:nvSpPr>
+        <p:spPr>
+          <a:xfrm>
+            <a:off x="6400800" y="3088640"/>
+            <a:ext cx="1097280" cy="274320"/>
+          </a:xfrm>
+          <a:prstGeom prst="rect">
+            <a:avLst/>
+          </a:prstGeom>
+          <a:noFill/>
+        </p:spPr>
+        <p:txBody>
+          <a:bodyPr wrap="square">
+            <a:spAutoFit/>
+          </a:bodyPr>
+          <a:lstStyle/>
+          <a:p>
+            <a:pPr algn="ctr">
+              <a:defRPr sz="1000" b="1">
+                <a:solidFill>
+                  <a:srgbClr val="E67E22"/>
+                </a:solidFill>
+                <a:latin typeface="Calibri"/>
+              </a:defRPr>
+            </a:pPr>
+            <a:r>
+              <a:t>30-70%</a:t>
+            </a:r>
+          </a:p>
+        </p:txBody>
+      </p:sp>
+      <p:sp>
+        <p:nvSpPr>
+          <p:cNvPr id="22" name="TextBox 21"/>
+          <p:cNvSpPr txBox="1"/>
+          <p:nvPr/>
+        </p:nvSpPr>
+        <p:spPr>
+          <a:xfrm>
+            <a:off x="7498079" y="3088640"/>
+            <a:ext cx="1371600" cy="274320"/>
+          </a:xfrm>
+          <a:prstGeom prst="rect">
+            <a:avLst/>
+          </a:prstGeom>
+          <a:noFill/>
+        </p:spPr>
+        <p:txBody>
+          <a:bodyPr wrap="square">
+            <a:spAutoFit/>
+          </a:bodyPr>
+          <a:lstStyle/>
+          <a:p>
+            <a:pPr algn="ctr">
+              <a:defRPr sz="1000" b="0">
+                <a:solidFill>
+                  <a:srgbClr val="2C3E50"/>
+                </a:solidFill>
+                <a:latin typeface="Calibri"/>
+              </a:defRPr>
+            </a:pPr>
+            <a:r>
+              <a:t>Revue manuelle</a:t>
+            </a:r>
+          </a:p>
+        </p:txBody>
+      </p:sp>
+      <p:sp>
+        <p:nvSpPr>
+          <p:cNvPr id="23" name="TextBox 22"/>
+          <p:cNvSpPr txBox="1"/>
+          <p:nvPr/>
+        </p:nvSpPr>
+        <p:spPr>
+          <a:xfrm>
+            <a:off x="8869680" y="3088640"/>
+            <a:ext cx="2651760" cy="274320"/>
+          </a:xfrm>
+          <a:prstGeom prst="rect">
+            <a:avLst/>
+          </a:prstGeom>
+          <a:noFill/>
+        </p:spPr>
+        <p:txBody>
+          <a:bodyPr wrap="square">
+            <a:spAutoFit/>
+          </a:bodyPr>
+          <a:lstStyle/>
+          <a:p>
+            <a:pPr algn="ctr">
+              <a:defRPr sz="1000" b="0">
+                <a:solidFill>
+                  <a:srgbClr val="7F8C8D"/>
+                </a:solidFill>
+                <a:latin typeface="Calibri"/>
+              </a:defRPr>
+            </a:pPr>
+            <a:r>
+              <a:t>Verification humaine requise</a:t>
+            </a:r>
+          </a:p>
+        </p:txBody>
+      </p:sp>
+      <p:sp>
+        <p:nvSpPr>
+          <p:cNvPr id="24" name="Rectangle 23"/>
+          <p:cNvSpPr/>
+          <p:nvPr/>
+        </p:nvSpPr>
+        <p:spPr>
+          <a:xfrm>
+            <a:off x="6400800" y="3429000"/>
+            <a:ext cx="1097280" cy="320040"/>
+          </a:xfrm>
+          <a:prstGeom prst="rect">
+            <a:avLst/>
+          </a:prstGeom>
+          <a:solidFill>
+            <a:srgbClr val="FFFFFF"/>
+          </a:solidFill>
+          <a:ln>
+            <a:solidFill>
+              <a:srgbClr val="C0392B"/>
+            </a:solidFill>
+          </a:ln>
+        </p:spPr>
+        <p:style>
+          <a:lnRef idx="1">
+            <a:schemeClr val="accent1"/>
+          </a:lnRef>
+          <a:fillRef idx="3">
+            <a:schemeClr val="accent1"/>
+          </a:fillRef>
+          <a:effectRef idx="2">
+            <a:schemeClr val="accent1"/>
+          </a:effectRef>
+          <a:fontRef idx="minor">
+            <a:schemeClr val="lt1"/>
+          </a:fontRef>
+        </p:style>
+        <p:txBody>
+          <a:bodyPr rtlCol="0" anchor="ctr"/>
+          <a:lstStyle/>
+          <a:p>
+            <a:pPr algn="ctr"/>
+          </a:p>
+        </p:txBody>
+      </p:sp>
+      <p:sp>
+        <p:nvSpPr>
+          <p:cNvPr id="25" name="TextBox 24"/>
+          <p:cNvSpPr txBox="1"/>
+          <p:nvPr/>
+        </p:nvSpPr>
+        <p:spPr>
+          <a:xfrm>
+            <a:off x="6400800" y="3454400"/>
+            <a:ext cx="1097280" cy="274320"/>
+          </a:xfrm>
+          <a:prstGeom prst="rect">
+            <a:avLst/>
+          </a:prstGeom>
+          <a:noFill/>
+        </p:spPr>
+        <p:txBody>
+          <a:bodyPr wrap="square">
+            <a:spAutoFit/>
+          </a:bodyPr>
+          <a:lstStyle/>
+          <a:p>
+            <a:pPr algn="ctr">
+              <a:defRPr sz="1000" b="1">
+                <a:solidFill>
+                  <a:srgbClr val="C0392B"/>
+                </a:solidFill>
+                <a:latin typeface="Calibri"/>
+              </a:defRPr>
+            </a:pPr>
+            <a:r>
+              <a:t>0-30%</a:t>
+            </a:r>
+          </a:p>
+        </p:txBody>
+      </p:sp>
+      <p:sp>
+        <p:nvSpPr>
+          <p:cNvPr id="26" name="TextBox 25"/>
+          <p:cNvSpPr txBox="1"/>
+          <p:nvPr/>
+        </p:nvSpPr>
+        <p:spPr>
+          <a:xfrm>
+            <a:off x="7498079" y="3454400"/>
+            <a:ext cx="1371600" cy="274320"/>
+          </a:xfrm>
+          <a:prstGeom prst="rect">
+            <a:avLst/>
+          </a:prstGeom>
+          <a:noFill/>
+        </p:spPr>
+        <p:txBody>
+          <a:bodyPr wrap="square">
+            <a:spAutoFit/>
+          </a:bodyPr>
+          <a:lstStyle/>
+          <a:p>
+            <a:pPr algn="ctr">
+              <a:defRPr sz="1000" b="0">
+                <a:solidFill>
+                  <a:srgbClr val="2C3E50"/>
+                </a:solidFill>
+                <a:latin typeface="Calibri"/>
+              </a:defRPr>
+            </a:pPr>
+            <a:r>
+              <a:t>Signalement</a:t>
+            </a:r>
+          </a:p>
+        </p:txBody>
+      </p:sp>
+      <p:sp>
+        <p:nvSpPr>
+          <p:cNvPr id="27" name="TextBox 26"/>
+          <p:cNvSpPr txBox="1"/>
+          <p:nvPr/>
+        </p:nvSpPr>
+        <p:spPr>
+          <a:xfrm>
+            <a:off x="8869680" y="3454400"/>
+            <a:ext cx="2651760" cy="274320"/>
+          </a:xfrm>
+          <a:prstGeom prst="rect">
+            <a:avLst/>
+          </a:prstGeom>
+          <a:noFill/>
+        </p:spPr>
+        <p:txBody>
+          <a:bodyPr wrap="square">
+            <a:spAutoFit/>
+          </a:bodyPr>
+          <a:lstStyle/>
+          <a:p>
+            <a:pPr algn="ctr">
+              <a:defRPr sz="1000" b="0">
+                <a:solidFill>
+                  <a:srgbClr val="7F8C8D"/>
+                </a:solidFill>
+                <a:latin typeface="Calibri"/>
+              </a:defRPr>
+            </a:pPr>
+            <a:r>
+              <a:t>Rejet recommande</a:t>
+            </a:r>
+          </a:p>
+        </p:txBody>
+      </p:sp>
+      <p:sp>
+        <p:nvSpPr>
+          <p:cNvPr id="28" name="Rounded Rectangle 27"/>
+          <p:cNvSpPr/>
+          <p:nvPr/>
+        </p:nvSpPr>
+        <p:spPr>
+          <a:xfrm>
+            <a:off x="6217920" y="4297680"/>
+            <a:ext cx="5486400" cy="1920240"/>
+          </a:xfrm>
+          <a:prstGeom prst="roundRect">
+            <a:avLst/>
+          </a:prstGeom>
+          <a:solidFill>
+            <a:srgbClr val="FDF2E9"/>
+          </a:solidFill>
+          <a:ln w="25400">
+            <a:solidFill>
+              <a:srgbClr val="E67E22"/>
+            </a:solidFill>
+          </a:ln>
+        </p:spPr>
+        <p:style>
+          <a:lnRef idx="1">
+            <a:schemeClr val="accent1"/>
+          </a:lnRef>
+          <a:fillRef idx="3">
+            <a:schemeClr val="accent1"/>
+          </a:fillRef>
+          <a:effectRef idx="2">
+            <a:schemeClr val="accent1"/>
+          </a:effectRef>
+          <a:fontRef idx="minor">
+            <a:schemeClr val="lt1"/>
+          </a:fontRef>
+        </p:style>
+        <p:txBody>
+          <a:bodyPr rtlCol="0" anchor="ctr"/>
+          <a:lstStyle/>
+          <a:p>
+            <a:pPr algn="ctr"/>
+          </a:p>
+        </p:txBody>
+      </p:sp>
+      <p:sp>
+        <p:nvSpPr>
+          <p:cNvPr id="29" name="TextBox 28"/>
+          <p:cNvSpPr txBox="1"/>
+          <p:nvPr/>
+        </p:nvSpPr>
+        <p:spPr>
+          <a:xfrm>
+            <a:off x="6400800" y="4389120"/>
+            <a:ext cx="5120640" cy="365760"/>
+          </a:xfrm>
+          <a:prstGeom prst="rect">
+            <a:avLst/>
+          </a:prstGeom>
+          <a:noFill/>
+        </p:spPr>
+        <p:txBody>
+          <a:bodyPr wrap="square">
+            <a:spAutoFit/>
+          </a:bodyPr>
+          <a:lstStyle/>
+          <a:p>
+            <a:pPr algn="l">
+              <a:defRPr sz="1400" b="1">
+                <a:solidFill>
+                  <a:srgbClr val="E67E22"/>
+                </a:solidFill>
+                <a:latin typeface="Calibri"/>
+              </a:defRPr>
+            </a:pPr>
+            <a:r>
+              <a:t>Seuil optimal : Youden's J statistic</a:t>
+            </a:r>
+          </a:p>
+        </p:txBody>
+      </p:sp>
+      <p:sp>
+        <p:nvSpPr>
+          <p:cNvPr id="30" name="TextBox 29"/>
+          <p:cNvSpPr txBox="1"/>
+          <p:nvPr/>
+        </p:nvSpPr>
+        <p:spPr>
+          <a:xfrm>
+            <a:off x="6400800" y="4754880"/>
+            <a:ext cx="5120640" cy="3657600"/>
+          </a:xfrm>
+          <a:prstGeom prst="rect">
+            <a:avLst/>
+          </a:prstGeom>
+          <a:noFill/>
+        </p:spPr>
+        <p:txBody>
+          <a:bodyPr wrap="square">
+            <a:spAutoFit/>
+          </a:bodyPr>
+          <a:lstStyle/>
+          <a:p>
+            <a:pPr>
+              <a:spcAft>
+                <a:spcPts val="100"/>
+              </a:spcAft>
+              <a:defRPr sz="1100">
+                <a:solidFill>
+                  <a:srgbClr val="2C3E50"/>
+                </a:solidFill>
+                <a:latin typeface="Calibri"/>
+              </a:defRPr>
+            </a:pPr>
+            <a:r>
+              <a:t>J = Sensibilite + Specificite - 1</a:t>
+            </a:r>
+          </a:p>
+          <a:p>
+            <a:pPr>
+              <a:spcAft>
+                <a:spcPts val="100"/>
+              </a:spcAft>
+              <a:defRPr sz="1100">
+                <a:solidFill>
+                  <a:srgbClr val="2C3E50"/>
+                </a:solidFill>
+                <a:latin typeface="Calibri"/>
+              </a:defRPr>
+            </a:pPr>
+            <a:r>
+              <a:t>Maximise simultanement vrais positifs et negatifs</a:t>
+            </a:r>
+          </a:p>
+          <a:p>
+            <a:pPr>
+              <a:spcAft>
+                <a:spcPts val="100"/>
+              </a:spcAft>
+              <a:defRPr sz="1100">
+                <a:solidFill>
+                  <a:srgbClr val="2C3E50"/>
+                </a:solidFill>
+                <a:latin typeface="Calibri"/>
+              </a:defRPr>
+            </a:pPr>
+            <a:r>
+              <a:t>Adapte au desequilibre de classes (2-3% echecs)</a:t>
+            </a:r>
+          </a:p>
+          <a:p>
+            <a:pPr>
+              <a:spcAft>
+                <a:spcPts val="100"/>
+              </a:spcAft>
+              <a:defRPr sz="1100">
+                <a:solidFill>
+                  <a:srgbClr val="2C3E50"/>
+                </a:solidFill>
+                <a:latin typeface="Calibri"/>
+              </a:defRPr>
+            </a:pPr>
+            <a:r>
+              <a:t>Seuil calcule : 0.9805 (cours ROC)</a:t>
+            </a:r>
+          </a:p>
+        </p:txBody>
+      </p:sp>
+      <p:sp>
+        <p:nvSpPr>
+          <p:cNvPr id="31" name="TextBox 30"/>
+          <p:cNvSpPr txBox="1"/>
+          <p:nvPr/>
+        </p:nvSpPr>
+        <p:spPr>
+          <a:xfrm>
+            <a:off x="11155680" y="6400800"/>
+            <a:ext cx="914400" cy="365760"/>
+          </a:xfrm>
+          <a:prstGeom prst="rect">
+            <a:avLst/>
+          </a:prstGeom>
+          <a:noFill/>
+        </p:spPr>
+        <p:txBody>
+          <a:bodyPr wrap="square">
+            <a:spAutoFit/>
+          </a:bodyPr>
+          <a:lstStyle/>
+          <a:p>
+            <a:pPr algn="r">
+              <a:defRPr sz="1000" b="0">
+                <a:solidFill>
+                  <a:srgbClr val="7F8C8D"/>
+                </a:solidFill>
+                <a:latin typeface="Calibri"/>
+              </a:defRPr>
+            </a:pPr>
+            <a:r>
+              <a:t>15/16</a:t>
+            </a:r>
+          </a:p>
+        </p:txBody>
+      </p:sp>
+    </p:spTree>
+  </p:cSld>
+  <p:clrMapOvr>
+    <a:masterClrMapping/>
+  </p:clrMapOvr>
+</p:sld>
+</file>
+
+<file path=ppt/slides/slide16.xml><?xml version="1.0" encoding="utf-8"?>
 <p:sld xmlns:a="http://schemas.openxmlformats.org/drawingml/2006/main" xmlns:p="http://schemas.openxmlformats.org/presentationml/2006/main" xmlns:r="http://schemas.openxmlformats.org/officeDocument/2006/relationships">
   <p:cSld>
     <p:bg>
@@ -13049,9 +14395,9 @@
           <a:p>
             <a:pPr>
               <a:spcAft>
-                <a:spcPts val="400"/>
+                <a:spcPts val="300"/>
               </a:spcAft>
-              <a:defRPr sz="1500">
+              <a:defRPr sz="1400">
                 <a:solidFill>
                   <a:srgbClr val="F2F3F4"/>
                 </a:solidFill>
@@ -13065,9 +14411,9 @@
           <a:p>
             <a:pPr>
               <a:spcAft>
-                <a:spcPts val="400"/>
+                <a:spcPts val="300"/>
               </a:spcAft>
-              <a:defRPr sz="1500">
+              <a:defRPr sz="1400">
                 <a:solidFill>
                   <a:srgbClr val="F2F3F4"/>
                 </a:solidFill>
@@ -13075,15 +14421,15 @@
               </a:defRPr>
             </a:pPr>
             <a:r>
-              <a:t>Ensemble ML (CatBoost+LightGBM+XGBoost + ADASYN + Optuna) : AUC = 0.9961, Rappel(echecs) = 98%</a:t>
+              <a:t>Ensemble ML (AUC=0.9961) : seuil Youden optimal, rappel echecs 98%</a:t>
             </a:r>
           </a:p>
           <a:p>
             <a:pPr>
               <a:spcAft>
-                <a:spcPts val="400"/>
+                <a:spcPts val="300"/>
               </a:spcAft>
-              <a:defRPr sz="1500">
+              <a:defRPr sz="1400">
                 <a:solidFill>
                   <a:srgbClr val="F2F3F4"/>
                 </a:solidFill>
@@ -13091,15 +14437,15 @@
               </a:defRPr>
             </a:pPr>
             <a:r>
-              <a:t>31 features enrichies (8 categories), seuils F1-max par modele + Youden (ensemble)</a:t>
+              <a:t>Workflow automatise : auto-approve / revue manuelle / signalement</a:t>
             </a:r>
           </a:p>
           <a:p>
             <a:pPr>
               <a:spcAft>
-                <a:spcPts val="400"/>
+                <a:spcPts val="300"/>
               </a:spcAft>
-              <a:defRPr sz="1500">
+              <a:defRPr sz="1400">
                 <a:solidFill>
                   <a:srgbClr val="F2F3F4"/>
                 </a:solidFill>
@@ -13107,15 +14453,15 @@
               </a:defRPr>
             </a:pPr>
             <a:r>
-              <a:t>Segmentation hybride : HDBSCAN (gros volumes) / KMeans (petits volumes), RFM auto-etiquete</a:t>
+              <a:t>Segmentation hybride HDBSCAN/KMeans adaptative selon taille BDD</a:t>
             </a:r>
           </a:p>
           <a:p>
             <a:pPr>
               <a:spcAft>
-                <a:spcPts val="400"/>
+                <a:spcPts val="300"/>
               </a:spcAft>
-              <a:defRPr sz="1500">
+              <a:defRPr sz="1400">
                 <a:solidFill>
                   <a:srgbClr val="F2F3F4"/>
                 </a:solidFill>
@@ -13123,15 +14469,15 @@
               </a:defRPr>
             </a:pPr>
             <a:r>
-              <a:t>Prevision LightGBM + Calendrier algerien (islamique + national) : MAE 318K DZD (+12.2% vs baseline)</a:t>
+              <a:t>Prevision LightGBM + Calendrier algerien + date de depart flexible</a:t>
             </a:r>
           </a:p>
           <a:p>
             <a:pPr>
               <a:spcAft>
-                <a:spcPts val="400"/>
+                <a:spcPts val="300"/>
               </a:spcAft>
-              <a:defRPr sz="1500">
+              <a:defRPr sz="1400">
                 <a:solidFill>
                   <a:srgbClr val="F2F3F4"/>
                 </a:solidFill>
@@ -13139,15 +14485,15 @@
               </a:defRPr>
             </a:pPr>
             <a:r>
-              <a:t>Reentrainement automatique depuis la BDD + Optuna auto-tuning</a:t>
+              <a:t>Securite : JWT+RBAC, rate limiting, CSRF, requetes preparees</a:t>
             </a:r>
           </a:p>
           <a:p>
             <a:pPr>
               <a:spcAft>
-                <a:spcPts val="400"/>
+                <a:spcPts val="300"/>
               </a:spcAft>
-              <a:defRPr sz="1500">
+              <a:defRPr sz="1400">
                 <a:solidFill>
                   <a:srgbClr val="F2F3F4"/>
                 </a:solidFill>
@@ -13155,7 +14501,7 @@
               </a:defRPr>
             </a:pPr>
             <a:r>
-              <a:t>Interface multilingue complete (AR/FR/EN + RTL) + integration LLM Gemini</a:t>
+              <a:t>Interface multilingue (AR/FR/EN + RTL) + LLM Gemini</a:t>
             </a:r>
           </a:p>
         </p:txBody>
@@ -13220,9 +14566,9 @@
           <a:p>
             <a:pPr>
               <a:spcAft>
-                <a:spcPts val="400"/>
+                <a:spcPts val="300"/>
               </a:spcAft>
-              <a:defRPr sz="1500">
+              <a:defRPr sz="1400">
                 <a:solidFill>
                   <a:srgbClr val="F2F3F4"/>
                 </a:solidFill>
@@ -13230,15 +14576,15 @@
               </a:defRPr>
             </a:pPr>
             <a:r>
-              <a:t>Deploiement sur donnees reelles algeriennes (un clic)</a:t>
+              <a:t>Deploiement sur donnees reelles algeriennes</a:t>
             </a:r>
           </a:p>
           <a:p>
             <a:pPr>
               <a:spcAft>
-                <a:spcPts val="400"/>
+                <a:spcPts val="300"/>
               </a:spcAft>
-              <a:defRPr sz="1500">
+              <a:defRPr sz="1400">
                 <a:solidFill>
                   <a:srgbClr val="F2F3F4"/>
                 </a:solidFill>
@@ -13246,15 +14592,15 @@
               </a:defRPr>
             </a:pPr>
             <a:r>
-              <a:t>Calendrier algerien complet integre (islamique + national)</a:t>
+              <a:t>Evenements commerciaux (rentree, promotions)</a:t>
             </a:r>
           </a:p>
           <a:p>
             <a:pPr>
               <a:spcAft>
-                <a:spcPts val="400"/>
+                <a:spcPts val="300"/>
               </a:spcAft>
-              <a:defRPr sz="1500">
+              <a:defRPr sz="1400">
                 <a:solidFill>
                   <a:srgbClr val="F2F3F4"/>
                 </a:solidFill>
@@ -13268,9 +14614,9 @@
           <a:p>
             <a:pPr>
               <a:spcAft>
-                <a:spcPts val="400"/>
+                <a:spcPts val="300"/>
               </a:spcAft>
-              <a:defRPr sz="1500">
+              <a:defRPr sz="1400">
                 <a:solidFill>
                   <a:srgbClr val="F2F3F4"/>
                 </a:solidFill>
@@ -13429,7 +14775,7 @@
               </a:defRPr>
             </a:pPr>
             <a:r>
-              <a:t>15/15</a:t>
+              <a:t>16/16</a:t>
             </a:r>
           </a:p>
         </p:txBody>
@@ -14357,7 +15703,7 @@
               </a:defRPr>
             </a:pPr>
             <a:r>
-              <a:t>2/15</a:t>
+              <a:t>2/16</a:t>
             </a:r>
           </a:p>
         </p:txBody>
@@ -14956,7 +16302,7 @@
               </a:defRPr>
             </a:pPr>
             <a:r>
-              <a:t>3/15</a:t>
+              <a:t>3/16</a:t>
             </a:r>
           </a:p>
         </p:txBody>
@@ -15164,7 +16510,7 @@
               </a:defRPr>
             </a:pPr>
             <a:r>
-              <a:t>4/15</a:t>
+              <a:t>4/16</a:t>
             </a:r>
           </a:p>
         </p:txBody>
@@ -15408,7 +16754,7 @@
               </a:defRPr>
             </a:pPr>
             <a:r>
-              <a:t>5/15</a:t>
+              <a:t>5/16</a:t>
             </a:r>
           </a:p>
         </p:txBody>
@@ -15616,7 +16962,7 @@
               </a:defRPr>
             </a:pPr>
             <a:r>
-              <a:t>6/15</a:t>
+              <a:t>6/16</a:t>
             </a:r>
           </a:p>
         </p:txBody>
@@ -15824,7 +17170,7 @@
               </a:defRPr>
             </a:pPr>
             <a:r>
-              <a:t>7/15</a:t>
+              <a:t>7/16</a:t>
             </a:r>
           </a:p>
         </p:txBody>
@@ -16032,7 +17378,7 @@
               </a:defRPr>
             </a:pPr>
             <a:r>
-              <a:t>8/15</a:t>
+              <a:t>8/16</a:t>
             </a:r>
           </a:p>
         </p:txBody>
@@ -17410,7 +18756,7 @@
               </a:defRPr>
             </a:pPr>
             <a:r>
-              <a:t>9/15</a:t>
+              <a:t>9/16</a:t>
             </a:r>
           </a:p>
         </p:txBody>
